--- a/Agenda_Facil_Presentacion.pptx
+++ b/Agenda_Facil_Presentacion.pptx
@@ -4,6 +4,9 @@
   <p:sldMasterIdLst>
     <p:sldMasterId id="2147483648" r:id="rId1"/>
   </p:sldMasterIdLst>
+  <p:notesMasterIdLst>
+    <p:notesMasterId r:id="rId19"/>
+  </p:notesMasterIdLst>
   <p:sldIdLst>
     <p:sldId id="256" r:id="rId2"/>
     <p:sldId id="257" r:id="rId3"/>
@@ -23,9 +26,6 @@
     <p:sldId id="271" r:id="rId17"/>
     <p:sldId id="272" r:id="rId18"/>
   </p:sldIdLst>
-  <p:notesMasterIdLst>
-    <p:notesMasterId r:id="rId19"/>
-  </p:notesMasterIdLst>
   <p:sldSz cx="12192000" cy="6858000"/>
   <p:notesSz cx="6858000" cy="12192000"/>
   <p:defaultTextStyle>
@@ -120,6 +120,11 @@
       </a:defRPr>
     </a:lvl9pPr>
   </p:defaultTextStyle>
+  <p:extLst>
+    <p:ext uri="{EFAFB233-063F-42B5-8137-9DF3F51BA10A}">
+      <p15:sldGuideLst xmlns:p15="http://schemas.microsoft.com/office/powerpoint/2012/main"/>
+    </p:ext>
+  </p:extLst>
 </p:presentation>
 </file>
 
@@ -145,234 +150,10 @@
           <a:chExt cx="0" cy="0"/>
         </a:xfrm>
       </p:grpSpPr>
-      <p:sp>
-        <p:nvSpPr>
-          <p:cNvPr id="2" name="Header Placeholder 1"/>
-          <p:cNvSpPr>
-            <a:spLocks noGrp="1"/>
-          </p:cNvSpPr>
-          <p:nvPr>
-            <p:ph type="hdr" sz="quarter"/>
-          </p:nvPr>
-        </p:nvSpPr>
-        <p:spPr>
-          <a:xfrm>
-            <a:off x="0" y="0"/>
-            <a:ext cx="2971800" cy="458788"/>
-          </a:xfrm>
-          <a:prstGeom prst="rect">
-            <a:avLst/>
-          </a:prstGeom>
-        </p:spPr>
-        <p:txBody>
-          <a:bodyPr vert="horz" lIns="91440" tIns="45720" rIns="91440" bIns="45720" rtlCol="0"/>
-          <a:lstStyle>
-            <a:lvl1pPr algn="l">
-              <a:defRPr sz="1200"/>
-            </a:lvl1pPr>
-          </a:lstStyle>
-          <a:p>
-            <a:endParaRPr lang="en-US"/>
-          </a:p>
-        </p:txBody>
-      </p:sp>
-      <p:sp>
-        <p:nvSpPr>
-          <p:cNvPr id="3" name="Date Placeholder 2"/>
-          <p:cNvSpPr>
-            <a:spLocks noGrp="1"/>
-          </p:cNvSpPr>
-          <p:nvPr>
-            <p:ph type="dt" idx="1"/>
-          </p:nvPr>
-        </p:nvSpPr>
-        <p:spPr>
-          <a:xfrm>
-            <a:off x="3884613" y="0"/>
-            <a:ext cx="2971800" cy="458788"/>
-          </a:xfrm>
-          <a:prstGeom prst="rect">
-            <a:avLst/>
-          </a:prstGeom>
-        </p:spPr>
-        <p:txBody>
-          <a:bodyPr vert="horz" lIns="91440" tIns="45720" rIns="91440" bIns="45720" rtlCol="0"/>
-          <a:lstStyle>
-            <a:lvl1pPr algn="r">
-              <a:defRPr sz="1200"/>
-            </a:lvl1pPr>
-          </a:lstStyle>
-          <a:p>
-            <a:fld id="{5282F153-3F37-0F45-9E97-73ACFA13230C}" type="datetimeFigureOut">
-              <a:rPr lang="en-US"/>
-              <a:t>7/23/19</a:t>
-            </a:fld>
-            <a:endParaRPr lang="en-US"/>
-          </a:p>
-        </p:txBody>
-      </p:sp>
-      <p:sp>
-        <p:nvSpPr>
-          <p:cNvPr id="4" name="Slide Image Placeholder 3"/>
-          <p:cNvSpPr>
-            <a:spLocks noGrp="1" noRot="1" noChangeAspect="1"/>
-          </p:cNvSpPr>
-          <p:nvPr>
-            <p:ph type="sldImg" idx="2"/>
-          </p:nvPr>
-        </p:nvSpPr>
-        <p:spPr>
-          <a:xfrm>
-            <a:off x="685800" y="1143000"/>
-            <a:ext cx="5486400" cy="3086100"/>
-          </a:xfrm>
-          <a:prstGeom prst="rect">
-            <a:avLst/>
-          </a:prstGeom>
-          <a:noFill/>
-          <a:ln w="12700">
-            <a:solidFill>
-              <a:prstClr val="black"/>
-            </a:solidFill>
-          </a:ln>
-        </p:spPr>
-        <p:txBody>
-          <a:bodyPr vert="horz" lIns="91440" tIns="45720" rIns="91440" bIns="45720" rtlCol="0" anchor="ctr"/>
-          <a:lstStyle/>
-          <a:p>
-            <a:endParaRPr lang="en-US"/>
-          </a:p>
-        </p:txBody>
-      </p:sp>
-      <p:sp>
-        <p:nvSpPr>
-          <p:cNvPr id="5" name="Notes Placeholder 4"/>
-          <p:cNvSpPr>
-            <a:spLocks noGrp="1"/>
-          </p:cNvSpPr>
-          <p:nvPr>
-            <p:ph type="body" sz="quarter" idx="3"/>
-          </p:nvPr>
-        </p:nvSpPr>
-        <p:spPr>
-          <a:xfrm>
-            <a:off x="685800" y="4400550"/>
-            <a:ext cx="5486400" cy="3600450"/>
-          </a:xfrm>
-          <a:prstGeom prst="rect">
-            <a:avLst/>
-          </a:prstGeom>
-        </p:spPr>
-        <p:txBody>
-          <a:bodyPr vert="horz" lIns="91440" tIns="45720" rIns="91440" bIns="45720" rtlCol="0"/>
-          <a:lstStyle/>
-          <a:p>
-            <a:pPr lvl="0"/>
-            <a:r>
-              <a:rPr lang="en-US"/>
-              <a:t>Click to edit Master text styles</a:t>
-            </a:r>
-          </a:p>
-          <a:p>
-            <a:pPr lvl="1"/>
-            <a:r>
-              <a:rPr lang="en-US"/>
-              <a:t>Second level</a:t>
-            </a:r>
-          </a:p>
-          <a:p>
-            <a:pPr lvl="2"/>
-            <a:r>
-              <a:rPr lang="en-US"/>
-              <a:t>Third level</a:t>
-            </a:r>
-          </a:p>
-          <a:p>
-            <a:pPr lvl="3"/>
-            <a:r>
-              <a:rPr lang="en-US"/>
-              <a:t>Fourth level</a:t>
-            </a:r>
-          </a:p>
-          <a:p>
-            <a:pPr lvl="4"/>
-            <a:r>
-              <a:rPr lang="en-US"/>
-              <a:t>Fifth level</a:t>
-            </a:r>
-          </a:p>
-        </p:txBody>
-      </p:sp>
-      <p:sp>
-        <p:nvSpPr>
-          <p:cNvPr id="6" name="Footer Placeholder 5"/>
-          <p:cNvSpPr>
-            <a:spLocks noGrp="1"/>
-          </p:cNvSpPr>
-          <p:nvPr>
-            <p:ph type="ftr" sz="quarter" idx="4"/>
-          </p:nvPr>
-        </p:nvSpPr>
-        <p:spPr>
-          <a:xfrm>
-            <a:off x="0" y="8685213"/>
-            <a:ext cx="2971800" cy="458787"/>
-          </a:xfrm>
-          <a:prstGeom prst="rect">
-            <a:avLst/>
-          </a:prstGeom>
-        </p:spPr>
-        <p:txBody>
-          <a:bodyPr vert="horz" lIns="91440" tIns="45720" rIns="91440" bIns="45720" rtlCol="0" anchor="b"/>
-          <a:lstStyle>
-            <a:lvl1pPr algn="l">
-              <a:defRPr sz="1200"/>
-            </a:lvl1pPr>
-          </a:lstStyle>
-          <a:p>
-            <a:endParaRPr lang="en-US"/>
-          </a:p>
-        </p:txBody>
-      </p:sp>
-      <p:sp>
-        <p:nvSpPr>
-          <p:cNvPr id="7" name="Slide Number Placeholder 6"/>
-          <p:cNvSpPr>
-            <a:spLocks noGrp="1"/>
-          </p:cNvSpPr>
-          <p:nvPr>
-            <p:ph type="sldNum" sz="quarter" idx="5"/>
-          </p:nvPr>
-        </p:nvSpPr>
-        <p:spPr>
-          <a:xfrm>
-            <a:off x="3884613" y="8685213"/>
-            <a:ext cx="2971800" cy="458787"/>
-          </a:xfrm>
-          <a:prstGeom prst="rect">
-            <a:avLst/>
-          </a:prstGeom>
-        </p:spPr>
-        <p:txBody>
-          <a:bodyPr vert="horz" lIns="91440" tIns="45720" rIns="91440" bIns="45720" rtlCol="0" anchor="b"/>
-          <a:lstStyle>
-            <a:lvl1pPr algn="r">
-              <a:defRPr sz="1200"/>
-            </a:lvl1pPr>
-          </a:lstStyle>
-          <a:p>
-            <a:fld id="{CE5E9CC1-C706-0F49-92D6-E571CC5EEA8F}" type="slidenum">
-              <a:rPr lang="en-US"/>
-              <a:t>‹#›</a:t>
-            </a:fld>
-            <a:endParaRPr lang="en-US"/>
-          </a:p>
-        </p:txBody>
-      </p:sp>
     </p:spTree>
     <p:extLst>
       <p:ext uri="{BB962C8B-B14F-4D97-AF65-F5344CB8AC3E}">
-        <p14:creationId xmlns:p14="http://schemas.microsoft.com/office/powerpoint/2010/main" val="1024086991"/>
+        <p14:creationId xmlns:p14="http://schemas.microsoft.com/office/powerpoint/2010/main" val="4135894582"/>
       </p:ext>
     </p:extLst>
   </p:cSld>
@@ -516,10 +297,6 @@
           <a:bodyPr/>
           <a:lstStyle/>
           <a:p>
-            <a:r>
-              <a:rPr lang="en-US" dirty="0"/>
-              <a:t/>
-            </a:r>
             <a:endParaRPr lang="en-US" dirty="0"/>
           </a:p>
         </p:txBody>
@@ -604,10 +381,6 @@
           <a:bodyPr/>
           <a:lstStyle/>
           <a:p>
-            <a:r>
-              <a:rPr lang="en-US" dirty="0"/>
-              <a:t/>
-            </a:r>
             <a:endParaRPr lang="en-US" dirty="0"/>
           </a:p>
         </p:txBody>
@@ -692,10 +465,6 @@
           <a:bodyPr/>
           <a:lstStyle/>
           <a:p>
-            <a:r>
-              <a:rPr lang="en-US" dirty="0"/>
-              <a:t/>
-            </a:r>
             <a:endParaRPr lang="en-US" dirty="0"/>
           </a:p>
         </p:txBody>
@@ -780,10 +549,6 @@
           <a:bodyPr/>
           <a:lstStyle/>
           <a:p>
-            <a:r>
-              <a:rPr lang="en-US" dirty="0"/>
-              <a:t/>
-            </a:r>
             <a:endParaRPr lang="en-US" dirty="0"/>
           </a:p>
         </p:txBody>
@@ -868,10 +633,6 @@
           <a:bodyPr/>
           <a:lstStyle/>
           <a:p>
-            <a:r>
-              <a:rPr lang="en-US" dirty="0"/>
-              <a:t/>
-            </a:r>
             <a:endParaRPr lang="en-US" dirty="0"/>
           </a:p>
         </p:txBody>
@@ -956,10 +717,6 @@
           <a:bodyPr/>
           <a:lstStyle/>
           <a:p>
-            <a:r>
-              <a:rPr lang="en-US" dirty="0"/>
-              <a:t/>
-            </a:r>
             <a:endParaRPr lang="en-US" dirty="0"/>
           </a:p>
         </p:txBody>
@@ -1044,10 +801,6 @@
           <a:bodyPr/>
           <a:lstStyle/>
           <a:p>
-            <a:r>
-              <a:rPr lang="en-US" dirty="0"/>
-              <a:t/>
-            </a:r>
             <a:endParaRPr lang="en-US" dirty="0"/>
           </a:p>
         </p:txBody>
@@ -1132,10 +885,6 @@
           <a:bodyPr/>
           <a:lstStyle/>
           <a:p>
-            <a:r>
-              <a:rPr lang="en-US" dirty="0"/>
-              <a:t/>
-            </a:r>
             <a:endParaRPr lang="en-US" dirty="0"/>
           </a:p>
         </p:txBody>
@@ -1220,10 +969,6 @@
           <a:bodyPr/>
           <a:lstStyle/>
           <a:p>
-            <a:r>
-              <a:rPr lang="en-US" dirty="0"/>
-              <a:t/>
-            </a:r>
             <a:endParaRPr lang="en-US" dirty="0"/>
           </a:p>
         </p:txBody>
@@ -1308,10 +1053,6 @@
           <a:bodyPr/>
           <a:lstStyle/>
           <a:p>
-            <a:r>
-              <a:rPr lang="en-US" dirty="0"/>
-              <a:t/>
-            </a:r>
             <a:endParaRPr lang="en-US" dirty="0"/>
           </a:p>
         </p:txBody>
@@ -1396,10 +1137,6 @@
           <a:bodyPr/>
           <a:lstStyle/>
           <a:p>
-            <a:r>
-              <a:rPr lang="en-US" dirty="0"/>
-              <a:t/>
-            </a:r>
             <a:endParaRPr lang="en-US" dirty="0"/>
           </a:p>
         </p:txBody>
@@ -1484,10 +1221,6 @@
           <a:bodyPr/>
           <a:lstStyle/>
           <a:p>
-            <a:r>
-              <a:rPr lang="en-US" dirty="0"/>
-              <a:t/>
-            </a:r>
             <a:endParaRPr lang="en-US" dirty="0"/>
           </a:p>
         </p:txBody>
@@ -1572,10 +1305,6 @@
           <a:bodyPr/>
           <a:lstStyle/>
           <a:p>
-            <a:r>
-              <a:rPr lang="en-US" dirty="0"/>
-              <a:t/>
-            </a:r>
             <a:endParaRPr lang="en-US" dirty="0"/>
           </a:p>
         </p:txBody>
@@ -1660,10 +1389,6 @@
           <a:bodyPr/>
           <a:lstStyle/>
           <a:p>
-            <a:r>
-              <a:rPr lang="en-US" dirty="0"/>
-              <a:t/>
-            </a:r>
             <a:endParaRPr lang="en-US" dirty="0"/>
           </a:p>
         </p:txBody>
@@ -1748,10 +1473,6 @@
           <a:bodyPr/>
           <a:lstStyle/>
           <a:p>
-            <a:r>
-              <a:rPr lang="en-US" dirty="0"/>
-              <a:t/>
-            </a:r>
             <a:endParaRPr lang="en-US" dirty="0"/>
           </a:p>
         </p:txBody>
@@ -1836,10 +1557,6 @@
           <a:bodyPr/>
           <a:lstStyle/>
           <a:p>
-            <a:r>
-              <a:rPr lang="en-US" dirty="0"/>
-              <a:t/>
-            </a:r>
             <a:endParaRPr lang="en-US" dirty="0"/>
           </a:p>
         </p:txBody>
@@ -1924,10 +1641,6 @@
           <a:bodyPr/>
           <a:lstStyle/>
           <a:p>
-            <a:r>
-              <a:rPr lang="en-US" dirty="0"/>
-              <a:t/>
-            </a:r>
             <a:endParaRPr lang="en-US" dirty="0"/>
           </a:p>
         </p:txBody>
@@ -2001,6 +1714,11 @@
 <file path=ppt/slideMasters/slideMaster1.xml><?xml version="1.0" encoding="utf-8"?>
 <p:sldMaster xmlns:a="http://schemas.openxmlformats.org/drawingml/2006/main" xmlns:r="http://schemas.openxmlformats.org/officeDocument/2006/relationships" xmlns:p="http://schemas.openxmlformats.org/presentationml/2006/main">
   <p:cSld>
+    <p:bg>
+      <p:bgRef idx="1001">
+        <a:schemeClr val="bg1"/>
+      </p:bgRef>
+    </p:bg>
     <p:spTree>
       <p:nvGrpSpPr>
         <p:cNvPr id="1" name=""/>
@@ -2283,6 +2001,7 @@
         <a:solidFill>
           <a:srgbClr val="01464C"/>
         </a:solidFill>
+        <a:effectLst/>
       </p:bgPr>
     </p:bg>
     <p:spTree>
@@ -2341,45 +2060,6 @@
       </p:sp>
       <p:sp>
         <p:nvSpPr>
-          <p:cNvPr id="4" name="Text 2"/>
-          <p:cNvSpPr txBox="1"/>
-          <p:nvPr/>
-        </p:nvSpPr>
-        <p:spPr>
-          <a:xfrm>
-            <a:off x="548640" y="1417320"/>
-            <a:ext cx="8229600" cy="320040"/>
-          </a:xfrm>
-          <a:prstGeom prst="rect">
-            <a:avLst/>
-          </a:prstGeom>
-          <a:noFill/>
-          <a:ln/>
-        </p:spPr>
-        <p:txBody>
-          <a:bodyPr wrap="square" lIns="0" tIns="0" rIns="0" bIns="0" rtlCol="0" anchor="ctr"/>
-          <a:lstStyle/>
-          <a:p>
-            <a:pPr indent="0" marL="0">
-              <a:buNone/>
-            </a:pPr>
-            <a:r>
-              <a:rPr lang="en-US" sz="1300" b="1" spc="200" kern="0" dirty="0">
-                <a:solidFill>
-                  <a:srgbClr val="F4A300"/>
-                </a:solidFill>
-                <a:latin typeface="Arial" pitchFamily="34" charset="0"/>
-                <a:ea typeface="Arial" pitchFamily="34" charset="-122"/>
-                <a:cs typeface="Arial" pitchFamily="34" charset="-120"/>
-              </a:rPr>
-              <a:t>PROYECTO DE INGENIERÍA DE SOFTWARE</a:t>
-            </a:r>
-            <a:endParaRPr lang="en-US" sz="1300" dirty="0"/>
-          </a:p>
-        </p:txBody>
-      </p:sp>
-      <p:sp>
-        <p:nvSpPr>
           <p:cNvPr id="5" name="Text 3"/>
           <p:cNvSpPr txBox="1"/>
           <p:nvPr/>
@@ -2399,7 +2079,7 @@
           <a:bodyPr wrap="square" lIns="0" tIns="0" rIns="0" bIns="0" rtlCol="0" anchor="ctr"/>
           <a:lstStyle/>
           <a:p>
-            <a:pPr indent="0" marL="0">
+            <a:pPr marL="0" indent="0">
               <a:buNone/>
             </a:pPr>
             <a:r>
@@ -2438,7 +2118,7 @@
           <a:bodyPr wrap="square" lIns="0" tIns="0" rIns="0" bIns="0" rtlCol="0" anchor="ctr"/>
           <a:lstStyle/>
           <a:p>
-            <a:pPr indent="0" marL="0">
+            <a:pPr marL="0" indent="0">
               <a:lnSpc>
                 <a:spcPts val="2400"/>
               </a:lnSpc>
@@ -2458,7 +2138,7 @@
             <a:endParaRPr lang="en-US" sz="1800" dirty="0"/>
           </a:p>
           <a:p>
-            <a:pPr indent="0" marL="0">
+            <a:pPr marL="0" indent="0">
               <a:lnSpc>
                 <a:spcPts val="2400"/>
               </a:lnSpc>
@@ -2520,11 +2200,11 @@
           <a:bodyPr wrap="square" lIns="0" tIns="0" rIns="0" bIns="0" rtlCol="0" anchor="ctr"/>
           <a:lstStyle/>
           <a:p>
-            <a:pPr indent="0" marL="0">
-              <a:buNone/>
-            </a:pPr>
-            <a:r>
-              <a:rPr lang="en-US" sz="1000" b="1" spc="100" kern="0" dirty="0">
+            <a:pPr marL="0" indent="0">
+              <a:buNone/>
+            </a:pPr>
+            <a:r>
+              <a:rPr lang="en-US" sz="1000" b="1" kern="0" spc="100" dirty="0">
                 <a:solidFill>
                   <a:srgbClr val="00A896"/>
                 </a:solidFill>
@@ -2559,11 +2239,11 @@
           <a:bodyPr wrap="square" lIns="0" tIns="0" rIns="0" bIns="0" rtlCol="0" anchor="ctr"/>
           <a:lstStyle/>
           <a:p>
-            <a:pPr indent="0" marL="0">
-              <a:buNone/>
-            </a:pPr>
-            <a:r>
-              <a:rPr lang="en-US" sz="1300" dirty="0">
+            <a:pPr marL="0" indent="0">
+              <a:buNone/>
+            </a:pPr>
+            <a:r>
+              <a:rPr lang="en-US" sz="2400" dirty="0">
                 <a:solidFill>
                   <a:srgbClr val="FFFFFF"/>
                 </a:solidFill>
@@ -2573,7 +2253,7 @@
               </a:rPr>
               <a:t>Sergio Alsina Quimbayo</a:t>
             </a:r>
-            <a:endParaRPr lang="en-US" sz="1300" dirty="0"/>
+            <a:endParaRPr lang="en-US" sz="2400" dirty="0"/>
           </a:p>
         </p:txBody>
       </p:sp>
@@ -2598,11 +2278,11 @@
           <a:bodyPr wrap="square" lIns="0" tIns="0" rIns="0" bIns="0" rtlCol="0" anchor="ctr"/>
           <a:lstStyle/>
           <a:p>
-            <a:pPr indent="0" marL="0">
-              <a:buNone/>
-            </a:pPr>
-            <a:r>
-              <a:rPr lang="en-US" sz="1000" b="1" spc="100" kern="0" dirty="0">
+            <a:pPr marL="0" indent="0">
+              <a:buNone/>
+            </a:pPr>
+            <a:r>
+              <a:rPr lang="en-US" sz="1000" b="1" kern="0" spc="100" dirty="0">
                 <a:solidFill>
                   <a:srgbClr val="00A896"/>
                 </a:solidFill>
@@ -2637,21 +2317,20 @@
           <a:bodyPr wrap="square" lIns="0" tIns="0" rIns="0" bIns="0" rtlCol="0" anchor="ctr"/>
           <a:lstStyle/>
           <a:p>
-            <a:pPr indent="0" marL="0">
-              <a:buNone/>
-            </a:pPr>
-            <a:r>
-              <a:rPr lang="en-US" sz="1300" dirty="0">
+            <a:pPr marL="0" indent="0">
+              <a:buNone/>
+            </a:pPr>
+            <a:r>
+              <a:rPr lang="en-US" sz="2400" dirty="0">
                 <a:solidFill>
                   <a:srgbClr val="FFFFFF"/>
                 </a:solidFill>
                 <a:latin typeface="Arial" pitchFamily="34" charset="0"/>
-                <a:ea typeface="Arial" pitchFamily="34" charset="-122"/>
-                <a:cs typeface="Arial" pitchFamily="34" charset="-120"/>
-              </a:rPr>
-              <a:t>[Materia]</a:t>
-            </a:r>
-            <a:endParaRPr lang="en-US" sz="1300" dirty="0"/>
+                <a:cs typeface="Arial" pitchFamily="34" charset="-120"/>
+              </a:rPr>
+              <a:t>Ingeniería de Software</a:t>
+            </a:r>
+            <a:endParaRPr lang="en-US" sz="2400" dirty="0"/>
           </a:p>
         </p:txBody>
       </p:sp>
@@ -2676,11 +2355,11 @@
           <a:bodyPr wrap="square" lIns="0" tIns="0" rIns="0" bIns="0" rtlCol="0" anchor="ctr"/>
           <a:lstStyle/>
           <a:p>
-            <a:pPr indent="0" marL="0">
-              <a:buNone/>
-            </a:pPr>
-            <a:r>
-              <a:rPr lang="en-US" sz="1000" b="1" spc="100" kern="0" dirty="0">
+            <a:pPr marL="0" indent="0">
+              <a:buNone/>
+            </a:pPr>
+            <a:r>
+              <a:rPr lang="en-US" sz="1000" b="1" kern="0" spc="100" dirty="0">
                 <a:solidFill>
                   <a:srgbClr val="00A896"/>
                 </a:solidFill>
@@ -2715,138 +2394,20 @@
           <a:bodyPr wrap="square" lIns="0" tIns="0" rIns="0" bIns="0" rtlCol="0" anchor="ctr"/>
           <a:lstStyle/>
           <a:p>
-            <a:pPr indent="0" marL="0">
-              <a:buNone/>
-            </a:pPr>
-            <a:r>
-              <a:rPr lang="en-US" sz="1300" dirty="0">
+            <a:pPr marL="0" indent="0">
+              <a:buNone/>
+            </a:pPr>
+            <a:r>
+              <a:rPr lang="en-US" sz="2400" dirty="0">
                 <a:solidFill>
                   <a:srgbClr val="FFFFFF"/>
                 </a:solidFill>
                 <a:latin typeface="Arial" pitchFamily="34" charset="0"/>
-                <a:ea typeface="Arial" pitchFamily="34" charset="-122"/>
-                <a:cs typeface="Arial" pitchFamily="34" charset="-120"/>
-              </a:rPr>
-              <a:t>[Docente]</a:t>
-            </a:r>
-            <a:endParaRPr lang="en-US" sz="1300" dirty="0"/>
-          </a:p>
-        </p:txBody>
-      </p:sp>
-      <p:sp>
-        <p:nvSpPr>
-          <p:cNvPr id="14" name="Text 12"/>
-          <p:cNvSpPr txBox="1"/>
-          <p:nvPr/>
-        </p:nvSpPr>
-        <p:spPr>
-          <a:xfrm>
-            <a:off x="548640" y="5404104"/>
-            <a:ext cx="2011680" cy="320040"/>
-          </a:xfrm>
-          <a:prstGeom prst="rect">
-            <a:avLst/>
-          </a:prstGeom>
-          <a:noFill/>
-          <a:ln/>
-        </p:spPr>
-        <p:txBody>
-          <a:bodyPr wrap="square" lIns="0" tIns="0" rIns="0" bIns="0" rtlCol="0" anchor="ctr"/>
-          <a:lstStyle/>
-          <a:p>
-            <a:pPr indent="0" marL="0">
-              <a:buNone/>
-            </a:pPr>
-            <a:r>
-              <a:rPr lang="en-US" sz="1000" b="1" spc="100" kern="0" dirty="0">
-                <a:solidFill>
-                  <a:srgbClr val="00A896"/>
-                </a:solidFill>
-                <a:latin typeface="Arial" pitchFamily="34" charset="0"/>
-                <a:ea typeface="Arial" pitchFamily="34" charset="-122"/>
-                <a:cs typeface="Arial" pitchFamily="34" charset="-120"/>
-              </a:rPr>
-              <a:t>FECHA DE ENTREGA</a:t>
-            </a:r>
-            <a:endParaRPr lang="en-US" sz="1000" dirty="0"/>
-          </a:p>
-        </p:txBody>
-      </p:sp>
-      <p:sp>
-        <p:nvSpPr>
-          <p:cNvPr id="15" name="Text 13"/>
-          <p:cNvSpPr txBox="1"/>
-          <p:nvPr/>
-        </p:nvSpPr>
-        <p:spPr>
-          <a:xfrm>
-            <a:off x="2468880" y="5404104"/>
-            <a:ext cx="4572000" cy="320040"/>
-          </a:xfrm>
-          <a:prstGeom prst="rect">
-            <a:avLst/>
-          </a:prstGeom>
-          <a:noFill/>
-          <a:ln/>
-        </p:spPr>
-        <p:txBody>
-          <a:bodyPr wrap="square" lIns="0" tIns="0" rIns="0" bIns="0" rtlCol="0" anchor="ctr"/>
-          <a:lstStyle/>
-          <a:p>
-            <a:pPr indent="0" marL="0">
-              <a:buNone/>
-            </a:pPr>
-            <a:r>
-              <a:rPr lang="en-US" sz="1300" dirty="0">
-                <a:solidFill>
-                  <a:srgbClr val="FFFFFF"/>
-                </a:solidFill>
-                <a:latin typeface="Arial" pitchFamily="34" charset="0"/>
-                <a:ea typeface="Arial" pitchFamily="34" charset="-122"/>
-                <a:cs typeface="Arial" pitchFamily="34" charset="-120"/>
-              </a:rPr>
-              <a:t>[Fecha de entrega]</a:t>
-            </a:r>
-            <a:endParaRPr lang="en-US" sz="1300" dirty="0"/>
-          </a:p>
-        </p:txBody>
-      </p:sp>
-      <p:sp>
-        <p:nvSpPr>
-          <p:cNvPr id="16" name="Text 14"/>
-          <p:cNvSpPr txBox="1"/>
-          <p:nvPr/>
-        </p:nvSpPr>
-        <p:spPr>
-          <a:xfrm>
-            <a:off x="548640" y="6355080"/>
-            <a:ext cx="7315200" cy="274320"/>
-          </a:xfrm>
-          <a:prstGeom prst="rect">
-            <a:avLst/>
-          </a:prstGeom>
-          <a:noFill/>
-          <a:ln/>
-        </p:spPr>
-        <p:txBody>
-          <a:bodyPr wrap="square" lIns="0" tIns="0" rIns="0" bIns="0" rtlCol="0" anchor="ctr"/>
-          <a:lstStyle/>
-          <a:p>
-            <a:pPr indent="0" marL="0">
-              <a:buNone/>
-            </a:pPr>
-            <a:r>
-              <a:rPr lang="en-US" sz="1000" dirty="0">
-                <a:solidFill>
-                  <a:srgbClr val="7FB8B3"/>
-                </a:solidFill>
-                <a:latin typeface="Arial" pitchFamily="34" charset="0"/>
-                <a:ea typeface="Arial" pitchFamily="34" charset="-122"/>
-                <a:cs typeface="Arial" pitchFamily="34" charset="-120"/>
-              </a:rPr>
-              <a:t>Trabajo individual · Formato: presentación dinámica</a:t>
-            </a:r>
-            <a:endParaRPr lang="en-US" sz="1000" dirty="0"/>
+                <a:cs typeface="Arial" pitchFamily="34" charset="-120"/>
+              </a:rPr>
+              <a:t>Clara Lucía Monsalve Ríos</a:t>
+            </a:r>
+            <a:endParaRPr lang="en-US" sz="2400" dirty="0"/>
           </a:p>
         </p:txBody>
       </p:sp>
@@ -2866,6 +2427,7 @@
         <a:solidFill>
           <a:srgbClr val="FFFFFF"/>
         </a:solidFill>
+        <a:effectLst/>
       </p:bgPr>
     </p:bg>
     <p:spTree>
@@ -2903,11 +2465,11 @@
           <a:bodyPr wrap="square" lIns="0" tIns="0" rIns="0" bIns="0" rtlCol="0" anchor="ctr"/>
           <a:lstStyle/>
           <a:p>
-            <a:pPr indent="0" marL="0">
-              <a:buNone/>
-            </a:pPr>
-            <a:r>
-              <a:rPr lang="en-US" sz="1200" b="1" spc="200" kern="0" dirty="0">
+            <a:pPr marL="0" indent="0">
+              <a:buNone/>
+            </a:pPr>
+            <a:r>
+              <a:rPr lang="en-US" sz="1200" b="1" kern="0" spc="200" dirty="0">
                 <a:solidFill>
                   <a:srgbClr val="028090"/>
                 </a:solidFill>
@@ -2942,7 +2504,7 @@
           <a:bodyPr wrap="square" lIns="0" tIns="0" rIns="0" bIns="0" rtlCol="0" anchor="ctr"/>
           <a:lstStyle/>
           <a:p>
-            <a:pPr indent="0" marL="0">
+            <a:pPr marL="0" indent="0">
               <a:buNone/>
             </a:pPr>
             <a:r>
@@ -2954,7 +2516,7 @@
                 <a:ea typeface="Arial" pitchFamily="34" charset="-122"/>
                 <a:cs typeface="Arial" pitchFamily="34" charset="-120"/>
               </a:rPr>
-              <a:t>Roles del equipo Scrum (trabajo individual)</a:t>
+              <a:t>Roles del equipo Scrum </a:t>
             </a:r>
             <a:endParaRPr lang="en-US" sz="3000" dirty="0"/>
           </a:p>
@@ -2981,7 +2543,7 @@
           <a:bodyPr wrap="square" lIns="0" tIns="0" rIns="0" bIns="0" rtlCol="0" anchor="ctr"/>
           <a:lstStyle/>
           <a:p>
-            <a:pPr indent="0" marL="0">
+            <a:pPr marL="0" indent="0">
               <a:lnSpc>
                 <a:spcPts val="1700"/>
               </a:lnSpc>
@@ -2996,7 +2558,29 @@
                 <a:ea typeface="Arial" pitchFamily="34" charset="-122"/>
                 <a:cs typeface="Arial" pitchFamily="34" charset="-120"/>
               </a:rPr>
-              <a:t>Este proyecto se desarrolla de forma individual: Sergio Alsina Quimbayo asume, en distintos momentos de cada sprint, los cuatro roles de un equipo Scrum real.</a:t>
+              <a:t>Este proyecto se desarrolla de forma individual: </a:t>
+            </a:r>
+            <a:r>
+              <a:rPr lang="en-US" sz="1300" i="1" dirty="0" err="1">
+                <a:solidFill>
+                  <a:srgbClr val="3A506B"/>
+                </a:solidFill>
+                <a:latin typeface="Arial" pitchFamily="34" charset="0"/>
+                <a:ea typeface="Arial" pitchFamily="34" charset="-122"/>
+                <a:cs typeface="Arial" pitchFamily="34" charset="-120"/>
+              </a:rPr>
+              <a:t>en</a:t>
+            </a:r>
+            <a:r>
+              <a:rPr lang="en-US" sz="1300" i="1" dirty="0">
+                <a:solidFill>
+                  <a:srgbClr val="3A506B"/>
+                </a:solidFill>
+                <a:latin typeface="Arial" pitchFamily="34" charset="0"/>
+                <a:ea typeface="Arial" pitchFamily="34" charset="-122"/>
+                <a:cs typeface="Arial" pitchFamily="34" charset="-120"/>
+              </a:rPr>
+              <a:t> distintos momentos de cada sprint, los cuatro roles de un equipo Scrum real.</a:t>
             </a:r>
             <a:endParaRPr lang="en-US" sz="1300" dirty="0"/>
           </a:p>
@@ -3065,7 +2649,7 @@
           <a:bodyPr wrap="square" lIns="0" tIns="0" rIns="0" bIns="0" rtlCol="0" anchor="ctr"/>
           <a:lstStyle/>
           <a:p>
-            <a:pPr algn="ctr" indent="0" marL="0">
+            <a:pPr marL="0" indent="0" algn="ctr">
               <a:buNone/>
             </a:pPr>
             <a:r>
@@ -3104,7 +2688,7 @@
           <a:bodyPr wrap="square" lIns="0" tIns="0" rIns="0" bIns="0" rtlCol="0" anchor="ctr"/>
           <a:lstStyle/>
           <a:p>
-            <a:pPr algn="ctr" indent="0" marL="0">
+            <a:pPr marL="0" indent="0" algn="ctr">
               <a:lnSpc>
                 <a:spcPts val="1600"/>
               </a:lnSpc>
@@ -3146,7 +2730,7 @@
           <a:bodyPr wrap="square" lIns="0" tIns="0" rIns="0" bIns="0" rtlCol="0" anchor="ctr"/>
           <a:lstStyle/>
           <a:p>
-            <a:pPr algn="ctr" indent="0" marL="0">
+            <a:pPr marL="0" indent="0" algn="ctr">
               <a:lnSpc>
                 <a:spcPts val="1400"/>
               </a:lnSpc>
@@ -3188,7 +2772,7 @@
           <a:bodyPr wrap="square" lIns="0" tIns="0" rIns="0" bIns="0" rtlCol="0" anchor="ctr"/>
           <a:lstStyle/>
           <a:p>
-            <a:pPr algn="ctr" indent="0" marL="0">
+            <a:pPr marL="0" indent="0" algn="ctr">
               <a:buNone/>
             </a:pPr>
             <a:r>
@@ -3269,7 +2853,7 @@
           <a:bodyPr wrap="square" lIns="0" tIns="0" rIns="0" bIns="0" rtlCol="0" anchor="ctr"/>
           <a:lstStyle/>
           <a:p>
-            <a:pPr algn="ctr" indent="0" marL="0">
+            <a:pPr marL="0" indent="0" algn="ctr">
               <a:buNone/>
             </a:pPr>
             <a:r>
@@ -3308,7 +2892,7 @@
           <a:bodyPr wrap="square" lIns="0" tIns="0" rIns="0" bIns="0" rtlCol="0" anchor="ctr"/>
           <a:lstStyle/>
           <a:p>
-            <a:pPr algn="ctr" indent="0" marL="0">
+            <a:pPr marL="0" indent="0" algn="ctr">
               <a:lnSpc>
                 <a:spcPts val="1600"/>
               </a:lnSpc>
@@ -3350,7 +2934,7 @@
           <a:bodyPr wrap="square" lIns="0" tIns="0" rIns="0" bIns="0" rtlCol="0" anchor="ctr"/>
           <a:lstStyle/>
           <a:p>
-            <a:pPr algn="ctr" indent="0" marL="0">
+            <a:pPr marL="0" indent="0" algn="ctr">
               <a:lnSpc>
                 <a:spcPts val="1400"/>
               </a:lnSpc>
@@ -3392,7 +2976,7 @@
           <a:bodyPr wrap="square" lIns="0" tIns="0" rIns="0" bIns="0" rtlCol="0" anchor="ctr"/>
           <a:lstStyle/>
           <a:p>
-            <a:pPr algn="ctr" indent="0" marL="0">
+            <a:pPr marL="0" indent="0" algn="ctr">
               <a:buNone/>
             </a:pPr>
             <a:r>
@@ -3473,7 +3057,7 @@
           <a:bodyPr wrap="square" lIns="0" tIns="0" rIns="0" bIns="0" rtlCol="0" anchor="ctr"/>
           <a:lstStyle/>
           <a:p>
-            <a:pPr algn="ctr" indent="0" marL="0">
+            <a:pPr marL="0" indent="0" algn="ctr">
               <a:buNone/>
             </a:pPr>
             <a:r>
@@ -3512,7 +3096,7 @@
           <a:bodyPr wrap="square" lIns="0" tIns="0" rIns="0" bIns="0" rtlCol="0" anchor="ctr"/>
           <a:lstStyle/>
           <a:p>
-            <a:pPr algn="ctr" indent="0" marL="0">
+            <a:pPr marL="0" indent="0" algn="ctr">
               <a:lnSpc>
                 <a:spcPts val="1600"/>
               </a:lnSpc>
@@ -3554,7 +3138,7 @@
           <a:bodyPr wrap="square" lIns="0" tIns="0" rIns="0" bIns="0" rtlCol="0" anchor="ctr"/>
           <a:lstStyle/>
           <a:p>
-            <a:pPr algn="ctr" indent="0" marL="0">
+            <a:pPr marL="0" indent="0" algn="ctr">
               <a:lnSpc>
                 <a:spcPts val="1400"/>
               </a:lnSpc>
@@ -3596,7 +3180,7 @@
           <a:bodyPr wrap="square" lIns="0" tIns="0" rIns="0" bIns="0" rtlCol="0" anchor="ctr"/>
           <a:lstStyle/>
           <a:p>
-            <a:pPr algn="ctr" indent="0" marL="0">
+            <a:pPr marL="0" indent="0" algn="ctr">
               <a:buNone/>
             </a:pPr>
             <a:r>
@@ -3677,7 +3261,7 @@
           <a:bodyPr wrap="square" lIns="0" tIns="0" rIns="0" bIns="0" rtlCol="0" anchor="ctr"/>
           <a:lstStyle/>
           <a:p>
-            <a:pPr algn="ctr" indent="0" marL="0">
+            <a:pPr marL="0" indent="0" algn="ctr">
               <a:buNone/>
             </a:pPr>
             <a:r>
@@ -3716,7 +3300,7 @@
           <a:bodyPr wrap="square" lIns="0" tIns="0" rIns="0" bIns="0" rtlCol="0" anchor="ctr"/>
           <a:lstStyle/>
           <a:p>
-            <a:pPr algn="ctr" indent="0" marL="0">
+            <a:pPr marL="0" indent="0" algn="ctr">
               <a:lnSpc>
                 <a:spcPts val="1600"/>
               </a:lnSpc>
@@ -3758,7 +3342,7 @@
           <a:bodyPr wrap="square" lIns="0" tIns="0" rIns="0" bIns="0" rtlCol="0" anchor="ctr"/>
           <a:lstStyle/>
           <a:p>
-            <a:pPr algn="ctr" indent="0" marL="0">
+            <a:pPr marL="0" indent="0" algn="ctr">
               <a:lnSpc>
                 <a:spcPts val="1400"/>
               </a:lnSpc>
@@ -3800,7 +3384,7 @@
           <a:bodyPr wrap="square" lIns="0" tIns="0" rIns="0" bIns="0" rtlCol="0" anchor="ctr"/>
           <a:lstStyle/>
           <a:p>
-            <a:pPr algn="ctr" indent="0" marL="0">
+            <a:pPr marL="0" indent="0" algn="ctr">
               <a:buNone/>
             </a:pPr>
             <a:r>
@@ -3815,84 +3399,6 @@
               <a:t>— Sergio A.</a:t>
             </a:r>
             <a:endParaRPr lang="en-US" sz="1000" dirty="0"/>
-          </a:p>
-        </p:txBody>
-      </p:sp>
-      <p:sp>
-        <p:nvSpPr>
-          <p:cNvPr id="29" name="Text 27"/>
-          <p:cNvSpPr txBox="1"/>
-          <p:nvPr/>
-        </p:nvSpPr>
-        <p:spPr>
-          <a:xfrm>
-            <a:off x="548640" y="6473952"/>
-            <a:ext cx="4572000" cy="274320"/>
-          </a:xfrm>
-          <a:prstGeom prst="rect">
-            <a:avLst/>
-          </a:prstGeom>
-          <a:noFill/>
-          <a:ln/>
-        </p:spPr>
-        <p:txBody>
-          <a:bodyPr wrap="square" lIns="0" tIns="0" rIns="0" bIns="0" rtlCol="0" anchor="ctr"/>
-          <a:lstStyle/>
-          <a:p>
-            <a:pPr indent="0" marL="0">
-              <a:buNone/>
-            </a:pPr>
-            <a:r>
-              <a:rPr lang="en-US" sz="900" dirty="0">
-                <a:solidFill>
-                  <a:srgbClr val="6B7280"/>
-                </a:solidFill>
-                <a:latin typeface="Arial" pitchFamily="34" charset="0"/>
-                <a:ea typeface="Arial" pitchFamily="34" charset="-122"/>
-                <a:cs typeface="Arial" pitchFamily="34" charset="-120"/>
-              </a:rPr>
-              <a:t>Agenda Fácil</a:t>
-            </a:r>
-            <a:endParaRPr lang="en-US" sz="900" dirty="0"/>
-          </a:p>
-        </p:txBody>
-      </p:sp>
-      <p:sp>
-        <p:nvSpPr>
-          <p:cNvPr id="30" name="Text 28"/>
-          <p:cNvSpPr txBox="1"/>
-          <p:nvPr/>
-        </p:nvSpPr>
-        <p:spPr>
-          <a:xfrm>
-            <a:off x="11094415" y="6473952"/>
-            <a:ext cx="548640" cy="274320"/>
-          </a:xfrm>
-          <a:prstGeom prst="rect">
-            <a:avLst/>
-          </a:prstGeom>
-          <a:noFill/>
-          <a:ln/>
-        </p:spPr>
-        <p:txBody>
-          <a:bodyPr wrap="square" lIns="0" tIns="0" rIns="0" bIns="0" rtlCol="0" anchor="ctr"/>
-          <a:lstStyle/>
-          <a:p>
-            <a:pPr algn="r" indent="0" marL="0">
-              <a:buNone/>
-            </a:pPr>
-            <a:r>
-              <a:rPr lang="en-US" sz="900" dirty="0">
-                <a:solidFill>
-                  <a:srgbClr val="6B7280"/>
-                </a:solidFill>
-                <a:latin typeface="Arial" pitchFamily="34" charset="0"/>
-                <a:ea typeface="Arial" pitchFamily="34" charset="-122"/>
-                <a:cs typeface="Arial" pitchFamily="34" charset="-120"/>
-              </a:rPr>
-              <a:t>9</a:t>
-            </a:r>
-            <a:endParaRPr lang="en-US" sz="900" dirty="0"/>
           </a:p>
         </p:txBody>
       </p:sp>
@@ -3912,6 +3418,7 @@
         <a:solidFill>
           <a:srgbClr val="FFFFFF"/>
         </a:solidFill>
+        <a:effectLst/>
       </p:bgPr>
     </p:bg>
     <p:spTree>
@@ -3949,11 +3456,11 @@
           <a:bodyPr wrap="square" lIns="0" tIns="0" rIns="0" bIns="0" rtlCol="0" anchor="ctr"/>
           <a:lstStyle/>
           <a:p>
-            <a:pPr indent="0" marL="0">
-              <a:buNone/>
-            </a:pPr>
-            <a:r>
-              <a:rPr lang="en-US" sz="1200" b="1" spc="200" kern="0" dirty="0">
+            <a:pPr marL="0" indent="0">
+              <a:buNone/>
+            </a:pPr>
+            <a:r>
+              <a:rPr lang="en-US" sz="1200" b="1" kern="0" spc="200" dirty="0">
                 <a:solidFill>
                   <a:srgbClr val="028090"/>
                 </a:solidFill>
@@ -3988,7 +3495,7 @@
           <a:bodyPr wrap="square" lIns="0" tIns="0" rIns="0" bIns="0" rtlCol="0" anchor="ctr"/>
           <a:lstStyle/>
           <a:p>
-            <a:pPr indent="0" marL="0">
+            <a:pPr marL="0" indent="0">
               <a:buNone/>
             </a:pPr>
             <a:r>
@@ -4049,7 +3556,7 @@
           <a:bodyPr wrap="square" lIns="0" tIns="0" rIns="0" bIns="0" rtlCol="0" anchor="ctr"/>
           <a:lstStyle/>
           <a:p>
-            <a:pPr algn="ctr" indent="0" marL="0">
+            <a:pPr marL="0" indent="0" algn="ctr">
               <a:buNone/>
             </a:pPr>
             <a:r>
@@ -4088,7 +3595,7 @@
           <a:bodyPr wrap="square" lIns="0" tIns="0" rIns="0" bIns="0" rtlCol="0" anchor="t"/>
           <a:lstStyle/>
           <a:p>
-            <a:pPr algn="ctr" indent="0" marL="0">
+            <a:pPr marL="0" indent="0" algn="ctr">
               <a:lnSpc>
                 <a:spcPts val="1200"/>
               </a:lnSpc>
@@ -4152,7 +3659,7 @@
           <a:bodyPr wrap="square" lIns="0" tIns="0" rIns="0" bIns="0" rtlCol="0" anchor="ctr"/>
           <a:lstStyle/>
           <a:p>
-            <a:pPr algn="ctr" indent="0" marL="0">
+            <a:pPr marL="0" indent="0" algn="ctr">
               <a:buNone/>
             </a:pPr>
             <a:r>
@@ -4191,7 +3698,7 @@
           <a:bodyPr wrap="square" lIns="0" tIns="0" rIns="0" bIns="0" rtlCol="0" anchor="t"/>
           <a:lstStyle/>
           <a:p>
-            <a:pPr algn="ctr" indent="0" marL="0">
+            <a:pPr marL="0" indent="0" algn="ctr">
               <a:lnSpc>
                 <a:spcPts val="1200"/>
               </a:lnSpc>
@@ -4255,7 +3762,7 @@
           <a:bodyPr wrap="square" lIns="0" tIns="0" rIns="0" bIns="0" rtlCol="0" anchor="ctr"/>
           <a:lstStyle/>
           <a:p>
-            <a:pPr algn="ctr" indent="0" marL="0">
+            <a:pPr marL="0" indent="0" algn="ctr">
               <a:buNone/>
             </a:pPr>
             <a:r>
@@ -4294,7 +3801,7 @@
           <a:bodyPr wrap="square" lIns="0" tIns="0" rIns="0" bIns="0" rtlCol="0" anchor="t"/>
           <a:lstStyle/>
           <a:p>
-            <a:pPr algn="ctr" indent="0" marL="0">
+            <a:pPr marL="0" indent="0" algn="ctr">
               <a:lnSpc>
                 <a:spcPts val="1200"/>
               </a:lnSpc>
@@ -4358,7 +3865,7 @@
           <a:bodyPr wrap="square" lIns="0" tIns="0" rIns="0" bIns="0" rtlCol="0" anchor="ctr"/>
           <a:lstStyle/>
           <a:p>
-            <a:pPr algn="ctr" indent="0" marL="0">
+            <a:pPr marL="0" indent="0" algn="ctr">
               <a:buNone/>
             </a:pPr>
             <a:r>
@@ -4397,7 +3904,7 @@
           <a:bodyPr wrap="square" lIns="0" tIns="0" rIns="0" bIns="0" rtlCol="0" anchor="t"/>
           <a:lstStyle/>
           <a:p>
-            <a:pPr algn="ctr" indent="0" marL="0">
+            <a:pPr marL="0" indent="0" algn="ctr">
               <a:lnSpc>
                 <a:spcPts val="1200"/>
               </a:lnSpc>
@@ -4461,7 +3968,7 @@
           <a:bodyPr wrap="square" lIns="0" tIns="0" rIns="0" bIns="0" rtlCol="0" anchor="ctr"/>
           <a:lstStyle/>
           <a:p>
-            <a:pPr algn="ctr" indent="0" marL="0">
+            <a:pPr marL="0" indent="0" algn="ctr">
               <a:buNone/>
             </a:pPr>
             <a:r>
@@ -4500,7 +4007,7 @@
           <a:bodyPr wrap="square" lIns="0" tIns="0" rIns="0" bIns="0" rtlCol="0" anchor="t"/>
           <a:lstStyle/>
           <a:p>
-            <a:pPr algn="ctr" indent="0" marL="0">
+            <a:pPr marL="0" indent="0" algn="ctr">
               <a:lnSpc>
                 <a:spcPts val="1200"/>
               </a:lnSpc>
@@ -4564,7 +4071,7 @@
           <a:bodyPr wrap="square" lIns="0" tIns="0" rIns="0" bIns="0" rtlCol="0" anchor="ctr"/>
           <a:lstStyle/>
           <a:p>
-            <a:pPr algn="ctr" indent="0" marL="0">
+            <a:pPr marL="0" indent="0" algn="ctr">
               <a:buNone/>
             </a:pPr>
             <a:r>
@@ -4603,7 +4110,7 @@
           <a:bodyPr wrap="square" lIns="0" tIns="0" rIns="0" bIns="0" rtlCol="0" anchor="t"/>
           <a:lstStyle/>
           <a:p>
-            <a:pPr algn="ctr" indent="0" marL="0">
+            <a:pPr marL="0" indent="0" algn="ctr">
               <a:lnSpc>
                 <a:spcPts val="1200"/>
               </a:lnSpc>
@@ -4667,7 +4174,7 @@
           <a:bodyPr wrap="square" lIns="0" tIns="0" rIns="0" bIns="0" rtlCol="0" anchor="ctr"/>
           <a:lstStyle/>
           <a:p>
-            <a:pPr algn="ctr" indent="0" marL="0">
+            <a:pPr marL="0" indent="0" algn="ctr">
               <a:buNone/>
             </a:pPr>
             <a:r>
@@ -4706,7 +4213,7 @@
           <a:bodyPr wrap="square" lIns="0" tIns="0" rIns="0" bIns="0" rtlCol="0" anchor="t"/>
           <a:lstStyle/>
           <a:p>
-            <a:pPr algn="ctr" indent="0" marL="0">
+            <a:pPr marL="0" indent="0" algn="ctr">
               <a:lnSpc>
                 <a:spcPts val="1200"/>
               </a:lnSpc>
@@ -4748,7 +4255,7 @@
           <a:bodyPr wrap="square" lIns="0" tIns="0" rIns="0" bIns="0" rtlCol="0" anchor="ctr"/>
           <a:lstStyle/>
           <a:p>
-            <a:pPr indent="0" marL="0">
+            <a:pPr marL="0" indent="0">
               <a:buNone/>
             </a:pPr>
             <a:r>
@@ -4809,11 +4316,11 @@
           <a:bodyPr wrap="square" lIns="0" tIns="0" rIns="0" bIns="0" rtlCol="0" anchor="ctr"/>
           <a:lstStyle/>
           <a:p>
-            <a:pPr indent="0" marL="0">
-              <a:buNone/>
-            </a:pPr>
-            <a:r>
-              <a:rPr lang="en-US" sz="1150" b="1" spc="100" kern="0" dirty="0">
+            <a:pPr marL="0" indent="0">
+              <a:buNone/>
+            </a:pPr>
+            <a:r>
+              <a:rPr lang="en-US" sz="1150" b="1" kern="0" spc="100" dirty="0">
                 <a:solidFill>
                   <a:srgbClr val="028090"/>
                 </a:solidFill>
@@ -4848,7 +4355,7 @@
           <a:bodyPr wrap="square" lIns="0" tIns="0" rIns="0" bIns="0" rtlCol="0" anchor="ctr"/>
           <a:lstStyle/>
           <a:p>
-            <a:pPr indent="0" marL="0">
+            <a:pPr marL="0" indent="0">
               <a:lnSpc>
                 <a:spcPts val="1600"/>
               </a:lnSpc>
@@ -4863,87 +4370,31 @@
                 <a:ea typeface="Arial" pitchFamily="34" charset="-122"/>
                 <a:cs typeface="Arial" pitchFamily="34" charset="-120"/>
               </a:rPr>
-              <a:t>El archivo “Cronograma_AgendaFacil.xlsx” incluye la vista Gantt (con fecha de inicio editable) y el Sprint Backlog con cada tarea, responsable, prioridad, estado y horas estimadas (192 h en total).</a:t>
+              <a:t>El archivo “</a:t>
+            </a:r>
+            <a:r>
+              <a:rPr lang="en-US" sz="1200" dirty="0" err="1">
+                <a:solidFill>
+                  <a:srgbClr val="1F2937"/>
+                </a:solidFill>
+                <a:latin typeface="Arial" pitchFamily="34" charset="0"/>
+                <a:ea typeface="Arial" pitchFamily="34" charset="-122"/>
+                <a:cs typeface="Arial" pitchFamily="34" charset="-120"/>
+              </a:rPr>
+              <a:t>Cronograma-AgendaFacil.xlsx</a:t>
+            </a:r>
+            <a:r>
+              <a:rPr lang="en-US" sz="1200" dirty="0">
+                <a:solidFill>
+                  <a:srgbClr val="1F2937"/>
+                </a:solidFill>
+                <a:latin typeface="Arial" pitchFamily="34" charset="0"/>
+                <a:ea typeface="Arial" pitchFamily="34" charset="-122"/>
+                <a:cs typeface="Arial" pitchFamily="34" charset="-120"/>
+              </a:rPr>
+              <a:t>” incluye la vista Gantt (con fecha de inicio editable) y el Sprint Backlog con cada tarea, responsable, prioridad, estado y horas estimadas (192 h en total).</a:t>
             </a:r>
             <a:endParaRPr lang="en-US" sz="1200" dirty="0"/>
-          </a:p>
-        </p:txBody>
-      </p:sp>
-      <p:sp>
-        <p:nvSpPr>
-          <p:cNvPr id="29" name="Text 27"/>
-          <p:cNvSpPr txBox="1"/>
-          <p:nvPr/>
-        </p:nvSpPr>
-        <p:spPr>
-          <a:xfrm>
-            <a:off x="548640" y="6473952"/>
-            <a:ext cx="4572000" cy="274320"/>
-          </a:xfrm>
-          <a:prstGeom prst="rect">
-            <a:avLst/>
-          </a:prstGeom>
-          <a:noFill/>
-          <a:ln/>
-        </p:spPr>
-        <p:txBody>
-          <a:bodyPr wrap="square" lIns="0" tIns="0" rIns="0" bIns="0" rtlCol="0" anchor="ctr"/>
-          <a:lstStyle/>
-          <a:p>
-            <a:pPr indent="0" marL="0">
-              <a:buNone/>
-            </a:pPr>
-            <a:r>
-              <a:rPr lang="en-US" sz="900" dirty="0">
-                <a:solidFill>
-                  <a:srgbClr val="6B7280"/>
-                </a:solidFill>
-                <a:latin typeface="Arial" pitchFamily="34" charset="0"/>
-                <a:ea typeface="Arial" pitchFamily="34" charset="-122"/>
-                <a:cs typeface="Arial" pitchFamily="34" charset="-120"/>
-              </a:rPr>
-              <a:t>Agenda Fácil</a:t>
-            </a:r>
-            <a:endParaRPr lang="en-US" sz="900" dirty="0"/>
-          </a:p>
-        </p:txBody>
-      </p:sp>
-      <p:sp>
-        <p:nvSpPr>
-          <p:cNvPr id="30" name="Text 28"/>
-          <p:cNvSpPr txBox="1"/>
-          <p:nvPr/>
-        </p:nvSpPr>
-        <p:spPr>
-          <a:xfrm>
-            <a:off x="11094415" y="6473952"/>
-            <a:ext cx="548640" cy="274320"/>
-          </a:xfrm>
-          <a:prstGeom prst="rect">
-            <a:avLst/>
-          </a:prstGeom>
-          <a:noFill/>
-          <a:ln/>
-        </p:spPr>
-        <p:txBody>
-          <a:bodyPr wrap="square" lIns="0" tIns="0" rIns="0" bIns="0" rtlCol="0" anchor="ctr"/>
-          <a:lstStyle/>
-          <a:p>
-            <a:pPr algn="r" indent="0" marL="0">
-              <a:buNone/>
-            </a:pPr>
-            <a:r>
-              <a:rPr lang="en-US" sz="900" dirty="0">
-                <a:solidFill>
-                  <a:srgbClr val="6B7280"/>
-                </a:solidFill>
-                <a:latin typeface="Arial" pitchFamily="34" charset="0"/>
-                <a:ea typeface="Arial" pitchFamily="34" charset="-122"/>
-                <a:cs typeface="Arial" pitchFamily="34" charset="-120"/>
-              </a:rPr>
-              <a:t>10</a:t>
-            </a:r>
-            <a:endParaRPr lang="en-US" sz="900" dirty="0"/>
           </a:p>
         </p:txBody>
       </p:sp>
@@ -4963,6 +4414,7 @@
         <a:solidFill>
           <a:srgbClr val="FFFFFF"/>
         </a:solidFill>
+        <a:effectLst/>
       </p:bgPr>
     </p:bg>
     <p:spTree>
@@ -5000,11 +4452,11 @@
           <a:bodyPr wrap="square" lIns="0" tIns="0" rIns="0" bIns="0" rtlCol="0" anchor="ctr"/>
           <a:lstStyle/>
           <a:p>
-            <a:pPr indent="0" marL="0">
-              <a:buNone/>
-            </a:pPr>
-            <a:r>
-              <a:rPr lang="en-US" sz="1200" b="1" spc="200" kern="0" dirty="0">
+            <a:pPr marL="0" indent="0">
+              <a:buNone/>
+            </a:pPr>
+            <a:r>
+              <a:rPr lang="en-US" sz="1200" b="1" kern="0" spc="200" dirty="0">
                 <a:solidFill>
                   <a:srgbClr val="028090"/>
                 </a:solidFill>
@@ -5039,7 +4491,7 @@
           <a:bodyPr wrap="square" lIns="0" tIns="0" rIns="0" bIns="0" rtlCol="0" anchor="ctr"/>
           <a:lstStyle/>
           <a:p>
-            <a:pPr indent="0" marL="0">
+            <a:pPr marL="0" indent="0">
               <a:buNone/>
             </a:pPr>
             <a:r>
@@ -5100,7 +4552,7 @@
           <a:bodyPr wrap="square" lIns="0" tIns="0" rIns="0" bIns="0" rtlCol="0" anchor="ctr"/>
           <a:lstStyle/>
           <a:p>
-            <a:pPr indent="0" marL="0">
+            <a:pPr marL="0" indent="0">
               <a:buNone/>
             </a:pPr>
             <a:r>
@@ -5139,11 +4591,11 @@
           <a:bodyPr wrap="square" lIns="0" tIns="0" rIns="0" bIns="0" rtlCol="0" anchor="ctr"/>
           <a:lstStyle/>
           <a:p>
-            <a:pPr indent="0" marL="0">
-              <a:buNone/>
-            </a:pPr>
-            <a:r>
-              <a:rPr lang="en-US" sz="1050" b="1" spc="120" kern="0" dirty="0">
+            <a:pPr marL="0" indent="0">
+              <a:buNone/>
+            </a:pPr>
+            <a:r>
+              <a:rPr lang="en-US" sz="1050" b="1" kern="0" spc="120" dirty="0">
                 <a:solidFill>
                   <a:srgbClr val="F4A300"/>
                 </a:solidFill>
@@ -5178,7 +4630,7 @@
           <a:bodyPr wrap="square" lIns="0" tIns="0" rIns="0" bIns="0" rtlCol="0" anchor="ctr"/>
           <a:lstStyle/>
           <a:p>
-            <a:pPr indent="0" marL="0">
+            <a:pPr marL="0" indent="0">
               <a:lnSpc>
                 <a:spcPts val="1400"/>
               </a:lnSpc>
@@ -5220,7 +4672,7 @@
           <a:bodyPr wrap="square" lIns="0" tIns="0" rIns="0" bIns="0" rtlCol="0" anchor="ctr"/>
           <a:lstStyle/>
           <a:p>
-            <a:pPr indent="0" marL="0">
+            <a:pPr marL="0" indent="0">
               <a:lnSpc>
                 <a:spcPts val="1400"/>
               </a:lnSpc>
@@ -5262,7 +4714,7 @@
           <a:bodyPr wrap="square" lIns="0" tIns="0" rIns="0" bIns="0" rtlCol="0" anchor="ctr"/>
           <a:lstStyle/>
           <a:p>
-            <a:pPr indent="0" marL="0">
+            <a:pPr marL="0" indent="0">
               <a:lnSpc>
                 <a:spcPts val="1400"/>
               </a:lnSpc>
@@ -5304,7 +4756,7 @@
           <a:bodyPr wrap="square" lIns="0" tIns="0" rIns="0" bIns="0" rtlCol="0" anchor="ctr"/>
           <a:lstStyle/>
           <a:p>
-            <a:pPr indent="0" marL="0">
+            <a:pPr marL="0" indent="0">
               <a:lnSpc>
                 <a:spcPts val="1400"/>
               </a:lnSpc>
@@ -5368,7 +4820,7 @@
           <a:bodyPr wrap="square" lIns="0" tIns="0" rIns="0" bIns="0" rtlCol="0" anchor="ctr"/>
           <a:lstStyle/>
           <a:p>
-            <a:pPr indent="0" marL="0">
+            <a:pPr marL="0" indent="0">
               <a:buNone/>
             </a:pPr>
             <a:r>
@@ -5407,11 +4859,11 @@
           <a:bodyPr wrap="square" lIns="0" tIns="0" rIns="0" bIns="0" rtlCol="0" anchor="ctr"/>
           <a:lstStyle/>
           <a:p>
-            <a:pPr indent="0" marL="0">
-              <a:buNone/>
-            </a:pPr>
-            <a:r>
-              <a:rPr lang="en-US" sz="1050" b="1" spc="120" kern="0" dirty="0">
+            <a:pPr marL="0" indent="0">
+              <a:buNone/>
+            </a:pPr>
+            <a:r>
+              <a:rPr lang="en-US" sz="1050" b="1" kern="0" spc="120" dirty="0">
                 <a:solidFill>
                   <a:srgbClr val="6B7280"/>
                 </a:solidFill>
@@ -5446,7 +4898,7 @@
           <a:bodyPr wrap="square" lIns="0" tIns="0" rIns="0" bIns="0" rtlCol="0" anchor="ctr"/>
           <a:lstStyle/>
           <a:p>
-            <a:pPr indent="0" marL="0">
+            <a:pPr marL="0" indent="0">
               <a:lnSpc>
                 <a:spcPts val="1400"/>
               </a:lnSpc>
@@ -5488,7 +4940,7 @@
           <a:bodyPr wrap="square" lIns="0" tIns="0" rIns="0" bIns="0" rtlCol="0" anchor="ctr"/>
           <a:lstStyle/>
           <a:p>
-            <a:pPr indent="0" marL="0">
+            <a:pPr marL="0" indent="0">
               <a:lnSpc>
                 <a:spcPts val="1400"/>
               </a:lnSpc>
@@ -5530,7 +4982,7 @@
           <a:bodyPr wrap="square" lIns="0" tIns="0" rIns="0" bIns="0" rtlCol="0" anchor="ctr"/>
           <a:lstStyle/>
           <a:p>
-            <a:pPr indent="0" marL="0">
+            <a:pPr marL="0" indent="0">
               <a:lnSpc>
                 <a:spcPts val="1400"/>
               </a:lnSpc>
@@ -5594,7 +5046,7 @@
           <a:bodyPr wrap="square" lIns="0" tIns="0" rIns="0" bIns="0" rtlCol="0" anchor="ctr"/>
           <a:lstStyle/>
           <a:p>
-            <a:pPr indent="0" marL="0">
+            <a:pPr marL="0" indent="0">
               <a:buNone/>
             </a:pPr>
             <a:r>
@@ -5633,11 +5085,11 @@
           <a:bodyPr wrap="square" lIns="0" tIns="0" rIns="0" bIns="0" rtlCol="0" anchor="ctr"/>
           <a:lstStyle/>
           <a:p>
-            <a:pPr indent="0" marL="0">
-              <a:buNone/>
-            </a:pPr>
-            <a:r>
-              <a:rPr lang="en-US" sz="1050" b="1" spc="120" kern="0" dirty="0">
+            <a:pPr marL="0" indent="0">
+              <a:buNone/>
+            </a:pPr>
+            <a:r>
+              <a:rPr lang="en-US" sz="1050" b="1" kern="0" spc="120" dirty="0">
                 <a:solidFill>
                   <a:srgbClr val="6B7280"/>
                 </a:solidFill>
@@ -5672,7 +5124,7 @@
           <a:bodyPr wrap="square" lIns="0" tIns="0" rIns="0" bIns="0" rtlCol="0" anchor="ctr"/>
           <a:lstStyle/>
           <a:p>
-            <a:pPr indent="0" marL="0">
+            <a:pPr marL="0" indent="0">
               <a:lnSpc>
                 <a:spcPts val="1400"/>
               </a:lnSpc>
@@ -5714,7 +5166,7 @@
           <a:bodyPr wrap="square" lIns="0" tIns="0" rIns="0" bIns="0" rtlCol="0" anchor="ctr"/>
           <a:lstStyle/>
           <a:p>
-            <a:pPr indent="0" marL="0">
+            <a:pPr marL="0" indent="0">
               <a:lnSpc>
                 <a:spcPts val="1400"/>
               </a:lnSpc>
@@ -5756,7 +5208,7 @@
           <a:bodyPr wrap="square" lIns="0" tIns="0" rIns="0" bIns="0" rtlCol="0" anchor="ctr"/>
           <a:lstStyle/>
           <a:p>
-            <a:pPr indent="0" marL="0">
+            <a:pPr marL="0" indent="0">
               <a:lnSpc>
                 <a:spcPts val="1400"/>
               </a:lnSpc>
@@ -5774,84 +5226,6 @@
               <a:t>•  Se queda corta para backlog técnico</a:t>
             </a:r>
             <a:endParaRPr lang="en-US" sz="1150" dirty="0"/>
-          </a:p>
-        </p:txBody>
-      </p:sp>
-      <p:sp>
-        <p:nvSpPr>
-          <p:cNvPr id="23" name="Text 21"/>
-          <p:cNvSpPr txBox="1"/>
-          <p:nvPr/>
-        </p:nvSpPr>
-        <p:spPr>
-          <a:xfrm>
-            <a:off x="548640" y="6473952"/>
-            <a:ext cx="4572000" cy="274320"/>
-          </a:xfrm>
-          <a:prstGeom prst="rect">
-            <a:avLst/>
-          </a:prstGeom>
-          <a:noFill/>
-          <a:ln/>
-        </p:spPr>
-        <p:txBody>
-          <a:bodyPr wrap="square" lIns="0" tIns="0" rIns="0" bIns="0" rtlCol="0" anchor="ctr"/>
-          <a:lstStyle/>
-          <a:p>
-            <a:pPr indent="0" marL="0">
-              <a:buNone/>
-            </a:pPr>
-            <a:r>
-              <a:rPr lang="en-US" sz="900" dirty="0">
-                <a:solidFill>
-                  <a:srgbClr val="6B7280"/>
-                </a:solidFill>
-                <a:latin typeface="Arial" pitchFamily="34" charset="0"/>
-                <a:ea typeface="Arial" pitchFamily="34" charset="-122"/>
-                <a:cs typeface="Arial" pitchFamily="34" charset="-120"/>
-              </a:rPr>
-              <a:t>Agenda Fácil</a:t>
-            </a:r>
-            <a:endParaRPr lang="en-US" sz="900" dirty="0"/>
-          </a:p>
-        </p:txBody>
-      </p:sp>
-      <p:sp>
-        <p:nvSpPr>
-          <p:cNvPr id="24" name="Text 22"/>
-          <p:cNvSpPr txBox="1"/>
-          <p:nvPr/>
-        </p:nvSpPr>
-        <p:spPr>
-          <a:xfrm>
-            <a:off x="11094415" y="6473952"/>
-            <a:ext cx="548640" cy="274320"/>
-          </a:xfrm>
-          <a:prstGeom prst="rect">
-            <a:avLst/>
-          </a:prstGeom>
-          <a:noFill/>
-          <a:ln/>
-        </p:spPr>
-        <p:txBody>
-          <a:bodyPr wrap="square" lIns="0" tIns="0" rIns="0" bIns="0" rtlCol="0" anchor="ctr"/>
-          <a:lstStyle/>
-          <a:p>
-            <a:pPr algn="r" indent="0" marL="0">
-              <a:buNone/>
-            </a:pPr>
-            <a:r>
-              <a:rPr lang="en-US" sz="900" dirty="0">
-                <a:solidFill>
-                  <a:srgbClr val="6B7280"/>
-                </a:solidFill>
-                <a:latin typeface="Arial" pitchFamily="34" charset="0"/>
-                <a:ea typeface="Arial" pitchFamily="34" charset="-122"/>
-                <a:cs typeface="Arial" pitchFamily="34" charset="-120"/>
-              </a:rPr>
-              <a:t>11</a:t>
-            </a:r>
-            <a:endParaRPr lang="en-US" sz="900" dirty="0"/>
           </a:p>
         </p:txBody>
       </p:sp>
@@ -5871,6 +5245,7 @@
         <a:solidFill>
           <a:srgbClr val="F4F8F7"/>
         </a:solidFill>
+        <a:effectLst/>
       </p:bgPr>
     </p:bg>
     <p:spTree>
@@ -5908,11 +5283,11 @@
           <a:bodyPr wrap="square" lIns="0" tIns="0" rIns="0" bIns="0" rtlCol="0" anchor="ctr"/>
           <a:lstStyle/>
           <a:p>
-            <a:pPr indent="0" marL="0">
-              <a:buNone/>
-            </a:pPr>
-            <a:r>
-              <a:rPr lang="en-US" sz="1200" b="1" spc="200" kern="0" dirty="0">
+            <a:pPr marL="0" indent="0">
+              <a:buNone/>
+            </a:pPr>
+            <a:r>
+              <a:rPr lang="en-US" sz="1200" b="1" kern="0" spc="200" dirty="0">
                 <a:solidFill>
                   <a:srgbClr val="028090"/>
                 </a:solidFill>
@@ -5947,7 +5322,7 @@
           <a:bodyPr wrap="square" lIns="0" tIns="0" rIns="0" bIns="0" rtlCol="0" anchor="ctr"/>
           <a:lstStyle/>
           <a:p>
-            <a:pPr indent="0" marL="0">
+            <a:pPr marL="0" indent="0">
               <a:buNone/>
             </a:pPr>
             <a:r>
@@ -6028,7 +5403,7 @@
           <a:bodyPr wrap="square" lIns="0" tIns="0" rIns="0" bIns="0" rtlCol="0" anchor="ctr"/>
           <a:lstStyle/>
           <a:p>
-            <a:pPr algn="ctr" indent="0" marL="0">
+            <a:pPr marL="0" indent="0" algn="ctr">
               <a:buNone/>
             </a:pPr>
             <a:r>
@@ -6067,7 +5442,7 @@
           <a:bodyPr wrap="square" lIns="0" tIns="0" rIns="0" bIns="0" rtlCol="0" anchor="ctr"/>
           <a:lstStyle/>
           <a:p>
-            <a:pPr indent="0" marL="0">
+            <a:pPr marL="0" indent="0">
               <a:buNone/>
             </a:pPr>
             <a:r>
@@ -6106,7 +5481,7 @@
           <a:bodyPr wrap="square" lIns="0" tIns="0" rIns="0" bIns="0" rtlCol="0" anchor="ctr"/>
           <a:lstStyle/>
           <a:p>
-            <a:pPr indent="0" marL="0">
+            <a:pPr marL="0" indent="0">
               <a:buNone/>
             </a:pPr>
             <a:r>
@@ -6145,7 +5520,7 @@
           <a:bodyPr wrap="square" lIns="0" tIns="0" rIns="0" bIns="0" rtlCol="0" anchor="ctr"/>
           <a:lstStyle/>
           <a:p>
-            <a:pPr indent="0" marL="0">
+            <a:pPr marL="0" indent="0">
               <a:lnSpc>
                 <a:spcPts val="1800"/>
               </a:lnSpc>
@@ -6229,7 +5604,7 @@
           <a:bodyPr wrap="square" lIns="0" tIns="0" rIns="0" bIns="0" rtlCol="0" anchor="ctr"/>
           <a:lstStyle/>
           <a:p>
-            <a:pPr algn="ctr" indent="0" marL="0">
+            <a:pPr marL="0" indent="0" algn="ctr">
               <a:buNone/>
             </a:pPr>
             <a:r>
@@ -6268,7 +5643,7 @@
           <a:bodyPr wrap="square" lIns="0" tIns="0" rIns="0" bIns="0" rtlCol="0" anchor="ctr"/>
           <a:lstStyle/>
           <a:p>
-            <a:pPr indent="0" marL="0">
+            <a:pPr marL="0" indent="0">
               <a:buNone/>
             </a:pPr>
             <a:r>
@@ -6307,7 +5682,7 @@
           <a:bodyPr wrap="square" lIns="0" tIns="0" rIns="0" bIns="0" rtlCol="0" anchor="ctr"/>
           <a:lstStyle/>
           <a:p>
-            <a:pPr indent="0" marL="0">
+            <a:pPr marL="0" indent="0">
               <a:buNone/>
             </a:pPr>
             <a:r>
@@ -6346,7 +5721,7 @@
           <a:bodyPr wrap="square" lIns="0" tIns="0" rIns="0" bIns="0" rtlCol="0" anchor="ctr"/>
           <a:lstStyle/>
           <a:p>
-            <a:pPr indent="0" marL="0">
+            <a:pPr marL="0" indent="0">
               <a:lnSpc>
                 <a:spcPts val="1800"/>
               </a:lnSpc>
@@ -6364,84 +5739,6 @@
               <a:t>Figma para maquetar las pantallas de la app antes de programarlas, y draw.io para los diagramas UML (casos de uso, clases) que documentan cómo se conecta cada módulo.</a:t>
             </a:r>
             <a:endParaRPr lang="en-US" sz="1250" dirty="0"/>
-          </a:p>
-        </p:txBody>
-      </p:sp>
-      <p:sp>
-        <p:nvSpPr>
-          <p:cNvPr id="16" name="Text 14"/>
-          <p:cNvSpPr txBox="1"/>
-          <p:nvPr/>
-        </p:nvSpPr>
-        <p:spPr>
-          <a:xfrm>
-            <a:off x="548640" y="6473952"/>
-            <a:ext cx="4572000" cy="274320"/>
-          </a:xfrm>
-          <a:prstGeom prst="rect">
-            <a:avLst/>
-          </a:prstGeom>
-          <a:noFill/>
-          <a:ln/>
-        </p:spPr>
-        <p:txBody>
-          <a:bodyPr wrap="square" lIns="0" tIns="0" rIns="0" bIns="0" rtlCol="0" anchor="ctr"/>
-          <a:lstStyle/>
-          <a:p>
-            <a:pPr indent="0" marL="0">
-              <a:buNone/>
-            </a:pPr>
-            <a:r>
-              <a:rPr lang="en-US" sz="900" dirty="0">
-                <a:solidFill>
-                  <a:srgbClr val="6B7280"/>
-                </a:solidFill>
-                <a:latin typeface="Arial" pitchFamily="34" charset="0"/>
-                <a:ea typeface="Arial" pitchFamily="34" charset="-122"/>
-                <a:cs typeface="Arial" pitchFamily="34" charset="-120"/>
-              </a:rPr>
-              <a:t>Agenda Fácil</a:t>
-            </a:r>
-            <a:endParaRPr lang="en-US" sz="900" dirty="0"/>
-          </a:p>
-        </p:txBody>
-      </p:sp>
-      <p:sp>
-        <p:nvSpPr>
-          <p:cNvPr id="17" name="Text 15"/>
-          <p:cNvSpPr txBox="1"/>
-          <p:nvPr/>
-        </p:nvSpPr>
-        <p:spPr>
-          <a:xfrm>
-            <a:off x="11094415" y="6473952"/>
-            <a:ext cx="548640" cy="274320"/>
-          </a:xfrm>
-          <a:prstGeom prst="rect">
-            <a:avLst/>
-          </a:prstGeom>
-          <a:noFill/>
-          <a:ln/>
-        </p:spPr>
-        <p:txBody>
-          <a:bodyPr wrap="square" lIns="0" tIns="0" rIns="0" bIns="0" rtlCol="0" anchor="ctr"/>
-          <a:lstStyle/>
-          <a:p>
-            <a:pPr algn="r" indent="0" marL="0">
-              <a:buNone/>
-            </a:pPr>
-            <a:r>
-              <a:rPr lang="en-US" sz="900" dirty="0">
-                <a:solidFill>
-                  <a:srgbClr val="6B7280"/>
-                </a:solidFill>
-                <a:latin typeface="Arial" pitchFamily="34" charset="0"/>
-                <a:ea typeface="Arial" pitchFamily="34" charset="-122"/>
-                <a:cs typeface="Arial" pitchFamily="34" charset="-120"/>
-              </a:rPr>
-              <a:t>12</a:t>
-            </a:r>
-            <a:endParaRPr lang="en-US" sz="900" dirty="0"/>
           </a:p>
         </p:txBody>
       </p:sp>
@@ -6461,6 +5758,7 @@
         <a:solidFill>
           <a:srgbClr val="FFFFFF"/>
         </a:solidFill>
+        <a:effectLst/>
       </p:bgPr>
     </p:bg>
     <p:spTree>
@@ -6498,11 +5796,11 @@
           <a:bodyPr wrap="square" lIns="0" tIns="0" rIns="0" bIns="0" rtlCol="0" anchor="ctr"/>
           <a:lstStyle/>
           <a:p>
-            <a:pPr indent="0" marL="0">
-              <a:buNone/>
-            </a:pPr>
-            <a:r>
-              <a:rPr lang="en-US" sz="1200" b="1" spc="200" kern="0" dirty="0">
+            <a:pPr marL="0" indent="0">
+              <a:buNone/>
+            </a:pPr>
+            <a:r>
+              <a:rPr lang="en-US" sz="1200" b="1" kern="0" spc="200" dirty="0">
                 <a:solidFill>
                   <a:srgbClr val="028090"/>
                 </a:solidFill>
@@ -6537,7 +5835,7 @@
           <a:bodyPr wrap="square" lIns="0" tIns="0" rIns="0" bIns="0" rtlCol="0" anchor="ctr"/>
           <a:lstStyle/>
           <a:p>
-            <a:pPr indent="0" marL="0">
+            <a:pPr marL="0" indent="0">
               <a:buNone/>
             </a:pPr>
             <a:r>
@@ -6598,7 +5896,7 @@
           <a:bodyPr wrap="square" lIns="0" tIns="0" rIns="0" bIns="0" rtlCol="0" anchor="ctr"/>
           <a:lstStyle/>
           <a:p>
-            <a:pPr indent="0" marL="0">
+            <a:pPr marL="0" indent="0">
               <a:buNone/>
             </a:pPr>
             <a:r>
@@ -6637,7 +5935,7 @@
           <a:bodyPr wrap="square" lIns="0" tIns="0" rIns="0" bIns="0" rtlCol="0" anchor="ctr"/>
           <a:lstStyle/>
           <a:p>
-            <a:pPr indent="0" marL="0">
+            <a:pPr marL="0" indent="0">
               <a:buNone/>
             </a:pPr>
             <a:r>
@@ -6676,7 +5974,7 @@
           <a:bodyPr wrap="square" lIns="0" tIns="0" rIns="0" bIns="0" rtlCol="0" anchor="ctr"/>
           <a:lstStyle/>
           <a:p>
-            <a:pPr indent="0" marL="0">
+            <a:pPr marL="0" indent="0">
               <a:lnSpc>
                 <a:spcPts val="1400"/>
               </a:lnSpc>
@@ -6740,7 +6038,7 @@
           <a:bodyPr wrap="square" lIns="0" tIns="0" rIns="0" bIns="0" rtlCol="0" anchor="ctr"/>
           <a:lstStyle/>
           <a:p>
-            <a:pPr indent="0" marL="0">
+            <a:pPr marL="0" indent="0">
               <a:buNone/>
             </a:pPr>
             <a:r>
@@ -6779,7 +6077,7 @@
           <a:bodyPr wrap="square" lIns="0" tIns="0" rIns="0" bIns="0" rtlCol="0" anchor="ctr"/>
           <a:lstStyle/>
           <a:p>
-            <a:pPr indent="0" marL="0">
+            <a:pPr marL="0" indent="0">
               <a:buNone/>
             </a:pPr>
             <a:r>
@@ -6818,7 +6116,7 @@
           <a:bodyPr wrap="square" lIns="0" tIns="0" rIns="0" bIns="0" rtlCol="0" anchor="ctr"/>
           <a:lstStyle/>
           <a:p>
-            <a:pPr indent="0" marL="0">
+            <a:pPr marL="0" indent="0">
               <a:lnSpc>
                 <a:spcPts val="1400"/>
               </a:lnSpc>
@@ -6882,7 +6180,7 @@
           <a:bodyPr wrap="square" lIns="0" tIns="0" rIns="0" bIns="0" rtlCol="0" anchor="ctr"/>
           <a:lstStyle/>
           <a:p>
-            <a:pPr indent="0" marL="0">
+            <a:pPr marL="0" indent="0">
               <a:buNone/>
             </a:pPr>
             <a:r>
@@ -6921,7 +6219,7 @@
           <a:bodyPr wrap="square" lIns="0" tIns="0" rIns="0" bIns="0" rtlCol="0" anchor="ctr"/>
           <a:lstStyle/>
           <a:p>
-            <a:pPr indent="0" marL="0">
+            <a:pPr marL="0" indent="0">
               <a:buNone/>
             </a:pPr>
             <a:r>
@@ -6960,7 +6258,7 @@
           <a:bodyPr wrap="square" lIns="0" tIns="0" rIns="0" bIns="0" rtlCol="0" anchor="ctr"/>
           <a:lstStyle/>
           <a:p>
-            <a:pPr indent="0" marL="0">
+            <a:pPr marL="0" indent="0">
               <a:lnSpc>
                 <a:spcPts val="1400"/>
               </a:lnSpc>
@@ -7024,7 +6322,7 @@
           <a:bodyPr wrap="square" lIns="0" tIns="0" rIns="0" bIns="0" rtlCol="0" anchor="ctr"/>
           <a:lstStyle/>
           <a:p>
-            <a:pPr indent="0" marL="0">
+            <a:pPr marL="0" indent="0">
               <a:buNone/>
             </a:pPr>
             <a:r>
@@ -7063,7 +6361,7 @@
           <a:bodyPr wrap="square" lIns="0" tIns="0" rIns="0" bIns="0" rtlCol="0" anchor="ctr"/>
           <a:lstStyle/>
           <a:p>
-            <a:pPr indent="0" marL="0">
+            <a:pPr marL="0" indent="0">
               <a:buNone/>
             </a:pPr>
             <a:r>
@@ -7102,7 +6400,7 @@
           <a:bodyPr wrap="square" lIns="0" tIns="0" rIns="0" bIns="0" rtlCol="0" anchor="ctr"/>
           <a:lstStyle/>
           <a:p>
-            <a:pPr indent="0" marL="0">
+            <a:pPr marL="0" indent="0">
               <a:lnSpc>
                 <a:spcPts val="1400"/>
               </a:lnSpc>
@@ -7166,7 +6464,7 @@
           <a:bodyPr wrap="square" lIns="0" tIns="0" rIns="0" bIns="0" rtlCol="0" anchor="ctr"/>
           <a:lstStyle/>
           <a:p>
-            <a:pPr indent="0" marL="0">
+            <a:pPr marL="0" indent="0">
               <a:buNone/>
             </a:pPr>
             <a:r>
@@ -7205,7 +6503,7 @@
           <a:bodyPr wrap="square" lIns="0" tIns="0" rIns="0" bIns="0" rtlCol="0" anchor="ctr"/>
           <a:lstStyle/>
           <a:p>
-            <a:pPr indent="0" marL="0">
+            <a:pPr marL="0" indent="0">
               <a:buNone/>
             </a:pPr>
             <a:r>
@@ -7244,7 +6542,7 @@
           <a:bodyPr wrap="square" lIns="0" tIns="0" rIns="0" bIns="0" rtlCol="0" anchor="ctr"/>
           <a:lstStyle/>
           <a:p>
-            <a:pPr indent="0" marL="0">
+            <a:pPr marL="0" indent="0">
               <a:lnSpc>
                 <a:spcPts val="1400"/>
               </a:lnSpc>
@@ -7262,84 +6560,6 @@
               <a:t>Donde vive todo, disponible 24/7 sin depender de un solo computador.</a:t>
             </a:r>
             <a:endParaRPr lang="en-US" sz="1150" dirty="0"/>
-          </a:p>
-        </p:txBody>
-      </p:sp>
-      <p:sp>
-        <p:nvSpPr>
-          <p:cNvPr id="24" name="Text 22"/>
-          <p:cNvSpPr txBox="1"/>
-          <p:nvPr/>
-        </p:nvSpPr>
-        <p:spPr>
-          <a:xfrm>
-            <a:off x="548640" y="6473952"/>
-            <a:ext cx="4572000" cy="274320"/>
-          </a:xfrm>
-          <a:prstGeom prst="rect">
-            <a:avLst/>
-          </a:prstGeom>
-          <a:noFill/>
-          <a:ln/>
-        </p:spPr>
-        <p:txBody>
-          <a:bodyPr wrap="square" lIns="0" tIns="0" rIns="0" bIns="0" rtlCol="0" anchor="ctr"/>
-          <a:lstStyle/>
-          <a:p>
-            <a:pPr indent="0" marL="0">
-              <a:buNone/>
-            </a:pPr>
-            <a:r>
-              <a:rPr lang="en-US" sz="900" dirty="0">
-                <a:solidFill>
-                  <a:srgbClr val="6B7280"/>
-                </a:solidFill>
-                <a:latin typeface="Arial" pitchFamily="34" charset="0"/>
-                <a:ea typeface="Arial" pitchFamily="34" charset="-122"/>
-                <a:cs typeface="Arial" pitchFamily="34" charset="-120"/>
-              </a:rPr>
-              <a:t>Agenda Fácil</a:t>
-            </a:r>
-            <a:endParaRPr lang="en-US" sz="900" dirty="0"/>
-          </a:p>
-        </p:txBody>
-      </p:sp>
-      <p:sp>
-        <p:nvSpPr>
-          <p:cNvPr id="25" name="Text 23"/>
-          <p:cNvSpPr txBox="1"/>
-          <p:nvPr/>
-        </p:nvSpPr>
-        <p:spPr>
-          <a:xfrm>
-            <a:off x="11094415" y="6473952"/>
-            <a:ext cx="548640" cy="274320"/>
-          </a:xfrm>
-          <a:prstGeom prst="rect">
-            <a:avLst/>
-          </a:prstGeom>
-          <a:noFill/>
-          <a:ln/>
-        </p:spPr>
-        <p:txBody>
-          <a:bodyPr wrap="square" lIns="0" tIns="0" rIns="0" bIns="0" rtlCol="0" anchor="ctr"/>
-          <a:lstStyle/>
-          <a:p>
-            <a:pPr algn="r" indent="0" marL="0">
-              <a:buNone/>
-            </a:pPr>
-            <a:r>
-              <a:rPr lang="en-US" sz="900" dirty="0">
-                <a:solidFill>
-                  <a:srgbClr val="6B7280"/>
-                </a:solidFill>
-                <a:latin typeface="Arial" pitchFamily="34" charset="0"/>
-                <a:ea typeface="Arial" pitchFamily="34" charset="-122"/>
-                <a:cs typeface="Arial" pitchFamily="34" charset="-120"/>
-              </a:rPr>
-              <a:t>13</a:t>
-            </a:r>
-            <a:endParaRPr lang="en-US" sz="900" dirty="0"/>
           </a:p>
         </p:txBody>
       </p:sp>
@@ -7359,6 +6579,7 @@
         <a:solidFill>
           <a:srgbClr val="F4F8F7"/>
         </a:solidFill>
+        <a:effectLst/>
       </p:bgPr>
     </p:bg>
     <p:spTree>
@@ -7396,11 +6617,11 @@
           <a:bodyPr wrap="square" lIns="0" tIns="0" rIns="0" bIns="0" rtlCol="0" anchor="ctr"/>
           <a:lstStyle/>
           <a:p>
-            <a:pPr indent="0" marL="0">
-              <a:buNone/>
-            </a:pPr>
-            <a:r>
-              <a:rPr lang="en-US" sz="1200" b="1" spc="200" kern="0" dirty="0">
+            <a:pPr marL="0" indent="0">
+              <a:buNone/>
+            </a:pPr>
+            <a:r>
+              <a:rPr lang="en-US" sz="1200" b="1" kern="0" spc="200" dirty="0">
                 <a:solidFill>
                   <a:srgbClr val="028090"/>
                 </a:solidFill>
@@ -7435,7 +6656,7 @@
           <a:bodyPr wrap="square" lIns="0" tIns="0" rIns="0" bIns="0" rtlCol="0" anchor="ctr"/>
           <a:lstStyle/>
           <a:p>
-            <a:pPr indent="0" marL="0">
+            <a:pPr marL="0" indent="0">
               <a:buNone/>
             </a:pPr>
             <a:r>
@@ -7523,7 +6744,7 @@
           <a:bodyPr wrap="square" lIns="0" tIns="0" rIns="0" bIns="0" rtlCol="0" anchor="ctr"/>
           <a:lstStyle/>
           <a:p>
-            <a:pPr algn="ctr" indent="0" marL="0">
+            <a:pPr marL="0" indent="0" algn="ctr">
               <a:buNone/>
             </a:pPr>
             <a:r>
@@ -7589,7 +6810,7 @@
           <a:bodyPr wrap="square" lIns="0" tIns="0" rIns="0" bIns="0" rtlCol="0" anchor="ctr"/>
           <a:lstStyle/>
           <a:p>
-            <a:pPr indent="0" marL="0">
+            <a:pPr marL="0" indent="0">
               <a:lnSpc>
                 <a:spcPts val="1100"/>
               </a:lnSpc>
@@ -7658,7 +6879,7 @@
           <a:bodyPr wrap="square" lIns="0" tIns="0" rIns="0" bIns="0" rtlCol="0" anchor="ctr"/>
           <a:lstStyle/>
           <a:p>
-            <a:pPr indent="0" marL="0">
+            <a:pPr marL="0" indent="0">
               <a:lnSpc>
                 <a:spcPts val="1100"/>
               </a:lnSpc>
@@ -7749,7 +6970,7 @@
           <a:bodyPr wrap="square" lIns="0" tIns="0" rIns="0" bIns="0" rtlCol="0" anchor="ctr"/>
           <a:lstStyle/>
           <a:p>
-            <a:pPr algn="ctr" indent="0" marL="0">
+            <a:pPr marL="0" indent="0" algn="ctr">
               <a:buNone/>
             </a:pPr>
             <a:r>
@@ -7815,7 +7036,7 @@
           <a:bodyPr wrap="square" lIns="0" tIns="0" rIns="0" bIns="0" rtlCol="0" anchor="ctr"/>
           <a:lstStyle/>
           <a:p>
-            <a:pPr indent="0" marL="0">
+            <a:pPr marL="0" indent="0">
               <a:lnSpc>
                 <a:spcPts val="1100"/>
               </a:lnSpc>
@@ -7884,7 +7105,7 @@
           <a:bodyPr wrap="square" lIns="0" tIns="0" rIns="0" bIns="0" rtlCol="0" anchor="ctr"/>
           <a:lstStyle/>
           <a:p>
-            <a:pPr indent="0" marL="0">
+            <a:pPr marL="0" indent="0">
               <a:lnSpc>
                 <a:spcPts val="1100"/>
               </a:lnSpc>
@@ -7975,7 +7196,7 @@
           <a:bodyPr wrap="square" lIns="0" tIns="0" rIns="0" bIns="0" rtlCol="0" anchor="ctr"/>
           <a:lstStyle/>
           <a:p>
-            <a:pPr algn="ctr" indent="0" marL="0">
+            <a:pPr marL="0" indent="0" algn="ctr">
               <a:buNone/>
             </a:pPr>
             <a:r>
@@ -8041,7 +7262,7 @@
           <a:bodyPr wrap="square" lIns="0" tIns="0" rIns="0" bIns="0" rtlCol="0" anchor="ctr"/>
           <a:lstStyle/>
           <a:p>
-            <a:pPr indent="0" marL="0">
+            <a:pPr marL="0" indent="0">
               <a:lnSpc>
                 <a:spcPts val="1100"/>
               </a:lnSpc>
@@ -8110,7 +7331,7 @@
           <a:bodyPr wrap="square" lIns="0" tIns="0" rIns="0" bIns="0" rtlCol="0" anchor="ctr"/>
           <a:lstStyle/>
           <a:p>
-            <a:pPr indent="0" marL="0">
+            <a:pPr marL="0" indent="0">
               <a:lnSpc>
                 <a:spcPts val="1100"/>
               </a:lnSpc>
@@ -8201,7 +7422,7 @@
           <a:bodyPr wrap="square" lIns="0" tIns="0" rIns="0" bIns="0" rtlCol="0" anchor="ctr"/>
           <a:lstStyle/>
           <a:p>
-            <a:pPr algn="ctr" indent="0" marL="0">
+            <a:pPr marL="0" indent="0" algn="ctr">
               <a:buNone/>
             </a:pPr>
             <a:r>
@@ -8267,7 +7488,7 @@
           <a:bodyPr wrap="square" lIns="0" tIns="0" rIns="0" bIns="0" rtlCol="0" anchor="ctr"/>
           <a:lstStyle/>
           <a:p>
-            <a:pPr indent="0" marL="0">
+            <a:pPr marL="0" indent="0">
               <a:lnSpc>
                 <a:spcPts val="1100"/>
               </a:lnSpc>
@@ -8358,7 +7579,7 @@
           <a:bodyPr wrap="square" lIns="0" tIns="0" rIns="0" bIns="0" rtlCol="0" anchor="ctr"/>
           <a:lstStyle/>
           <a:p>
-            <a:pPr algn="ctr" indent="0" marL="0">
+            <a:pPr marL="0" indent="0" algn="ctr">
               <a:buNone/>
             </a:pPr>
             <a:r>
@@ -8424,7 +7645,7 @@
           <a:bodyPr wrap="square" lIns="0" tIns="0" rIns="0" bIns="0" rtlCol="0" anchor="ctr"/>
           <a:lstStyle/>
           <a:p>
-            <a:pPr indent="0" marL="0">
+            <a:pPr marL="0" indent="0">
               <a:lnSpc>
                 <a:spcPts val="1100"/>
               </a:lnSpc>
@@ -8493,7 +7714,7 @@
           <a:bodyPr wrap="square" lIns="0" tIns="0" rIns="0" bIns="0" rtlCol="0" anchor="ctr"/>
           <a:lstStyle/>
           <a:p>
-            <a:pPr indent="0" marL="0">
+            <a:pPr marL="0" indent="0">
               <a:lnSpc>
                 <a:spcPts val="1100"/>
               </a:lnSpc>
@@ -8538,45 +7759,6 @@
       </p:sp>
       <p:sp>
         <p:nvSpPr>
-          <p:cNvPr id="38" name="Text 36"/>
-          <p:cNvSpPr txBox="1"/>
-          <p:nvPr/>
-        </p:nvSpPr>
-        <p:spPr>
-          <a:xfrm>
-            <a:off x="868680" y="5285232"/>
-            <a:ext cx="10454335" cy="274320"/>
-          </a:xfrm>
-          <a:prstGeom prst="rect">
-            <a:avLst/>
-          </a:prstGeom>
-          <a:noFill/>
-          <a:ln/>
-        </p:spPr>
-        <p:txBody>
-          <a:bodyPr wrap="square" lIns="0" tIns="0" rIns="0" bIns="0" rtlCol="0" anchor="ctr"/>
-          <a:lstStyle/>
-          <a:p>
-            <a:pPr indent="0" marL="0">
-              <a:buNone/>
-            </a:pPr>
-            <a:r>
-              <a:rPr lang="en-US" sz="1150" dirty="0">
-                <a:solidFill>
-                  <a:srgbClr val="F4A300"/>
-                </a:solidFill>
-                <a:latin typeface="Arial" pitchFamily="34" charset="0"/>
-                <a:ea typeface="Arial" pitchFamily="34" charset="-122"/>
-                <a:cs typeface="Arial" pitchFamily="34" charset="-120"/>
-              </a:rPr>
-              <a:t>✓  TABLERO CREADO EN TRELLO</a:t>
-            </a:r>
-            <a:endParaRPr lang="en-US" sz="1150" dirty="0"/>
-          </a:p>
-        </p:txBody>
-      </p:sp>
-      <p:sp>
-        <p:nvSpPr>
           <p:cNvPr id="39" name="Text 37"/>
           <p:cNvSpPr txBox="1"/>
           <p:nvPr/>
@@ -8596,106 +7778,51 @@
           <a:bodyPr wrap="square" lIns="0" tIns="0" rIns="0" bIns="0" rtlCol="0" anchor="ctr"/>
           <a:lstStyle/>
           <a:p>
-            <a:pPr indent="0" marL="0">
-              <a:buNone/>
-            </a:pPr>
-            <a:r>
-              <a:rPr lang="en-US" sz="1250" b="1" u="sng" dirty="0">
+            <a:r>
+              <a:rPr lang="en-US" sz="1250" b="1" dirty="0">
                 <a:solidFill>
                   <a:srgbClr val="FFFFFF"/>
                 </a:solidFill>
                 <a:latin typeface="Arial" pitchFamily="34" charset="0"/>
                 <a:ea typeface="Arial" pitchFamily="34" charset="-122"/>
                 <a:cs typeface="Arial" pitchFamily="34" charset="-120"/>
-                <a:hlinkClick r:id="rId1" invalidUrl="" action="" tgtFrame="" tooltip="" history="1" highlightClick="0" endSnd="0">
-                  <a:extLst>
-                    <a:ext uri="{A12FA001-AC4F-418D-AE19-62706E023703}">
-                      <ahyp:hlinkClr xmlns:ahyp="http://schemas.microsoft.com/office/drawing/2018/hyperlinkcolor" val="tx"/>
-                    </a:ext>
-                  </a:extLst>
-                </a:hlinkClick>
-              </a:rPr>
-              <a:t>🔗  trello.com/b/jgp37Fpg/agenda-facil</a:t>
+              </a:rPr>
+              <a:t>https://</a:t>
+            </a:r>
+            <a:r>
+              <a:rPr lang="en-US" sz="1250" b="1" dirty="0" err="1">
+                <a:solidFill>
+                  <a:srgbClr val="FFFFFF"/>
+                </a:solidFill>
+                <a:latin typeface="Arial" pitchFamily="34" charset="0"/>
+                <a:ea typeface="Arial" pitchFamily="34" charset="-122"/>
+                <a:cs typeface="Arial" pitchFamily="34" charset="-120"/>
+              </a:rPr>
+              <a:t>trello.com</a:t>
+            </a:r>
+            <a:r>
+              <a:rPr lang="en-US" sz="1250" b="1" dirty="0">
+                <a:solidFill>
+                  <a:srgbClr val="FFFFFF"/>
+                </a:solidFill>
+                <a:latin typeface="Arial" pitchFamily="34" charset="0"/>
+                <a:ea typeface="Arial" pitchFamily="34" charset="-122"/>
+                <a:cs typeface="Arial" pitchFamily="34" charset="-120"/>
+              </a:rPr>
+              <a:t>/invite/b/6a97a76c250d1aa6385900eb/ATTI527af0ceb594eb0b6eb977b2b6f252ec4CB84C57/agenda-</a:t>
+            </a:r>
+            <a:r>
+              <a:rPr lang="en-US" sz="1250" b="1" dirty="0" err="1">
+                <a:solidFill>
+                  <a:srgbClr val="FFFFFF"/>
+                </a:solidFill>
+                <a:latin typeface="Arial" pitchFamily="34" charset="0"/>
+                <a:ea typeface="Arial" pitchFamily="34" charset="-122"/>
+                <a:cs typeface="Arial" pitchFamily="34" charset="-120"/>
+              </a:rPr>
+              <a:t>facil</a:t>
             </a:r>
             <a:endParaRPr lang="en-US" sz="1250" dirty="0"/>
-          </a:p>
-        </p:txBody>
-      </p:sp>
-      <p:sp>
-        <p:nvSpPr>
-          <p:cNvPr id="40" name="Text 38"/>
-          <p:cNvSpPr txBox="1"/>
-          <p:nvPr/>
-        </p:nvSpPr>
-        <p:spPr>
-          <a:xfrm>
-            <a:off x="548640" y="6473952"/>
-            <a:ext cx="4572000" cy="274320"/>
-          </a:xfrm>
-          <a:prstGeom prst="rect">
-            <a:avLst/>
-          </a:prstGeom>
-          <a:noFill/>
-          <a:ln/>
-        </p:spPr>
-        <p:txBody>
-          <a:bodyPr wrap="square" lIns="0" tIns="0" rIns="0" bIns="0" rtlCol="0" anchor="ctr"/>
-          <a:lstStyle/>
-          <a:p>
-            <a:pPr indent="0" marL="0">
-              <a:buNone/>
-            </a:pPr>
-            <a:r>
-              <a:rPr lang="en-US" sz="900" dirty="0">
-                <a:solidFill>
-                  <a:srgbClr val="6B7280"/>
-                </a:solidFill>
-                <a:latin typeface="Arial" pitchFamily="34" charset="0"/>
-                <a:ea typeface="Arial" pitchFamily="34" charset="-122"/>
-                <a:cs typeface="Arial" pitchFamily="34" charset="-120"/>
-              </a:rPr>
-              <a:t>Agenda Fácil</a:t>
-            </a:r>
-            <a:endParaRPr lang="en-US" sz="900" dirty="0"/>
-          </a:p>
-        </p:txBody>
-      </p:sp>
-      <p:sp>
-        <p:nvSpPr>
-          <p:cNvPr id="41" name="Text 39"/>
-          <p:cNvSpPr txBox="1"/>
-          <p:nvPr/>
-        </p:nvSpPr>
-        <p:spPr>
-          <a:xfrm>
-            <a:off x="11094415" y="6473952"/>
-            <a:ext cx="548640" cy="274320"/>
-          </a:xfrm>
-          <a:prstGeom prst="rect">
-            <a:avLst/>
-          </a:prstGeom>
-          <a:noFill/>
-          <a:ln/>
-        </p:spPr>
-        <p:txBody>
-          <a:bodyPr wrap="square" lIns="0" tIns="0" rIns="0" bIns="0" rtlCol="0" anchor="ctr"/>
-          <a:lstStyle/>
-          <a:p>
-            <a:pPr algn="r" indent="0" marL="0">
-              <a:buNone/>
-            </a:pPr>
-            <a:r>
-              <a:rPr lang="en-US" sz="900" dirty="0">
-                <a:solidFill>
-                  <a:srgbClr val="6B7280"/>
-                </a:solidFill>
-                <a:latin typeface="Arial" pitchFamily="34" charset="0"/>
-                <a:ea typeface="Arial" pitchFamily="34" charset="-122"/>
-                <a:cs typeface="Arial" pitchFamily="34" charset="-120"/>
-              </a:rPr>
-              <a:t>14</a:t>
-            </a:r>
-            <a:endParaRPr lang="en-US" sz="900" dirty="0"/>
           </a:p>
         </p:txBody>
       </p:sp>
@@ -8715,6 +7842,7 @@
         <a:solidFill>
           <a:srgbClr val="01464C"/>
         </a:solidFill>
+        <a:effectLst/>
       </p:bgPr>
     </p:bg>
     <p:spTree>
@@ -8772,11 +7900,11 @@
           <a:bodyPr wrap="square" lIns="0" tIns="0" rIns="0" bIns="0" rtlCol="0" anchor="ctr"/>
           <a:lstStyle/>
           <a:p>
-            <a:pPr indent="0" marL="0">
-              <a:buNone/>
-            </a:pPr>
-            <a:r>
-              <a:rPr lang="en-US" sz="1200" b="1" spc="200" kern="0" dirty="0">
+            <a:pPr marL="0" indent="0">
+              <a:buNone/>
+            </a:pPr>
+            <a:r>
+              <a:rPr lang="en-US" sz="1200" b="1" kern="0" spc="200" dirty="0">
                 <a:solidFill>
                   <a:srgbClr val="F4A300"/>
                 </a:solidFill>
@@ -8811,7 +7939,7 @@
           <a:bodyPr wrap="square" lIns="0" tIns="0" rIns="0" bIns="0" rtlCol="0" anchor="ctr"/>
           <a:lstStyle/>
           <a:p>
-            <a:pPr indent="0" marL="0">
+            <a:pPr marL="0" indent="0">
               <a:lnSpc>
                 <a:spcPts val="3800"/>
               </a:lnSpc>
@@ -8831,7 +7959,7 @@
             <a:endParaRPr lang="en-US" sz="3200" dirty="0"/>
           </a:p>
           <a:p>
-            <a:pPr indent="0" marL="0">
+            <a:pPr marL="0" indent="0">
               <a:lnSpc>
                 <a:spcPts val="3800"/>
               </a:lnSpc>
@@ -8893,7 +8021,7 @@
           <a:bodyPr wrap="square" lIns="0" tIns="0" rIns="0" bIns="0" rtlCol="0" anchor="ctr"/>
           <a:lstStyle/>
           <a:p>
-            <a:pPr indent="0" marL="0">
+            <a:pPr marL="0" indent="0">
               <a:lnSpc>
                 <a:spcPts val="1800"/>
               </a:lnSpc>
@@ -8955,7 +8083,7 @@
           <a:bodyPr wrap="square" lIns="0" tIns="0" rIns="0" bIns="0" rtlCol="0" anchor="ctr"/>
           <a:lstStyle/>
           <a:p>
-            <a:pPr indent="0" marL="0">
+            <a:pPr marL="0" indent="0">
               <a:lnSpc>
                 <a:spcPts val="1800"/>
               </a:lnSpc>
@@ -9017,7 +8145,7 @@
           <a:bodyPr wrap="square" lIns="0" tIns="0" rIns="0" bIns="0" rtlCol="0" anchor="ctr"/>
           <a:lstStyle/>
           <a:p>
-            <a:pPr indent="0" marL="0">
+            <a:pPr marL="0" indent="0">
               <a:lnSpc>
                 <a:spcPts val="1800"/>
               </a:lnSpc>
@@ -9079,7 +8207,7 @@
           <a:bodyPr wrap="square" lIns="0" tIns="0" rIns="0" bIns="0" rtlCol="0" anchor="ctr"/>
           <a:lstStyle/>
           <a:p>
-            <a:pPr indent="0" marL="0">
+            <a:pPr marL="0" indent="0">
               <a:lnSpc>
                 <a:spcPts val="1800"/>
               </a:lnSpc>
@@ -9097,84 +8225,6 @@
               <a:t>La libreta de citas y Agenda Fácil resuelven lo mismo: coordinar personas a tiempo.</a:t>
             </a:r>
             <a:endParaRPr lang="en-US" sz="1400" dirty="0"/>
-          </a:p>
-        </p:txBody>
-      </p:sp>
-      <p:sp>
-        <p:nvSpPr>
-          <p:cNvPr id="13" name="Text 11"/>
-          <p:cNvSpPr txBox="1"/>
-          <p:nvPr/>
-        </p:nvSpPr>
-        <p:spPr>
-          <a:xfrm>
-            <a:off x="548640" y="6473952"/>
-            <a:ext cx="4572000" cy="274320"/>
-          </a:xfrm>
-          <a:prstGeom prst="rect">
-            <a:avLst/>
-          </a:prstGeom>
-          <a:noFill/>
-          <a:ln/>
-        </p:spPr>
-        <p:txBody>
-          <a:bodyPr wrap="square" lIns="0" tIns="0" rIns="0" bIns="0" rtlCol="0" anchor="ctr"/>
-          <a:lstStyle/>
-          <a:p>
-            <a:pPr indent="0" marL="0">
-              <a:buNone/>
-            </a:pPr>
-            <a:r>
-              <a:rPr lang="en-US" sz="900" dirty="0">
-                <a:solidFill>
-                  <a:srgbClr val="6B7280"/>
-                </a:solidFill>
-                <a:latin typeface="Arial" pitchFamily="34" charset="0"/>
-                <a:ea typeface="Arial" pitchFamily="34" charset="-122"/>
-                <a:cs typeface="Arial" pitchFamily="34" charset="-120"/>
-              </a:rPr>
-              <a:t>Agenda Fácil · Cierre</a:t>
-            </a:r>
-            <a:endParaRPr lang="en-US" sz="900" dirty="0"/>
-          </a:p>
-        </p:txBody>
-      </p:sp>
-      <p:sp>
-        <p:nvSpPr>
-          <p:cNvPr id="14" name="Text 12"/>
-          <p:cNvSpPr txBox="1"/>
-          <p:nvPr/>
-        </p:nvSpPr>
-        <p:spPr>
-          <a:xfrm>
-            <a:off x="11094415" y="6473952"/>
-            <a:ext cx="548640" cy="274320"/>
-          </a:xfrm>
-          <a:prstGeom prst="rect">
-            <a:avLst/>
-          </a:prstGeom>
-          <a:noFill/>
-          <a:ln/>
-        </p:spPr>
-        <p:txBody>
-          <a:bodyPr wrap="square" lIns="0" tIns="0" rIns="0" bIns="0" rtlCol="0" anchor="ctr"/>
-          <a:lstStyle/>
-          <a:p>
-            <a:pPr algn="r" indent="0" marL="0">
-              <a:buNone/>
-            </a:pPr>
-            <a:r>
-              <a:rPr lang="en-US" sz="900" dirty="0">
-                <a:solidFill>
-                  <a:srgbClr val="6B7280"/>
-                </a:solidFill>
-                <a:latin typeface="Arial" pitchFamily="34" charset="0"/>
-                <a:ea typeface="Arial" pitchFamily="34" charset="-122"/>
-                <a:cs typeface="Arial" pitchFamily="34" charset="-120"/>
-              </a:rPr>
-              <a:t>15</a:t>
-            </a:r>
-            <a:endParaRPr lang="en-US" sz="900" dirty="0"/>
           </a:p>
         </p:txBody>
       </p:sp>
@@ -9194,6 +8244,7 @@
         <a:solidFill>
           <a:srgbClr val="FFFFFF"/>
         </a:solidFill>
+        <a:effectLst/>
       </p:bgPr>
     </p:bg>
     <p:spTree>
@@ -9231,11 +8282,11 @@
           <a:bodyPr wrap="square" lIns="0" tIns="0" rIns="0" bIns="0" rtlCol="0" anchor="ctr"/>
           <a:lstStyle/>
           <a:p>
-            <a:pPr indent="0" marL="0">
-              <a:buNone/>
-            </a:pPr>
-            <a:r>
-              <a:rPr lang="en-US" sz="1200" b="1" spc="200" kern="0" dirty="0">
+            <a:pPr marL="0" indent="0">
+              <a:buNone/>
+            </a:pPr>
+            <a:r>
+              <a:rPr lang="en-US" sz="1200" b="1" kern="0" spc="200" dirty="0">
                 <a:solidFill>
                   <a:srgbClr val="028090"/>
                 </a:solidFill>
@@ -9270,7 +8321,7 @@
           <a:bodyPr wrap="square" lIns="0" tIns="0" rIns="0" bIns="0" rtlCol="0" anchor="ctr"/>
           <a:lstStyle/>
           <a:p>
-            <a:pPr indent="0" marL="0">
+            <a:pPr marL="0" indent="0">
               <a:buNone/>
             </a:pPr>
             <a:r>
@@ -9329,7 +8380,7 @@
           <a:bodyPr wrap="square" lIns="0" tIns="0" rIns="0" bIns="0" rtlCol="0" anchor="ctr"/>
           <a:lstStyle/>
           <a:p>
-            <a:pPr indent="0" marL="0">
+            <a:pPr marL="0" indent="0">
               <a:lnSpc>
                 <a:spcPts val="1700"/>
               </a:lnSpc>
@@ -9391,7 +8442,7 @@
           <a:bodyPr wrap="square" lIns="0" tIns="0" rIns="0" bIns="0" rtlCol="0" anchor="ctr"/>
           <a:lstStyle/>
           <a:p>
-            <a:pPr indent="0" marL="0">
+            <a:pPr marL="0" indent="0">
               <a:lnSpc>
                 <a:spcPts val="1700"/>
               </a:lnSpc>
@@ -9453,7 +8504,7 @@
           <a:bodyPr wrap="square" lIns="0" tIns="0" rIns="0" bIns="0" rtlCol="0" anchor="ctr"/>
           <a:lstStyle/>
           <a:p>
-            <a:pPr indent="0" marL="0">
+            <a:pPr marL="0" indent="0">
               <a:lnSpc>
                 <a:spcPts val="1700"/>
               </a:lnSpc>
@@ -9515,7 +8566,7 @@
           <a:bodyPr wrap="square" lIns="0" tIns="0" rIns="0" bIns="0" rtlCol="0" anchor="ctr"/>
           <a:lstStyle/>
           <a:p>
-            <a:pPr indent="0" marL="0">
+            <a:pPr marL="0" indent="0">
               <a:lnSpc>
                 <a:spcPts val="1700"/>
               </a:lnSpc>
@@ -9577,7 +8628,7 @@
           <a:bodyPr wrap="square" lIns="0" tIns="0" rIns="0" bIns="0" rtlCol="0" anchor="ctr"/>
           <a:lstStyle/>
           <a:p>
-            <a:pPr indent="0" marL="0">
+            <a:pPr marL="0" indent="0">
               <a:lnSpc>
                 <a:spcPts val="1700"/>
               </a:lnSpc>
@@ -9639,7 +8690,7 @@
           <a:bodyPr wrap="square" lIns="0" tIns="0" rIns="0" bIns="0" rtlCol="0" anchor="ctr"/>
           <a:lstStyle/>
           <a:p>
-            <a:pPr indent="0" marL="0">
+            <a:pPr marL="0" indent="0">
               <a:lnSpc>
                 <a:spcPts val="1700"/>
               </a:lnSpc>
@@ -9657,84 +8708,6 @@
               <a:t>Pressman, R. Software Engineering: A Practitioner's Approach, McGraw Hill.</a:t>
             </a:r>
             <a:endParaRPr lang="en-US" sz="1300" dirty="0"/>
-          </a:p>
-        </p:txBody>
-      </p:sp>
-      <p:sp>
-        <p:nvSpPr>
-          <p:cNvPr id="16" name="Text 14"/>
-          <p:cNvSpPr txBox="1"/>
-          <p:nvPr/>
-        </p:nvSpPr>
-        <p:spPr>
-          <a:xfrm>
-            <a:off x="548640" y="6473952"/>
-            <a:ext cx="4572000" cy="274320"/>
-          </a:xfrm>
-          <a:prstGeom prst="rect">
-            <a:avLst/>
-          </a:prstGeom>
-          <a:noFill/>
-          <a:ln/>
-        </p:spPr>
-        <p:txBody>
-          <a:bodyPr wrap="square" lIns="0" tIns="0" rIns="0" bIns="0" rtlCol="0" anchor="ctr"/>
-          <a:lstStyle/>
-          <a:p>
-            <a:pPr indent="0" marL="0">
-              <a:buNone/>
-            </a:pPr>
-            <a:r>
-              <a:rPr lang="en-US" sz="900" dirty="0">
-                <a:solidFill>
-                  <a:srgbClr val="6B7280"/>
-                </a:solidFill>
-                <a:latin typeface="Arial" pitchFamily="34" charset="0"/>
-                <a:ea typeface="Arial" pitchFamily="34" charset="-122"/>
-                <a:cs typeface="Arial" pitchFamily="34" charset="-120"/>
-              </a:rPr>
-              <a:t>Agenda Fácil</a:t>
-            </a:r>
-            <a:endParaRPr lang="en-US" sz="900" dirty="0"/>
-          </a:p>
-        </p:txBody>
-      </p:sp>
-      <p:sp>
-        <p:nvSpPr>
-          <p:cNvPr id="17" name="Text 15"/>
-          <p:cNvSpPr txBox="1"/>
-          <p:nvPr/>
-        </p:nvSpPr>
-        <p:spPr>
-          <a:xfrm>
-            <a:off x="11094415" y="6473952"/>
-            <a:ext cx="548640" cy="274320"/>
-          </a:xfrm>
-          <a:prstGeom prst="rect">
-            <a:avLst/>
-          </a:prstGeom>
-          <a:noFill/>
-          <a:ln/>
-        </p:spPr>
-        <p:txBody>
-          <a:bodyPr wrap="square" lIns="0" tIns="0" rIns="0" bIns="0" rtlCol="0" anchor="ctr"/>
-          <a:lstStyle/>
-          <a:p>
-            <a:pPr algn="r" indent="0" marL="0">
-              <a:buNone/>
-            </a:pPr>
-            <a:r>
-              <a:rPr lang="en-US" sz="900" dirty="0">
-                <a:solidFill>
-                  <a:srgbClr val="6B7280"/>
-                </a:solidFill>
-                <a:latin typeface="Arial" pitchFamily="34" charset="0"/>
-                <a:ea typeface="Arial" pitchFamily="34" charset="-122"/>
-                <a:cs typeface="Arial" pitchFamily="34" charset="-120"/>
-              </a:rPr>
-              <a:t>16</a:t>
-            </a:r>
-            <a:endParaRPr lang="en-US" sz="900" dirty="0"/>
           </a:p>
         </p:txBody>
       </p:sp>
@@ -9754,6 +8727,7 @@
         <a:solidFill>
           <a:srgbClr val="FFFFFF"/>
         </a:solidFill>
+        <a:effectLst/>
       </p:bgPr>
     </p:bg>
     <p:spTree>
@@ -9772,45 +8746,6 @@
       </p:grpSpPr>
       <p:sp>
         <p:nvSpPr>
-          <p:cNvPr id="2" name="Text 0"/>
-          <p:cNvSpPr txBox="1"/>
-          <p:nvPr/>
-        </p:nvSpPr>
-        <p:spPr>
-          <a:xfrm>
-            <a:off x="548640" y="384048"/>
-            <a:ext cx="11094415" cy="292608"/>
-          </a:xfrm>
-          <a:prstGeom prst="rect">
-            <a:avLst/>
-          </a:prstGeom>
-          <a:noFill/>
-          <a:ln/>
-        </p:spPr>
-        <p:txBody>
-          <a:bodyPr wrap="square" lIns="0" tIns="0" rIns="0" bIns="0" rtlCol="0" anchor="ctr"/>
-          <a:lstStyle/>
-          <a:p>
-            <a:pPr indent="0" marL="0">
-              <a:buNone/>
-            </a:pPr>
-            <a:r>
-              <a:rPr lang="en-US" sz="1200" b="1" spc="200" kern="0" dirty="0">
-                <a:solidFill>
-                  <a:srgbClr val="028090"/>
-                </a:solidFill>
-                <a:latin typeface="Arial" pitchFamily="34" charset="0"/>
-                <a:ea typeface="Arial" pitchFamily="34" charset="-122"/>
-                <a:cs typeface="Arial" pitchFamily="34" charset="-120"/>
-              </a:rPr>
-              <a:t>ANTES DE EMPEZAR</a:t>
-            </a:r>
-            <a:endParaRPr lang="en-US" sz="1200" dirty="0"/>
-          </a:p>
-        </p:txBody>
-      </p:sp>
-      <p:sp>
-        <p:nvSpPr>
           <p:cNvPr id="3" name="Text 1"/>
           <p:cNvSpPr txBox="1"/>
           <p:nvPr/>
@@ -9830,9 +8765,20 @@
           <a:bodyPr wrap="square" lIns="0" tIns="0" rIns="0" bIns="0" rtlCol="0" anchor="ctr"/>
           <a:lstStyle/>
           <a:p>
-            <a:pPr indent="0" marL="0">
-              <a:buNone/>
-            </a:pPr>
+            <a:pPr marL="0" indent="0">
+              <a:buNone/>
+            </a:pPr>
+            <a:r>
+              <a:rPr lang="en-US" sz="3000" b="1" dirty="0" err="1">
+                <a:solidFill>
+                  <a:srgbClr val="1F2937"/>
+                </a:solidFill>
+                <a:latin typeface="Arial" pitchFamily="34" charset="0"/>
+                <a:ea typeface="Arial" pitchFamily="34" charset="-122"/>
+                <a:cs typeface="Arial" pitchFamily="34" charset="-120"/>
+              </a:rPr>
+              <a:t>Contenido</a:t>
+            </a:r>
             <a:r>
               <a:rPr lang="en-US" sz="3000" b="1" dirty="0">
                 <a:solidFill>
@@ -9842,7 +8788,18 @@
                 <a:ea typeface="Arial" pitchFamily="34" charset="-122"/>
                 <a:cs typeface="Arial" pitchFamily="34" charset="-120"/>
               </a:rPr>
-              <a:t>De qué habla esta presentación</a:t>
+              <a:t> de la </a:t>
+            </a:r>
+            <a:r>
+              <a:rPr lang="en-US" sz="3000" b="1" dirty="0" err="1">
+                <a:solidFill>
+                  <a:srgbClr val="1F2937"/>
+                </a:solidFill>
+                <a:latin typeface="Arial" pitchFamily="34" charset="0"/>
+                <a:ea typeface="Arial" pitchFamily="34" charset="-122"/>
+                <a:cs typeface="Arial" pitchFamily="34" charset="-120"/>
+              </a:rPr>
+              <a:t>presentación</a:t>
             </a:r>
             <a:endParaRPr lang="en-US" sz="3000" dirty="0"/>
           </a:p>
@@ -9889,7 +8846,7 @@
           <a:bodyPr wrap="square" lIns="0" tIns="0" rIns="0" bIns="0" rtlCol="0" anchor="ctr"/>
           <a:lstStyle/>
           <a:p>
-            <a:pPr algn="ctr" indent="0" marL="0">
+            <a:pPr marL="0" indent="0" algn="ctr">
               <a:buNone/>
             </a:pPr>
             <a:r>
@@ -9928,7 +8885,7 @@
           <a:bodyPr wrap="square" lIns="0" tIns="0" rIns="0" bIns="0" rtlCol="0" anchor="ctr"/>
           <a:lstStyle/>
           <a:p>
-            <a:pPr indent="0" marL="0">
+            <a:pPr marL="0" indent="0">
               <a:buNone/>
             </a:pPr>
             <a:r>
@@ -9967,7 +8924,7 @@
           <a:bodyPr wrap="square" lIns="0" tIns="0" rIns="0" bIns="0" rtlCol="0" anchor="ctr"/>
           <a:lstStyle/>
           <a:p>
-            <a:pPr indent="0" marL="0">
+            <a:pPr marL="0" indent="0">
               <a:buNone/>
             </a:pPr>
             <a:r>
@@ -10026,7 +8983,7 @@
           <a:bodyPr wrap="square" lIns="0" tIns="0" rIns="0" bIns="0" rtlCol="0" anchor="ctr"/>
           <a:lstStyle/>
           <a:p>
-            <a:pPr algn="ctr" indent="0" marL="0">
+            <a:pPr marL="0" indent="0" algn="ctr">
               <a:buNone/>
             </a:pPr>
             <a:r>
@@ -10065,7 +9022,7 @@
           <a:bodyPr wrap="square" lIns="0" tIns="0" rIns="0" bIns="0" rtlCol="0" anchor="ctr"/>
           <a:lstStyle/>
           <a:p>
-            <a:pPr indent="0" marL="0">
+            <a:pPr marL="0" indent="0">
               <a:buNone/>
             </a:pPr>
             <a:r>
@@ -10104,7 +9061,7 @@
           <a:bodyPr wrap="square" lIns="0" tIns="0" rIns="0" bIns="0" rtlCol="0" anchor="ctr"/>
           <a:lstStyle/>
           <a:p>
-            <a:pPr indent="0" marL="0">
+            <a:pPr marL="0" indent="0">
               <a:buNone/>
             </a:pPr>
             <a:r>
@@ -10163,7 +9120,7 @@
           <a:bodyPr wrap="square" lIns="0" tIns="0" rIns="0" bIns="0" rtlCol="0" anchor="ctr"/>
           <a:lstStyle/>
           <a:p>
-            <a:pPr algn="ctr" indent="0" marL="0">
+            <a:pPr marL="0" indent="0" algn="ctr">
               <a:buNone/>
             </a:pPr>
             <a:r>
@@ -10202,7 +9159,7 @@
           <a:bodyPr wrap="square" lIns="0" tIns="0" rIns="0" bIns="0" rtlCol="0" anchor="ctr"/>
           <a:lstStyle/>
           <a:p>
-            <a:pPr indent="0" marL="0">
+            <a:pPr marL="0" indent="0">
               <a:buNone/>
             </a:pPr>
             <a:r>
@@ -10241,7 +9198,7 @@
           <a:bodyPr wrap="square" lIns="0" tIns="0" rIns="0" bIns="0" rtlCol="0" anchor="ctr"/>
           <a:lstStyle/>
           <a:p>
-            <a:pPr indent="0" marL="0">
+            <a:pPr marL="0" indent="0">
               <a:buNone/>
             </a:pPr>
             <a:r>
@@ -10300,7 +9257,7 @@
           <a:bodyPr wrap="square" lIns="0" tIns="0" rIns="0" bIns="0" rtlCol="0" anchor="ctr"/>
           <a:lstStyle/>
           <a:p>
-            <a:pPr algn="ctr" indent="0" marL="0">
+            <a:pPr marL="0" indent="0" algn="ctr">
               <a:buNone/>
             </a:pPr>
             <a:r>
@@ -10339,7 +9296,7 @@
           <a:bodyPr wrap="square" lIns="0" tIns="0" rIns="0" bIns="0" rtlCol="0" anchor="ctr"/>
           <a:lstStyle/>
           <a:p>
-            <a:pPr indent="0" marL="0">
+            <a:pPr marL="0" indent="0">
               <a:buNone/>
             </a:pPr>
             <a:r>
@@ -10378,7 +9335,7 @@
           <a:bodyPr wrap="square" lIns="0" tIns="0" rIns="0" bIns="0" rtlCol="0" anchor="ctr"/>
           <a:lstStyle/>
           <a:p>
-            <a:pPr indent="0" marL="0">
+            <a:pPr marL="0" indent="0">
               <a:buNone/>
             </a:pPr>
             <a:r>
@@ -10393,84 +9350,6 @@
               <a:t>Herramientas de gestión, repositorio, modelado y arquitectura.</a:t>
             </a:r>
             <a:endParaRPr lang="en-US" sz="1250" dirty="0"/>
-          </a:p>
-        </p:txBody>
-      </p:sp>
-      <p:sp>
-        <p:nvSpPr>
-          <p:cNvPr id="20" name="Text 18"/>
-          <p:cNvSpPr txBox="1"/>
-          <p:nvPr/>
-        </p:nvSpPr>
-        <p:spPr>
-          <a:xfrm>
-            <a:off x="548640" y="6473952"/>
-            <a:ext cx="4572000" cy="274320"/>
-          </a:xfrm>
-          <a:prstGeom prst="rect">
-            <a:avLst/>
-          </a:prstGeom>
-          <a:noFill/>
-          <a:ln/>
-        </p:spPr>
-        <p:txBody>
-          <a:bodyPr wrap="square" lIns="0" tIns="0" rIns="0" bIns="0" rtlCol="0" anchor="ctr"/>
-          <a:lstStyle/>
-          <a:p>
-            <a:pPr indent="0" marL="0">
-              <a:buNone/>
-            </a:pPr>
-            <a:r>
-              <a:rPr lang="en-US" sz="900" dirty="0">
-                <a:solidFill>
-                  <a:srgbClr val="6B7280"/>
-                </a:solidFill>
-                <a:latin typeface="Arial" pitchFamily="34" charset="0"/>
-                <a:ea typeface="Arial" pitchFamily="34" charset="-122"/>
-                <a:cs typeface="Arial" pitchFamily="34" charset="-120"/>
-              </a:rPr>
-              <a:t>Agenda Fácil</a:t>
-            </a:r>
-            <a:endParaRPr lang="en-US" sz="900" dirty="0"/>
-          </a:p>
-        </p:txBody>
-      </p:sp>
-      <p:sp>
-        <p:nvSpPr>
-          <p:cNvPr id="21" name="Text 19"/>
-          <p:cNvSpPr txBox="1"/>
-          <p:nvPr/>
-        </p:nvSpPr>
-        <p:spPr>
-          <a:xfrm>
-            <a:off x="11094415" y="6473952"/>
-            <a:ext cx="548640" cy="274320"/>
-          </a:xfrm>
-          <a:prstGeom prst="rect">
-            <a:avLst/>
-          </a:prstGeom>
-          <a:noFill/>
-          <a:ln/>
-        </p:spPr>
-        <p:txBody>
-          <a:bodyPr wrap="square" lIns="0" tIns="0" rIns="0" bIns="0" rtlCol="0" anchor="ctr"/>
-          <a:lstStyle/>
-          <a:p>
-            <a:pPr algn="r" indent="0" marL="0">
-              <a:buNone/>
-            </a:pPr>
-            <a:r>
-              <a:rPr lang="en-US" sz="900" dirty="0">
-                <a:solidFill>
-                  <a:srgbClr val="6B7280"/>
-                </a:solidFill>
-                <a:latin typeface="Arial" pitchFamily="34" charset="0"/>
-                <a:ea typeface="Arial" pitchFamily="34" charset="-122"/>
-                <a:cs typeface="Arial" pitchFamily="34" charset="-120"/>
-              </a:rPr>
-              <a:t>1</a:t>
-            </a:r>
-            <a:endParaRPr lang="en-US" sz="900" dirty="0"/>
           </a:p>
         </p:txBody>
       </p:sp>
@@ -10490,6 +9369,7 @@
         <a:solidFill>
           <a:srgbClr val="FFFFFF"/>
         </a:solidFill>
+        <a:effectLst/>
       </p:bgPr>
     </p:bg>
     <p:spTree>
@@ -10527,11 +9407,11 @@
           <a:bodyPr wrap="square" lIns="0" tIns="0" rIns="0" bIns="0" rtlCol="0" anchor="ctr"/>
           <a:lstStyle/>
           <a:p>
-            <a:pPr indent="0" marL="0">
-              <a:buNone/>
-            </a:pPr>
-            <a:r>
-              <a:rPr lang="en-US" sz="1200" b="1" spc="200" kern="0" dirty="0">
+            <a:pPr marL="0" indent="0">
+              <a:buNone/>
+            </a:pPr>
+            <a:r>
+              <a:rPr lang="en-US" sz="1200" b="1" kern="0" spc="200" dirty="0">
                 <a:solidFill>
                   <a:srgbClr val="028090"/>
                 </a:solidFill>
@@ -10566,7 +9446,7 @@
           <a:bodyPr wrap="square" lIns="0" tIns="0" rIns="0" bIns="0" rtlCol="0" anchor="ctr"/>
           <a:lstStyle/>
           <a:p>
-            <a:pPr indent="0" marL="0">
+            <a:pPr marL="0" indent="0">
               <a:buNone/>
             </a:pPr>
             <a:r>
@@ -10605,7 +9485,7 @@
           <a:bodyPr wrap="square" lIns="0" tIns="0" rIns="0" bIns="0" rtlCol="0" anchor="ctr"/>
           <a:lstStyle/>
           <a:p>
-            <a:pPr indent="0" marL="0">
+            <a:pPr marL="0" indent="0">
               <a:lnSpc>
                 <a:spcPts val="2100"/>
               </a:lnSpc>
@@ -10667,14 +9547,14 @@
           <a:bodyPr wrap="square" lIns="0" tIns="0" rIns="0" bIns="0" rtlCol="0" anchor="ctr"/>
           <a:lstStyle/>
           <a:p>
-            <a:pPr indent="0" marL="0">
+            <a:pPr marL="0" indent="0">
               <a:lnSpc>
                 <a:spcPts val="1700"/>
               </a:lnSpc>
               <a:buNone/>
             </a:pPr>
             <a:r>
-              <a:rPr lang="en-US" sz="1300" dirty="0">
+              <a:rPr lang="en-US" sz="1400" dirty="0">
                 <a:solidFill>
                   <a:srgbClr val="3A506B"/>
                 </a:solidFill>
@@ -10684,7 +9564,7 @@
               </a:rPr>
               <a:t>Dos pacientes reciben el mismo horario porque nadie cruzó la información.</a:t>
             </a:r>
-            <a:endParaRPr lang="en-US" sz="1300" dirty="0"/>
+            <a:endParaRPr lang="en-US" sz="1400" dirty="0"/>
           </a:p>
         </p:txBody>
       </p:sp>
@@ -10729,14 +9609,14 @@
           <a:bodyPr wrap="square" lIns="0" tIns="0" rIns="0" bIns="0" rtlCol="0" anchor="ctr"/>
           <a:lstStyle/>
           <a:p>
-            <a:pPr indent="0" marL="0">
+            <a:pPr marL="0" indent="0">
               <a:lnSpc>
                 <a:spcPts val="1700"/>
               </a:lnSpc>
               <a:buNone/>
             </a:pPr>
             <a:r>
-              <a:rPr lang="en-US" sz="1300" dirty="0">
+              <a:rPr lang="en-US" sz="1400" dirty="0">
                 <a:solidFill>
                   <a:srgbClr val="3A506B"/>
                 </a:solidFill>
@@ -10746,7 +9626,7 @@
               </a:rPr>
               <a:t>Nadie recuerda avisarle al paciente un día antes: cae en no-show.</a:t>
             </a:r>
-            <a:endParaRPr lang="en-US" sz="1300" dirty="0"/>
+            <a:endParaRPr lang="en-US" sz="1400" dirty="0"/>
           </a:p>
         </p:txBody>
       </p:sp>
@@ -10791,14 +9671,14 @@
           <a:bodyPr wrap="square" lIns="0" tIns="0" rIns="0" bIns="0" rtlCol="0" anchor="ctr"/>
           <a:lstStyle/>
           <a:p>
-            <a:pPr indent="0" marL="0">
+            <a:pPr marL="0" indent="0">
               <a:lnSpc>
                 <a:spcPts val="1700"/>
               </a:lnSpc>
               <a:buNone/>
             </a:pPr>
             <a:r>
-              <a:rPr lang="en-US" sz="1300" dirty="0">
+              <a:rPr lang="en-US" sz="1400" dirty="0">
                 <a:solidFill>
                   <a:srgbClr val="3A506B"/>
                 </a:solidFill>
@@ -10808,7 +9688,7 @@
               </a:rPr>
               <a:t>Si la recepcionista falta, nadie sabe qué horarios quedan libres.</a:t>
             </a:r>
-            <a:endParaRPr lang="en-US" sz="1300" dirty="0"/>
+            <a:endParaRPr lang="en-US" sz="1400" dirty="0"/>
           </a:p>
         </p:txBody>
       </p:sp>
@@ -10853,14 +9733,14 @@
           <a:bodyPr wrap="square" lIns="0" tIns="0" rIns="0" bIns="0" rtlCol="0" anchor="ctr"/>
           <a:lstStyle/>
           <a:p>
-            <a:pPr indent="0" marL="0">
+            <a:pPr marL="0" indent="0">
               <a:lnSpc>
                 <a:spcPts val="1700"/>
               </a:lnSpc>
               <a:buNone/>
             </a:pPr>
             <a:r>
-              <a:rPr lang="en-US" sz="1300" dirty="0">
+              <a:rPr lang="en-US" sz="1400" dirty="0">
                 <a:solidFill>
                   <a:srgbClr val="3A506B"/>
                 </a:solidFill>
@@ -10870,7 +9750,7 @@
               </a:rPr>
               <a:t>La información de los pacientes vive en una sola libreta física.</a:t>
             </a:r>
-            <a:endParaRPr lang="en-US" sz="1300" dirty="0"/>
+            <a:endParaRPr lang="en-US" sz="1400" dirty="0"/>
           </a:p>
         </p:txBody>
       </p:sp>
@@ -10917,11 +9797,11 @@
           <a:bodyPr wrap="square" lIns="0" tIns="0" rIns="0" bIns="0" rtlCol="0" anchor="ctr"/>
           <a:lstStyle/>
           <a:p>
-            <a:pPr indent="0" marL="0">
-              <a:buNone/>
-            </a:pPr>
-            <a:r>
-              <a:rPr lang="en-US" sz="1100" b="1" spc="150" kern="0" dirty="0">
+            <a:pPr marL="0" indent="0">
+              <a:buNone/>
+            </a:pPr>
+            <a:r>
+              <a:rPr lang="en-US" sz="1100" b="1" kern="0" spc="150" dirty="0">
                 <a:solidFill>
                   <a:srgbClr val="F4A300"/>
                 </a:solidFill>
@@ -10956,7 +9836,7 @@
           <a:bodyPr wrap="square" lIns="0" tIns="0" rIns="0" bIns="0" rtlCol="0" anchor="ctr"/>
           <a:lstStyle/>
           <a:p>
-            <a:pPr indent="0" marL="0">
+            <a:pPr marL="0" indent="0">
               <a:lnSpc>
                 <a:spcPts val="2300"/>
               </a:lnSpc>
@@ -10998,7 +9878,7 @@
           <a:bodyPr wrap="square" lIns="0" tIns="0" rIns="0" bIns="0" rtlCol="0" anchor="ctr"/>
           <a:lstStyle/>
           <a:p>
-            <a:pPr indent="0" marL="0">
+            <a:pPr marL="0" indent="0">
               <a:lnSpc>
                 <a:spcPts val="1600"/>
               </a:lnSpc>
@@ -11016,84 +9896,6 @@
               <a:t>Esa pregunta es, en el fondo, el mismo problema que resuelve cualquier proyecto de software: convertir un proceso manual, propenso a errores, en un producto confiable.</a:t>
             </a:r>
             <a:endParaRPr lang="en-US" sz="1200" dirty="0"/>
-          </a:p>
-        </p:txBody>
-      </p:sp>
-      <p:sp>
-        <p:nvSpPr>
-          <p:cNvPr id="17" name="Text 15"/>
-          <p:cNvSpPr txBox="1"/>
-          <p:nvPr/>
-        </p:nvSpPr>
-        <p:spPr>
-          <a:xfrm>
-            <a:off x="548640" y="6473952"/>
-            <a:ext cx="4572000" cy="274320"/>
-          </a:xfrm>
-          <a:prstGeom prst="rect">
-            <a:avLst/>
-          </a:prstGeom>
-          <a:noFill/>
-          <a:ln/>
-        </p:spPr>
-        <p:txBody>
-          <a:bodyPr wrap="square" lIns="0" tIns="0" rIns="0" bIns="0" rtlCol="0" anchor="ctr"/>
-          <a:lstStyle/>
-          <a:p>
-            <a:pPr indent="0" marL="0">
-              <a:buNone/>
-            </a:pPr>
-            <a:r>
-              <a:rPr lang="en-US" sz="900" dirty="0">
-                <a:solidFill>
-                  <a:srgbClr val="6B7280"/>
-                </a:solidFill>
-                <a:latin typeface="Arial" pitchFamily="34" charset="0"/>
-                <a:ea typeface="Arial" pitchFamily="34" charset="-122"/>
-                <a:cs typeface="Arial" pitchFamily="34" charset="-120"/>
-              </a:rPr>
-              <a:t>Agenda Fácil</a:t>
-            </a:r>
-            <a:endParaRPr lang="en-US" sz="900" dirty="0"/>
-          </a:p>
-        </p:txBody>
-      </p:sp>
-      <p:sp>
-        <p:nvSpPr>
-          <p:cNvPr id="18" name="Text 16"/>
-          <p:cNvSpPr txBox="1"/>
-          <p:nvPr/>
-        </p:nvSpPr>
-        <p:spPr>
-          <a:xfrm>
-            <a:off x="11094415" y="6473952"/>
-            <a:ext cx="548640" cy="274320"/>
-          </a:xfrm>
-          <a:prstGeom prst="rect">
-            <a:avLst/>
-          </a:prstGeom>
-          <a:noFill/>
-          <a:ln/>
-        </p:spPr>
-        <p:txBody>
-          <a:bodyPr wrap="square" lIns="0" tIns="0" rIns="0" bIns="0" rtlCol="0" anchor="ctr"/>
-          <a:lstStyle/>
-          <a:p>
-            <a:pPr algn="r" indent="0" marL="0">
-              <a:buNone/>
-            </a:pPr>
-            <a:r>
-              <a:rPr lang="en-US" sz="900" dirty="0">
-                <a:solidFill>
-                  <a:srgbClr val="6B7280"/>
-                </a:solidFill>
-                <a:latin typeface="Arial" pitchFamily="34" charset="0"/>
-                <a:ea typeface="Arial" pitchFamily="34" charset="-122"/>
-                <a:cs typeface="Arial" pitchFamily="34" charset="-120"/>
-              </a:rPr>
-              <a:t>2</a:t>
-            </a:r>
-            <a:endParaRPr lang="en-US" sz="900" dirty="0"/>
           </a:p>
         </p:txBody>
       </p:sp>
@@ -11113,6 +9915,7 @@
         <a:solidFill>
           <a:srgbClr val="F4F8F7"/>
         </a:solidFill>
+        <a:effectLst/>
       </p:bgPr>
     </p:bg>
     <p:spTree>
@@ -11131,45 +9934,6 @@
       </p:grpSpPr>
       <p:sp>
         <p:nvSpPr>
-          <p:cNvPr id="2" name="Text 0"/>
-          <p:cNvSpPr txBox="1"/>
-          <p:nvPr/>
-        </p:nvSpPr>
-        <p:spPr>
-          <a:xfrm>
-            <a:off x="548640" y="384048"/>
-            <a:ext cx="11094415" cy="292608"/>
-          </a:xfrm>
-          <a:prstGeom prst="rect">
-            <a:avLst/>
-          </a:prstGeom>
-          <a:noFill/>
-          <a:ln/>
-        </p:spPr>
-        <p:txBody>
-          <a:bodyPr wrap="square" lIns="0" tIns="0" rIns="0" bIns="0" rtlCol="0" anchor="ctr"/>
-          <a:lstStyle/>
-          <a:p>
-            <a:pPr indent="0" marL="0">
-              <a:buNone/>
-            </a:pPr>
-            <a:r>
-              <a:rPr lang="en-US" sz="1200" b="1" spc="200" kern="0" dirty="0">
-                <a:solidFill>
-                  <a:srgbClr val="028090"/>
-                </a:solidFill>
-                <a:latin typeface="Arial" pitchFamily="34" charset="0"/>
-                <a:ea typeface="Arial" pitchFamily="34" charset="-122"/>
-                <a:cs typeface="Arial" pitchFamily="34" charset="-120"/>
-              </a:rPr>
-              <a:t>LA ANALOGÍA QUE USAREMOS</a:t>
-            </a:r>
-            <a:endParaRPr lang="en-US" sz="1200" dirty="0"/>
-          </a:p>
-        </p:txBody>
-      </p:sp>
-      <p:sp>
-        <p:nvSpPr>
           <p:cNvPr id="3" name="Text 1"/>
           <p:cNvSpPr txBox="1"/>
           <p:nvPr/>
@@ -11189,7 +9953,7 @@
           <a:bodyPr wrap="square" lIns="0" tIns="0" rIns="0" bIns="0" rtlCol="0" anchor="ctr"/>
           <a:lstStyle/>
           <a:p>
-            <a:pPr indent="0" marL="0">
+            <a:pPr marL="0" indent="0">
               <a:buNone/>
             </a:pPr>
             <a:r>
@@ -11277,7 +10041,7 @@
           <a:bodyPr wrap="square" lIns="0" tIns="0" rIns="0" bIns="0" rtlCol="0" anchor="ctr"/>
           <a:lstStyle/>
           <a:p>
-            <a:pPr algn="ctr" indent="0" marL="0">
+            <a:pPr marL="0" indent="0" algn="ctr">
               <a:buNone/>
             </a:pPr>
             <a:r>
@@ -11316,7 +10080,7 @@
           <a:bodyPr wrap="square" lIns="0" tIns="0" rIns="0" bIns="0" rtlCol="0" anchor="ctr"/>
           <a:lstStyle/>
           <a:p>
-            <a:pPr indent="0" marL="0">
+            <a:pPr marL="0" indent="0">
               <a:buNone/>
             </a:pPr>
             <a:r>
@@ -11355,7 +10119,7 @@
           <a:bodyPr wrap="square" lIns="0" tIns="0" rIns="0" bIns="0" rtlCol="0" anchor="ctr"/>
           <a:lstStyle/>
           <a:p>
-            <a:pPr indent="0" marL="0">
+            <a:pPr marL="0" indent="0">
               <a:lnSpc>
                 <a:spcPts val="1600"/>
               </a:lnSpc>
@@ -11397,7 +10161,7 @@
           <a:bodyPr wrap="square" lIns="0" tIns="0" rIns="0" bIns="0" rtlCol="0" anchor="ctr"/>
           <a:lstStyle/>
           <a:p>
-            <a:pPr indent="0" marL="0">
+            <a:pPr marL="0" indent="0">
               <a:buNone/>
             </a:pPr>
             <a:r>
@@ -11436,7 +10200,7 @@
           <a:bodyPr wrap="square" lIns="0" tIns="0" rIns="0" bIns="0" rtlCol="0" anchor="ctr"/>
           <a:lstStyle/>
           <a:p>
-            <a:pPr indent="0" marL="0">
+            <a:pPr marL="0" indent="0">
               <a:lnSpc>
                 <a:spcPts val="1600"/>
               </a:lnSpc>
@@ -11478,7 +10242,7 @@
           <a:bodyPr wrap="square" lIns="0" tIns="0" rIns="0" bIns="0" rtlCol="0" anchor="ctr"/>
           <a:lstStyle/>
           <a:p>
-            <a:pPr indent="0" marL="0">
+            <a:pPr marL="0" indent="0">
               <a:buNone/>
             </a:pPr>
             <a:r>
@@ -11517,7 +10281,7 @@
           <a:bodyPr wrap="square" lIns="0" tIns="0" rIns="0" bIns="0" rtlCol="0" anchor="ctr"/>
           <a:lstStyle/>
           <a:p>
-            <a:pPr indent="0" marL="0">
+            <a:pPr marL="0" indent="0">
               <a:lnSpc>
                 <a:spcPts val="1600"/>
               </a:lnSpc>
@@ -11559,7 +10323,7 @@
           <a:bodyPr wrap="square" lIns="0" tIns="0" rIns="0" bIns="0" rtlCol="0" anchor="ctr"/>
           <a:lstStyle/>
           <a:p>
-            <a:pPr indent="0" marL="0">
+            <a:pPr marL="0" indent="0">
               <a:buNone/>
             </a:pPr>
             <a:r>
@@ -11598,7 +10362,7 @@
           <a:bodyPr wrap="square" lIns="0" tIns="0" rIns="0" bIns="0" rtlCol="0" anchor="ctr"/>
           <a:lstStyle/>
           <a:p>
-            <a:pPr indent="0" marL="0">
+            <a:pPr marL="0" indent="0">
               <a:lnSpc>
                 <a:spcPts val="1600"/>
               </a:lnSpc>
@@ -11689,7 +10453,7 @@
           <a:bodyPr wrap="square" lIns="0" tIns="0" rIns="0" bIns="0" rtlCol="0" anchor="ctr"/>
           <a:lstStyle/>
           <a:p>
-            <a:pPr algn="ctr" indent="0" marL="0">
+            <a:pPr marL="0" indent="0" algn="ctr">
               <a:buNone/>
             </a:pPr>
             <a:r>
@@ -11728,7 +10492,7 @@
           <a:bodyPr wrap="square" lIns="0" tIns="0" rIns="0" bIns="0" rtlCol="0" anchor="ctr"/>
           <a:lstStyle/>
           <a:p>
-            <a:pPr indent="0" marL="0">
+            <a:pPr marL="0" indent="0">
               <a:buNone/>
             </a:pPr>
             <a:r>
@@ -11767,7 +10531,7 @@
           <a:bodyPr wrap="square" lIns="0" tIns="0" rIns="0" bIns="0" rtlCol="0" anchor="ctr"/>
           <a:lstStyle/>
           <a:p>
-            <a:pPr indent="0" marL="0">
+            <a:pPr marL="0" indent="0">
               <a:lnSpc>
                 <a:spcPts val="1600"/>
               </a:lnSpc>
@@ -11809,7 +10573,7 @@
           <a:bodyPr wrap="square" lIns="0" tIns="0" rIns="0" bIns="0" rtlCol="0" anchor="ctr"/>
           <a:lstStyle/>
           <a:p>
-            <a:pPr indent="0" marL="0">
+            <a:pPr marL="0" indent="0">
               <a:buNone/>
             </a:pPr>
             <a:r>
@@ -11848,7 +10612,7 @@
           <a:bodyPr wrap="square" lIns="0" tIns="0" rIns="0" bIns="0" rtlCol="0" anchor="ctr"/>
           <a:lstStyle/>
           <a:p>
-            <a:pPr indent="0" marL="0">
+            <a:pPr marL="0" indent="0">
               <a:lnSpc>
                 <a:spcPts val="1600"/>
               </a:lnSpc>
@@ -11890,7 +10654,7 @@
           <a:bodyPr wrap="square" lIns="0" tIns="0" rIns="0" bIns="0" rtlCol="0" anchor="ctr"/>
           <a:lstStyle/>
           <a:p>
-            <a:pPr indent="0" marL="0">
+            <a:pPr marL="0" indent="0">
               <a:buNone/>
             </a:pPr>
             <a:r>
@@ -11929,7 +10693,7 @@
           <a:bodyPr wrap="square" lIns="0" tIns="0" rIns="0" bIns="0" rtlCol="0" anchor="ctr"/>
           <a:lstStyle/>
           <a:p>
-            <a:pPr indent="0" marL="0">
+            <a:pPr marL="0" indent="0">
               <a:lnSpc>
                 <a:spcPts val="1600"/>
               </a:lnSpc>
@@ -11971,7 +10735,7 @@
           <a:bodyPr wrap="square" lIns="0" tIns="0" rIns="0" bIns="0" rtlCol="0" anchor="ctr"/>
           <a:lstStyle/>
           <a:p>
-            <a:pPr indent="0" marL="0">
+            <a:pPr marL="0" indent="0">
               <a:buNone/>
             </a:pPr>
             <a:r>
@@ -12010,7 +10774,7 @@
           <a:bodyPr wrap="square" lIns="0" tIns="0" rIns="0" bIns="0" rtlCol="0" anchor="ctr"/>
           <a:lstStyle/>
           <a:p>
-            <a:pPr indent="0" marL="0">
+            <a:pPr marL="0" indent="0">
               <a:lnSpc>
                 <a:spcPts val="1600"/>
               </a:lnSpc>
@@ -12028,84 +10792,6 @@
               <a:t>Un cambio se avisa solo, por WhatsApp o SMS.</a:t>
             </a:r>
             <a:endParaRPr lang="en-US" sz="1250" dirty="0"/>
-          </a:p>
-        </p:txBody>
-      </p:sp>
-      <p:sp>
-        <p:nvSpPr>
-          <p:cNvPr id="26" name="Text 24"/>
-          <p:cNvSpPr txBox="1"/>
-          <p:nvPr/>
-        </p:nvSpPr>
-        <p:spPr>
-          <a:xfrm>
-            <a:off x="548640" y="6473952"/>
-            <a:ext cx="4572000" cy="274320"/>
-          </a:xfrm>
-          <a:prstGeom prst="rect">
-            <a:avLst/>
-          </a:prstGeom>
-          <a:noFill/>
-          <a:ln/>
-        </p:spPr>
-        <p:txBody>
-          <a:bodyPr wrap="square" lIns="0" tIns="0" rIns="0" bIns="0" rtlCol="0" anchor="ctr"/>
-          <a:lstStyle/>
-          <a:p>
-            <a:pPr indent="0" marL="0">
-              <a:buNone/>
-            </a:pPr>
-            <a:r>
-              <a:rPr lang="en-US" sz="900" dirty="0">
-                <a:solidFill>
-                  <a:srgbClr val="6B7280"/>
-                </a:solidFill>
-                <a:latin typeface="Arial" pitchFamily="34" charset="0"/>
-                <a:ea typeface="Arial" pitchFamily="34" charset="-122"/>
-                <a:cs typeface="Arial" pitchFamily="34" charset="-120"/>
-              </a:rPr>
-              <a:t>Agenda Fácil</a:t>
-            </a:r>
-            <a:endParaRPr lang="en-US" sz="900" dirty="0"/>
-          </a:p>
-        </p:txBody>
-      </p:sp>
-      <p:sp>
-        <p:nvSpPr>
-          <p:cNvPr id="27" name="Text 25"/>
-          <p:cNvSpPr txBox="1"/>
-          <p:nvPr/>
-        </p:nvSpPr>
-        <p:spPr>
-          <a:xfrm>
-            <a:off x="11094415" y="6473952"/>
-            <a:ext cx="548640" cy="274320"/>
-          </a:xfrm>
-          <a:prstGeom prst="rect">
-            <a:avLst/>
-          </a:prstGeom>
-          <a:noFill/>
-          <a:ln/>
-        </p:spPr>
-        <p:txBody>
-          <a:bodyPr wrap="square" lIns="0" tIns="0" rIns="0" bIns="0" rtlCol="0" anchor="ctr"/>
-          <a:lstStyle/>
-          <a:p>
-            <a:pPr algn="r" indent="0" marL="0">
-              <a:buNone/>
-            </a:pPr>
-            <a:r>
-              <a:rPr lang="en-US" sz="900" dirty="0">
-                <a:solidFill>
-                  <a:srgbClr val="6B7280"/>
-                </a:solidFill>
-                <a:latin typeface="Arial" pitchFamily="34" charset="0"/>
-                <a:ea typeface="Arial" pitchFamily="34" charset="-122"/>
-                <a:cs typeface="Arial" pitchFamily="34" charset="-120"/>
-              </a:rPr>
-              <a:t>3</a:t>
-            </a:r>
-            <a:endParaRPr lang="en-US" sz="900" dirty="0"/>
           </a:p>
         </p:txBody>
       </p:sp>
@@ -12125,6 +10811,7 @@
         <a:solidFill>
           <a:srgbClr val="FFFFFF"/>
         </a:solidFill>
+        <a:effectLst/>
       </p:bgPr>
     </p:bg>
     <p:spTree>
@@ -12162,11 +10849,11 @@
           <a:bodyPr wrap="square" lIns="0" tIns="0" rIns="0" bIns="0" rtlCol="0" anchor="ctr"/>
           <a:lstStyle/>
           <a:p>
-            <a:pPr indent="0" marL="0">
-              <a:buNone/>
-            </a:pPr>
-            <a:r>
-              <a:rPr lang="en-US" sz="1200" b="1" spc="200" kern="0" dirty="0">
+            <a:pPr marL="0" indent="0">
+              <a:buNone/>
+            </a:pPr>
+            <a:r>
+              <a:rPr lang="en-US" sz="1200" b="1" kern="0" spc="200" dirty="0">
                 <a:solidFill>
                   <a:srgbClr val="028090"/>
                 </a:solidFill>
@@ -12201,7 +10888,7 @@
           <a:bodyPr wrap="square" lIns="0" tIns="0" rIns="0" bIns="0" rtlCol="0" anchor="ctr"/>
           <a:lstStyle/>
           <a:p>
-            <a:pPr indent="0" marL="0">
+            <a:pPr marL="0" indent="0">
               <a:buNone/>
             </a:pPr>
             <a:r>
@@ -12262,11 +10949,11 @@
           <a:bodyPr wrap="square" lIns="0" tIns="0" rIns="0" bIns="0" rtlCol="0" anchor="ctr"/>
           <a:lstStyle/>
           <a:p>
-            <a:pPr indent="0" marL="0">
-              <a:buNone/>
-            </a:pPr>
-            <a:r>
-              <a:rPr lang="en-US" sz="1100" b="1" spc="150" kern="0" dirty="0">
+            <a:pPr marL="0" indent="0">
+              <a:buNone/>
+            </a:pPr>
+            <a:r>
+              <a:rPr lang="en-US" sz="1100" b="1" kern="0" spc="150" dirty="0">
                 <a:solidFill>
                   <a:srgbClr val="D6ECE8"/>
                 </a:solidFill>
@@ -12301,7 +10988,7 @@
           <a:bodyPr wrap="square" lIns="0" tIns="0" rIns="0" bIns="0" rtlCol="0" anchor="ctr"/>
           <a:lstStyle/>
           <a:p>
-            <a:pPr indent="0" marL="0">
+            <a:pPr marL="0" indent="0">
               <a:lnSpc>
                 <a:spcPts val="1800"/>
               </a:lnSpc>
@@ -12365,7 +11052,7 @@
           <a:bodyPr wrap="square" lIns="0" tIns="0" rIns="0" bIns="0" rtlCol="0" anchor="ctr"/>
           <a:lstStyle/>
           <a:p>
-            <a:pPr indent="0" marL="0">
+            <a:pPr marL="0" indent="0">
               <a:buNone/>
             </a:pPr>
             <a:r>
@@ -12404,7 +11091,7 @@
           <a:bodyPr wrap="square" lIns="0" tIns="0" rIns="0" bIns="0" rtlCol="0" anchor="ctr"/>
           <a:lstStyle/>
           <a:p>
-            <a:pPr indent="0" marL="0">
+            <a:pPr marL="0" indent="0">
               <a:lnSpc>
                 <a:spcPts val="1500"/>
               </a:lnSpc>
@@ -12446,7 +11133,7 @@
           <a:bodyPr wrap="square" lIns="0" tIns="0" rIns="0" bIns="0" rtlCol="0" anchor="ctr"/>
           <a:lstStyle/>
           <a:p>
-            <a:pPr indent="0" marL="0">
+            <a:pPr marL="0" indent="0">
               <a:lnSpc>
                 <a:spcPts val="1500"/>
               </a:lnSpc>
@@ -12488,7 +11175,7 @@
           <a:bodyPr wrap="square" lIns="0" tIns="0" rIns="0" bIns="0" rtlCol="0" anchor="ctr"/>
           <a:lstStyle/>
           <a:p>
-            <a:pPr indent="0" marL="0">
+            <a:pPr marL="0" indent="0">
               <a:lnSpc>
                 <a:spcPts val="1500"/>
               </a:lnSpc>
@@ -12530,7 +11217,7 @@
           <a:bodyPr wrap="square" lIns="0" tIns="0" rIns="0" bIns="0" rtlCol="0" anchor="ctr"/>
           <a:lstStyle/>
           <a:p>
-            <a:pPr indent="0" marL="0">
+            <a:pPr marL="0" indent="0">
               <a:lnSpc>
                 <a:spcPts val="1500"/>
               </a:lnSpc>
@@ -12594,7 +11281,7 @@
           <a:bodyPr wrap="square" lIns="0" tIns="0" rIns="0" bIns="0" rtlCol="0" anchor="ctr"/>
           <a:lstStyle/>
           <a:p>
-            <a:pPr indent="0" marL="0">
+            <a:pPr marL="0" indent="0">
               <a:buNone/>
             </a:pPr>
             <a:r>
@@ -12633,7 +11320,7 @@
           <a:bodyPr wrap="square" lIns="0" tIns="0" rIns="0" bIns="0" rtlCol="0" anchor="ctr"/>
           <a:lstStyle/>
           <a:p>
-            <a:pPr indent="0" marL="0">
+            <a:pPr marL="0" indent="0">
               <a:lnSpc>
                 <a:spcPts val="1500"/>
               </a:lnSpc>
@@ -12675,7 +11362,7 @@
           <a:bodyPr wrap="square" lIns="0" tIns="0" rIns="0" bIns="0" rtlCol="0" anchor="ctr"/>
           <a:lstStyle/>
           <a:p>
-            <a:pPr indent="0" marL="0">
+            <a:pPr marL="0" indent="0">
               <a:lnSpc>
                 <a:spcPts val="1500"/>
               </a:lnSpc>
@@ -12717,7 +11404,7 @@
           <a:bodyPr wrap="square" lIns="0" tIns="0" rIns="0" bIns="0" rtlCol="0" anchor="ctr"/>
           <a:lstStyle/>
           <a:p>
-            <a:pPr indent="0" marL="0">
+            <a:pPr marL="0" indent="0">
               <a:lnSpc>
                 <a:spcPts val="1500"/>
               </a:lnSpc>
@@ -12759,7 +11446,7 @@
           <a:bodyPr wrap="square" lIns="0" tIns="0" rIns="0" bIns="0" rtlCol="0" anchor="ctr"/>
           <a:lstStyle/>
           <a:p>
-            <a:pPr indent="0" marL="0">
+            <a:pPr marL="0" indent="0">
               <a:lnSpc>
                 <a:spcPts val="1500"/>
               </a:lnSpc>
@@ -12801,7 +11488,7 @@
           <a:bodyPr wrap="square" lIns="0" tIns="0" rIns="0" bIns="0" rtlCol="0" anchor="ctr"/>
           <a:lstStyle/>
           <a:p>
-            <a:pPr indent="0" marL="0">
+            <a:pPr marL="0" indent="0">
               <a:buNone/>
             </a:pPr>
             <a:r>
@@ -12840,7 +11527,7 @@
           <a:bodyPr wrap="square" lIns="0" tIns="0" rIns="0" bIns="0" rtlCol="0" anchor="ctr"/>
           <a:lstStyle/>
           <a:p>
-            <a:pPr algn="r" indent="0" marL="0">
+            <a:pPr marL="0" indent="0" algn="r">
               <a:buNone/>
             </a:pPr>
             <a:r>
@@ -12874,6 +11561,7 @@
         <a:solidFill>
           <a:srgbClr val="FFFFFF"/>
         </a:solidFill>
+        <a:effectLst/>
       </p:bgPr>
     </p:bg>
     <p:spTree>
@@ -12911,11 +11599,11 @@
           <a:bodyPr wrap="square" lIns="0" tIns="0" rIns="0" bIns="0" rtlCol="0" anchor="ctr"/>
           <a:lstStyle/>
           <a:p>
-            <a:pPr indent="0" marL="0">
-              <a:buNone/>
-            </a:pPr>
-            <a:r>
-              <a:rPr lang="en-US" sz="1200" b="1" spc="200" kern="0" dirty="0">
+            <a:pPr marL="0" indent="0">
+              <a:buNone/>
+            </a:pPr>
+            <a:r>
+              <a:rPr lang="en-US" sz="1200" b="1" kern="0" spc="200" dirty="0">
                 <a:solidFill>
                   <a:srgbClr val="028090"/>
                 </a:solidFill>
@@ -12950,7 +11638,7 @@
           <a:bodyPr wrap="square" lIns="0" tIns="0" rIns="0" bIns="0" rtlCol="0" anchor="ctr"/>
           <a:lstStyle/>
           <a:p>
-            <a:pPr indent="0" marL="0">
+            <a:pPr marL="0" indent="0">
               <a:buNone/>
             </a:pPr>
             <a:r>
@@ -13031,7 +11719,7 @@
           <a:bodyPr wrap="square" lIns="0" tIns="0" rIns="0" bIns="0" rtlCol="0" anchor="ctr"/>
           <a:lstStyle/>
           <a:p>
-            <a:pPr algn="ctr" indent="0" marL="0">
+            <a:pPr marL="0" indent="0" algn="ctr">
               <a:buNone/>
             </a:pPr>
             <a:r>
@@ -13070,7 +11758,7 @@
           <a:bodyPr wrap="square" lIns="0" tIns="0" rIns="0" bIns="0" rtlCol="0" anchor="ctr"/>
           <a:lstStyle/>
           <a:p>
-            <a:pPr indent="0" marL="0">
+            <a:pPr marL="0" indent="0">
               <a:buNone/>
             </a:pPr>
             <a:r>
@@ -13109,7 +11797,7 @@
           <a:bodyPr wrap="square" lIns="0" tIns="0" rIns="0" bIns="0" rtlCol="0" anchor="ctr"/>
           <a:lstStyle/>
           <a:p>
-            <a:pPr indent="0" marL="0">
+            <a:pPr marL="0" indent="0">
               <a:lnSpc>
                 <a:spcPts val="1500"/>
               </a:lnSpc>
@@ -13193,7 +11881,7 @@
           <a:bodyPr wrap="square" lIns="0" tIns="0" rIns="0" bIns="0" rtlCol="0" anchor="ctr"/>
           <a:lstStyle/>
           <a:p>
-            <a:pPr algn="ctr" indent="0" marL="0">
+            <a:pPr marL="0" indent="0" algn="ctr">
               <a:buNone/>
             </a:pPr>
             <a:r>
@@ -13232,7 +11920,7 @@
           <a:bodyPr wrap="square" lIns="0" tIns="0" rIns="0" bIns="0" rtlCol="0" anchor="ctr"/>
           <a:lstStyle/>
           <a:p>
-            <a:pPr indent="0" marL="0">
+            <a:pPr marL="0" indent="0">
               <a:buNone/>
             </a:pPr>
             <a:r>
@@ -13271,7 +11959,7 @@
           <a:bodyPr wrap="square" lIns="0" tIns="0" rIns="0" bIns="0" rtlCol="0" anchor="ctr"/>
           <a:lstStyle/>
           <a:p>
-            <a:pPr indent="0" marL="0">
+            <a:pPr marL="0" indent="0">
               <a:lnSpc>
                 <a:spcPts val="1500"/>
               </a:lnSpc>
@@ -13355,7 +12043,7 @@
           <a:bodyPr wrap="square" lIns="0" tIns="0" rIns="0" bIns="0" rtlCol="0" anchor="ctr"/>
           <a:lstStyle/>
           <a:p>
-            <a:pPr algn="ctr" indent="0" marL="0">
+            <a:pPr marL="0" indent="0" algn="ctr">
               <a:buNone/>
             </a:pPr>
             <a:r>
@@ -13394,7 +12082,7 @@
           <a:bodyPr wrap="square" lIns="0" tIns="0" rIns="0" bIns="0" rtlCol="0" anchor="ctr"/>
           <a:lstStyle/>
           <a:p>
-            <a:pPr indent="0" marL="0">
+            <a:pPr marL="0" indent="0">
               <a:buNone/>
             </a:pPr>
             <a:r>
@@ -13433,7 +12121,7 @@
           <a:bodyPr wrap="square" lIns="0" tIns="0" rIns="0" bIns="0" rtlCol="0" anchor="ctr"/>
           <a:lstStyle/>
           <a:p>
-            <a:pPr indent="0" marL="0">
+            <a:pPr marL="0" indent="0">
               <a:lnSpc>
                 <a:spcPts val="1500"/>
               </a:lnSpc>
@@ -13517,7 +12205,7 @@
           <a:bodyPr wrap="square" lIns="0" tIns="0" rIns="0" bIns="0" rtlCol="0" anchor="ctr"/>
           <a:lstStyle/>
           <a:p>
-            <a:pPr algn="ctr" indent="0" marL="0">
+            <a:pPr marL="0" indent="0" algn="ctr">
               <a:buNone/>
             </a:pPr>
             <a:r>
@@ -13556,7 +12244,7 @@
           <a:bodyPr wrap="square" lIns="0" tIns="0" rIns="0" bIns="0" rtlCol="0" anchor="ctr"/>
           <a:lstStyle/>
           <a:p>
-            <a:pPr indent="0" marL="0">
+            <a:pPr marL="0" indent="0">
               <a:buNone/>
             </a:pPr>
             <a:r>
@@ -13595,7 +12283,7 @@
           <a:bodyPr wrap="square" lIns="0" tIns="0" rIns="0" bIns="0" rtlCol="0" anchor="ctr"/>
           <a:lstStyle/>
           <a:p>
-            <a:pPr indent="0" marL="0">
+            <a:pPr marL="0" indent="0">
               <a:lnSpc>
                 <a:spcPts val="1500"/>
               </a:lnSpc>
@@ -13679,7 +12367,7 @@
           <a:bodyPr wrap="square" lIns="0" tIns="0" rIns="0" bIns="0" rtlCol="0" anchor="ctr"/>
           <a:lstStyle/>
           <a:p>
-            <a:pPr algn="ctr" indent="0" marL="0">
+            <a:pPr marL="0" indent="0" algn="ctr">
               <a:buNone/>
             </a:pPr>
             <a:r>
@@ -13718,7 +12406,7 @@
           <a:bodyPr wrap="square" lIns="0" tIns="0" rIns="0" bIns="0" rtlCol="0" anchor="ctr"/>
           <a:lstStyle/>
           <a:p>
-            <a:pPr indent="0" marL="0">
+            <a:pPr marL="0" indent="0">
               <a:buNone/>
             </a:pPr>
             <a:r>
@@ -13757,7 +12445,7 @@
           <a:bodyPr wrap="square" lIns="0" tIns="0" rIns="0" bIns="0" rtlCol="0" anchor="ctr"/>
           <a:lstStyle/>
           <a:p>
-            <a:pPr indent="0" marL="0">
+            <a:pPr marL="0" indent="0">
               <a:lnSpc>
                 <a:spcPts val="1500"/>
               </a:lnSpc>
@@ -13841,7 +12529,7 @@
           <a:bodyPr wrap="square" lIns="0" tIns="0" rIns="0" bIns="0" rtlCol="0" anchor="ctr"/>
           <a:lstStyle/>
           <a:p>
-            <a:pPr algn="ctr" indent="0" marL="0">
+            <a:pPr marL="0" indent="0" algn="ctr">
               <a:buNone/>
             </a:pPr>
             <a:r>
@@ -13880,7 +12568,7 @@
           <a:bodyPr wrap="square" lIns="0" tIns="0" rIns="0" bIns="0" rtlCol="0" anchor="ctr"/>
           <a:lstStyle/>
           <a:p>
-            <a:pPr indent="0" marL="0">
+            <a:pPr marL="0" indent="0">
               <a:buNone/>
             </a:pPr>
             <a:r>
@@ -13919,7 +12607,7 @@
           <a:bodyPr wrap="square" lIns="0" tIns="0" rIns="0" bIns="0" rtlCol="0" anchor="ctr"/>
           <a:lstStyle/>
           <a:p>
-            <a:pPr indent="0" marL="0">
+            <a:pPr marL="0" indent="0">
               <a:lnSpc>
                 <a:spcPts val="1500"/>
               </a:lnSpc>
@@ -13937,84 +12625,6 @@
               <a:t>Entrega los recordatorios; es un tercero externo.</a:t>
             </a:r>
             <a:endParaRPr lang="en-US" sz="1150" dirty="0"/>
-          </a:p>
-        </p:txBody>
-      </p:sp>
-      <p:sp>
-        <p:nvSpPr>
-          <p:cNvPr id="34" name="Text 32"/>
-          <p:cNvSpPr txBox="1"/>
-          <p:nvPr/>
-        </p:nvSpPr>
-        <p:spPr>
-          <a:xfrm>
-            <a:off x="548640" y="6473952"/>
-            <a:ext cx="4572000" cy="274320"/>
-          </a:xfrm>
-          <a:prstGeom prst="rect">
-            <a:avLst/>
-          </a:prstGeom>
-          <a:noFill/>
-          <a:ln/>
-        </p:spPr>
-        <p:txBody>
-          <a:bodyPr wrap="square" lIns="0" tIns="0" rIns="0" bIns="0" rtlCol="0" anchor="ctr"/>
-          <a:lstStyle/>
-          <a:p>
-            <a:pPr indent="0" marL="0">
-              <a:buNone/>
-            </a:pPr>
-            <a:r>
-              <a:rPr lang="en-US" sz="900" dirty="0">
-                <a:solidFill>
-                  <a:srgbClr val="6B7280"/>
-                </a:solidFill>
-                <a:latin typeface="Arial" pitchFamily="34" charset="0"/>
-                <a:ea typeface="Arial" pitchFamily="34" charset="-122"/>
-                <a:cs typeface="Arial" pitchFamily="34" charset="-120"/>
-              </a:rPr>
-              <a:t>Agenda Fácil</a:t>
-            </a:r>
-            <a:endParaRPr lang="en-US" sz="900" dirty="0"/>
-          </a:p>
-        </p:txBody>
-      </p:sp>
-      <p:sp>
-        <p:nvSpPr>
-          <p:cNvPr id="35" name="Text 33"/>
-          <p:cNvSpPr txBox="1"/>
-          <p:nvPr/>
-        </p:nvSpPr>
-        <p:spPr>
-          <a:xfrm>
-            <a:off x="11094415" y="6473952"/>
-            <a:ext cx="548640" cy="274320"/>
-          </a:xfrm>
-          <a:prstGeom prst="rect">
-            <a:avLst/>
-          </a:prstGeom>
-          <a:noFill/>
-          <a:ln/>
-        </p:spPr>
-        <p:txBody>
-          <a:bodyPr wrap="square" lIns="0" tIns="0" rIns="0" bIns="0" rtlCol="0" anchor="ctr"/>
-          <a:lstStyle/>
-          <a:p>
-            <a:pPr algn="r" indent="0" marL="0">
-              <a:buNone/>
-            </a:pPr>
-            <a:r>
-              <a:rPr lang="en-US" sz="900" dirty="0">
-                <a:solidFill>
-                  <a:srgbClr val="6B7280"/>
-                </a:solidFill>
-                <a:latin typeface="Arial" pitchFamily="34" charset="0"/>
-                <a:ea typeface="Arial" pitchFamily="34" charset="-122"/>
-                <a:cs typeface="Arial" pitchFamily="34" charset="-120"/>
-              </a:rPr>
-              <a:t>5</a:t>
-            </a:r>
-            <a:endParaRPr lang="en-US" sz="900" dirty="0"/>
           </a:p>
         </p:txBody>
       </p:sp>
@@ -14034,6 +12644,7 @@
         <a:solidFill>
           <a:srgbClr val="FFFFFF"/>
         </a:solidFill>
+        <a:effectLst/>
       </p:bgPr>
     </p:bg>
     <p:spTree>
@@ -14071,11 +12682,11 @@
           <a:bodyPr wrap="square" lIns="0" tIns="0" rIns="0" bIns="0" rtlCol="0" anchor="ctr"/>
           <a:lstStyle/>
           <a:p>
-            <a:pPr indent="0" marL="0">
-              <a:buNone/>
-            </a:pPr>
-            <a:r>
-              <a:rPr lang="en-US" sz="1200" b="1" spc="200" kern="0" dirty="0">
+            <a:pPr marL="0" indent="0">
+              <a:buNone/>
+            </a:pPr>
+            <a:r>
+              <a:rPr lang="en-US" sz="1200" b="1" kern="0" spc="200" dirty="0">
                 <a:solidFill>
                   <a:srgbClr val="028090"/>
                 </a:solidFill>
@@ -14110,7 +12721,7 @@
           <a:bodyPr wrap="square" lIns="0" tIns="0" rIns="0" bIns="0" rtlCol="0" anchor="ctr"/>
           <a:lstStyle/>
           <a:p>
-            <a:pPr indent="0" marL="0">
+            <a:pPr marL="0" indent="0">
               <a:buNone/>
             </a:pPr>
             <a:r>
@@ -14144,16 +12755,34 @@
         </p:nvGraphicFramePr>
         <p:xfrm>
           <a:off x="548640" y="1691640"/>
-          <a:ext cx="11094415" cy="4206240"/>
+          <a:ext cx="10360152" cy="3950208"/>
         </p:xfrm>
         <a:graphic>
           <a:graphicData uri="http://schemas.openxmlformats.org/drawingml/2006/table">
             <a:tbl>
               <a:tblPr/>
               <a:tblGrid>
-                <a:gridCol w="3383280"/>
-                <a:gridCol w="3566160"/>
-                <a:gridCol w="3410712"/>
+                <a:gridCol w="3383280">
+                  <a:extLst>
+                    <a:ext uri="{9D8B030D-6E8A-4147-A177-3AD203B41FA5}">
+                      <a16:colId xmlns:a16="http://schemas.microsoft.com/office/drawing/2014/main" val="20000"/>
+                    </a:ext>
+                  </a:extLst>
+                </a:gridCol>
+                <a:gridCol w="3566160">
+                  <a:extLst>
+                    <a:ext uri="{9D8B030D-6E8A-4147-A177-3AD203B41FA5}">
+                      <a16:colId xmlns:a16="http://schemas.microsoft.com/office/drawing/2014/main" val="20001"/>
+                    </a:ext>
+                  </a:extLst>
+                </a:gridCol>
+                <a:gridCol w="3410712">
+                  <a:extLst>
+                    <a:ext uri="{9D8B030D-6E8A-4147-A177-3AD203B41FA5}">
+                      <a16:colId xmlns:a16="http://schemas.microsoft.com/office/drawing/2014/main" val="20002"/>
+                    </a:ext>
+                  </a:extLst>
+                </a:gridCol>
               </a:tblGrid>
               <a:tr h="658368">
                 <a:tc>
@@ -14161,7 +12790,7 @@
                     <a:bodyPr/>
                     <a:lstStyle/>
                     <a:p>
-                      <a:pPr indent="0" marL="0">
+                      <a:pPr marL="0" indent="0">
                         <a:buNone/>
                       </a:pPr>
                       <a:r>
@@ -14182,7 +12811,7 @@
                       </a:endParaRPr>
                     </a:p>
                   </a:txBody>
-                  <a:tcPr marL="91440" marR="91440" marT="45720" marB="45720" anchor="ctr">
+                  <a:tcPr anchor="ctr">
                     <a:lnL w="9525" cap="flat" cmpd="sng" algn="ctr">
                       <a:solidFill>
                         <a:srgbClr val="E3E9E7"/>
@@ -14229,7 +12858,7 @@
                     <a:bodyPr/>
                     <a:lstStyle/>
                     <a:p>
-                      <a:pPr indent="0" marL="0">
+                      <a:pPr marL="0" indent="0">
                         <a:buNone/>
                       </a:pPr>
                       <a:r>
@@ -14250,7 +12879,7 @@
                       </a:endParaRPr>
                     </a:p>
                   </a:txBody>
-                  <a:tcPr marL="91440" marR="91440" marT="45720" marB="45720" anchor="ctr">
+                  <a:tcPr anchor="ctr">
                     <a:lnL w="9525" cap="flat" cmpd="sng" algn="ctr">
                       <a:solidFill>
                         <a:srgbClr val="E3E9E7"/>
@@ -14297,7 +12926,7 @@
                     <a:bodyPr/>
                     <a:lstStyle/>
                     <a:p>
-                      <a:pPr indent="0" marL="0">
+                      <a:pPr marL="0" indent="0">
                         <a:buNone/>
                       </a:pPr>
                       <a:r>
@@ -14318,7 +12947,7 @@
                       </a:endParaRPr>
                     </a:p>
                   </a:txBody>
-                  <a:tcPr marL="91440" marR="91440" marT="45720" marB="45720" anchor="ctr">
+                  <a:tcPr anchor="ctr">
                     <a:lnL w="9525" cap="flat" cmpd="sng" algn="ctr">
                       <a:solidFill>
                         <a:srgbClr val="E3E9E7"/>
@@ -14360,6 +12989,11 @@
                     </a:solidFill>
                   </a:tcPr>
                 </a:tc>
+                <a:extLst>
+                  <a:ext uri="{0D108BD9-81ED-4DB2-BD59-A6C34878D82A}">
+                    <a16:rowId xmlns:a16="http://schemas.microsoft.com/office/drawing/2014/main" val="10000"/>
+                  </a:ext>
+                </a:extLst>
               </a:tr>
               <a:tr h="658368">
                 <a:tc>
@@ -14367,7 +13001,7 @@
                     <a:bodyPr/>
                     <a:lstStyle/>
                     <a:p>
-                      <a:pPr indent="0" marL="0">
+                      <a:pPr marL="0" indent="0">
                         <a:buNone/>
                       </a:pPr>
                       <a:r>
@@ -14388,7 +13022,7 @@
                       </a:endParaRPr>
                     </a:p>
                   </a:txBody>
-                  <a:tcPr marL="91440" marR="91440" marT="45720" marB="45720" anchor="ctr">
+                  <a:tcPr anchor="ctr">
                     <a:lnL w="9525" cap="flat" cmpd="sng" algn="ctr">
                       <a:solidFill>
                         <a:srgbClr val="E3E9E7"/>
@@ -14435,7 +13069,7 @@
                     <a:bodyPr/>
                     <a:lstStyle/>
                     <a:p>
-                      <a:pPr indent="0" marL="0">
+                      <a:pPr marL="0" indent="0">
                         <a:buNone/>
                       </a:pPr>
                       <a:r>
@@ -14456,7 +13090,7 @@
                       </a:endParaRPr>
                     </a:p>
                   </a:txBody>
-                  <a:tcPr marL="91440" marR="91440" marT="45720" marB="45720" anchor="ctr">
+                  <a:tcPr anchor="ctr">
                     <a:lnL w="9525" cap="flat" cmpd="sng" algn="ctr">
                       <a:solidFill>
                         <a:srgbClr val="E3E9E7"/>
@@ -14503,7 +13137,7 @@
                     <a:bodyPr/>
                     <a:lstStyle/>
                     <a:p>
-                      <a:pPr indent="0" marL="0">
+                      <a:pPr marL="0" indent="0">
                         <a:buNone/>
                       </a:pPr>
                       <a:r>
@@ -14524,7 +13158,7 @@
                       </a:endParaRPr>
                     </a:p>
                   </a:txBody>
-                  <a:tcPr marL="91440" marR="91440" marT="45720" marB="45720" anchor="ctr">
+                  <a:tcPr anchor="ctr">
                     <a:lnL w="9525" cap="flat" cmpd="sng" algn="ctr">
                       <a:solidFill>
                         <a:srgbClr val="E3E9E7"/>
@@ -14566,6 +13200,11 @@
                     </a:solidFill>
                   </a:tcPr>
                 </a:tc>
+                <a:extLst>
+                  <a:ext uri="{0D108BD9-81ED-4DB2-BD59-A6C34878D82A}">
+                    <a16:rowId xmlns:a16="http://schemas.microsoft.com/office/drawing/2014/main" val="10001"/>
+                  </a:ext>
+                </a:extLst>
               </a:tr>
               <a:tr h="658368">
                 <a:tc>
@@ -14573,7 +13212,7 @@
                     <a:bodyPr/>
                     <a:lstStyle/>
                     <a:p>
-                      <a:pPr indent="0" marL="0">
+                      <a:pPr marL="0" indent="0">
                         <a:buNone/>
                       </a:pPr>
                       <a:r>
@@ -14594,7 +13233,7 @@
                       </a:endParaRPr>
                     </a:p>
                   </a:txBody>
-                  <a:tcPr marL="91440" marR="91440" marT="45720" marB="45720" anchor="ctr">
+                  <a:tcPr anchor="ctr">
                     <a:lnL w="9525" cap="flat" cmpd="sng" algn="ctr">
                       <a:solidFill>
                         <a:srgbClr val="E3E9E7"/>
@@ -14641,7 +13280,7 @@
                     <a:bodyPr/>
                     <a:lstStyle/>
                     <a:p>
-                      <a:pPr indent="0" marL="0">
+                      <a:pPr marL="0" indent="0">
                         <a:buNone/>
                       </a:pPr>
                       <a:r>
@@ -14662,7 +13301,7 @@
                       </a:endParaRPr>
                     </a:p>
                   </a:txBody>
-                  <a:tcPr marL="91440" marR="91440" marT="45720" marB="45720" anchor="ctr">
+                  <a:tcPr anchor="ctr">
                     <a:lnL w="9525" cap="flat" cmpd="sng" algn="ctr">
                       <a:solidFill>
                         <a:srgbClr val="E3E9E7"/>
@@ -14709,7 +13348,7 @@
                     <a:bodyPr/>
                     <a:lstStyle/>
                     <a:p>
-                      <a:pPr indent="0" marL="0">
+                      <a:pPr marL="0" indent="0">
                         <a:buNone/>
                       </a:pPr>
                       <a:r>
@@ -14730,7 +13369,7 @@
                       </a:endParaRPr>
                     </a:p>
                   </a:txBody>
-                  <a:tcPr marL="91440" marR="91440" marT="45720" marB="45720" anchor="ctr">
+                  <a:tcPr anchor="ctr">
                     <a:lnL w="9525" cap="flat" cmpd="sng" algn="ctr">
                       <a:solidFill>
                         <a:srgbClr val="E3E9E7"/>
@@ -14772,6 +13411,11 @@
                     </a:solidFill>
                   </a:tcPr>
                 </a:tc>
+                <a:extLst>
+                  <a:ext uri="{0D108BD9-81ED-4DB2-BD59-A6C34878D82A}">
+                    <a16:rowId xmlns:a16="http://schemas.microsoft.com/office/drawing/2014/main" val="10002"/>
+                  </a:ext>
+                </a:extLst>
               </a:tr>
               <a:tr h="658368">
                 <a:tc>
@@ -14779,7 +13423,7 @@
                     <a:bodyPr/>
                     <a:lstStyle/>
                     <a:p>
-                      <a:pPr indent="0" marL="0">
+                      <a:pPr marL="0" indent="0">
                         <a:buNone/>
                       </a:pPr>
                       <a:r>
@@ -14800,7 +13444,7 @@
                       </a:endParaRPr>
                     </a:p>
                   </a:txBody>
-                  <a:tcPr marL="91440" marR="91440" marT="45720" marB="45720" anchor="ctr">
+                  <a:tcPr anchor="ctr">
                     <a:lnL w="9525" cap="flat" cmpd="sng" algn="ctr">
                       <a:solidFill>
                         <a:srgbClr val="E3E9E7"/>
@@ -14847,7 +13491,7 @@
                     <a:bodyPr/>
                     <a:lstStyle/>
                     <a:p>
-                      <a:pPr indent="0" marL="0">
+                      <a:pPr marL="0" indent="0">
                         <a:buNone/>
                       </a:pPr>
                       <a:r>
@@ -14868,7 +13512,7 @@
                       </a:endParaRPr>
                     </a:p>
                   </a:txBody>
-                  <a:tcPr marL="91440" marR="91440" marT="45720" marB="45720" anchor="ctr">
+                  <a:tcPr anchor="ctr">
                     <a:lnL w="9525" cap="flat" cmpd="sng" algn="ctr">
                       <a:solidFill>
                         <a:srgbClr val="E3E9E7"/>
@@ -14915,7 +13559,7 @@
                     <a:bodyPr/>
                     <a:lstStyle/>
                     <a:p>
-                      <a:pPr indent="0" marL="0">
+                      <a:pPr marL="0" indent="0">
                         <a:buNone/>
                       </a:pPr>
                       <a:r>
@@ -14936,7 +13580,7 @@
                       </a:endParaRPr>
                     </a:p>
                   </a:txBody>
-                  <a:tcPr marL="91440" marR="91440" marT="45720" marB="45720" anchor="ctr">
+                  <a:tcPr anchor="ctr">
                     <a:lnL w="9525" cap="flat" cmpd="sng" algn="ctr">
                       <a:solidFill>
                         <a:srgbClr val="E3E9E7"/>
@@ -14978,6 +13622,11 @@
                     </a:solidFill>
                   </a:tcPr>
                 </a:tc>
+                <a:extLst>
+                  <a:ext uri="{0D108BD9-81ED-4DB2-BD59-A6C34878D82A}">
+                    <a16:rowId xmlns:a16="http://schemas.microsoft.com/office/drawing/2014/main" val="10003"/>
+                  </a:ext>
+                </a:extLst>
               </a:tr>
               <a:tr h="658368">
                 <a:tc>
@@ -14985,7 +13634,7 @@
                     <a:bodyPr/>
                     <a:lstStyle/>
                     <a:p>
-                      <a:pPr indent="0" marL="0">
+                      <a:pPr marL="0" indent="0">
                         <a:buNone/>
                       </a:pPr>
                       <a:r>
@@ -15006,7 +13655,7 @@
                       </a:endParaRPr>
                     </a:p>
                   </a:txBody>
-                  <a:tcPr marL="91440" marR="91440" marT="45720" marB="45720" anchor="ctr">
+                  <a:tcPr anchor="ctr">
                     <a:lnL w="9525" cap="flat" cmpd="sng" algn="ctr">
                       <a:solidFill>
                         <a:srgbClr val="E3E9E7"/>
@@ -15053,7 +13702,7 @@
                     <a:bodyPr/>
                     <a:lstStyle/>
                     <a:p>
-                      <a:pPr indent="0" marL="0">
+                      <a:pPr marL="0" indent="0">
                         <a:buNone/>
                       </a:pPr>
                       <a:r>
@@ -15074,7 +13723,7 @@
                       </a:endParaRPr>
                     </a:p>
                   </a:txBody>
-                  <a:tcPr marL="91440" marR="91440" marT="45720" marB="45720" anchor="ctr">
+                  <a:tcPr anchor="ctr">
                     <a:lnL w="9525" cap="flat" cmpd="sng" algn="ctr">
                       <a:solidFill>
                         <a:srgbClr val="E3E9E7"/>
@@ -15121,7 +13770,7 @@
                     <a:bodyPr/>
                     <a:lstStyle/>
                     <a:p>
-                      <a:pPr indent="0" marL="0">
+                      <a:pPr marL="0" indent="0">
                         <a:buNone/>
                       </a:pPr>
                       <a:r>
@@ -15142,7 +13791,7 @@
                       </a:endParaRPr>
                     </a:p>
                   </a:txBody>
-                  <a:tcPr marL="91440" marR="91440" marT="45720" marB="45720" anchor="ctr">
+                  <a:tcPr anchor="ctr">
                     <a:lnL w="9525" cap="flat" cmpd="sng" algn="ctr">
                       <a:solidFill>
                         <a:srgbClr val="E3E9E7"/>
@@ -15184,6 +13833,11 @@
                     </a:solidFill>
                   </a:tcPr>
                 </a:tc>
+                <a:extLst>
+                  <a:ext uri="{0D108BD9-81ED-4DB2-BD59-A6C34878D82A}">
+                    <a16:rowId xmlns:a16="http://schemas.microsoft.com/office/drawing/2014/main" val="10004"/>
+                  </a:ext>
+                </a:extLst>
               </a:tr>
               <a:tr h="658368">
                 <a:tc>
@@ -15191,7 +13845,7 @@
                     <a:bodyPr/>
                     <a:lstStyle/>
                     <a:p>
-                      <a:pPr indent="0" marL="0">
+                      <a:pPr marL="0" indent="0">
                         <a:buNone/>
                       </a:pPr>
                       <a:r>
@@ -15212,7 +13866,7 @@
                       </a:endParaRPr>
                     </a:p>
                   </a:txBody>
-                  <a:tcPr marL="91440" marR="91440" marT="45720" marB="45720" anchor="ctr">
+                  <a:tcPr anchor="ctr">
                     <a:lnL w="9525" cap="flat" cmpd="sng" algn="ctr">
                       <a:solidFill>
                         <a:srgbClr val="E3E9E7"/>
@@ -15259,7 +13913,7 @@
                     <a:bodyPr/>
                     <a:lstStyle/>
                     <a:p>
-                      <a:pPr indent="0" marL="0">
+                      <a:pPr marL="0" indent="0">
                         <a:buNone/>
                       </a:pPr>
                       <a:r>
@@ -15280,7 +13934,7 @@
                       </a:endParaRPr>
                     </a:p>
                   </a:txBody>
-                  <a:tcPr marL="91440" marR="91440" marT="45720" marB="45720" anchor="ctr">
+                  <a:tcPr anchor="ctr">
                     <a:lnL w="9525" cap="flat" cmpd="sng" algn="ctr">
                       <a:solidFill>
                         <a:srgbClr val="E3E9E7"/>
@@ -15327,7 +13981,7 @@
                     <a:bodyPr/>
                     <a:lstStyle/>
                     <a:p>
-                      <a:pPr indent="0" marL="0">
+                      <a:pPr marL="0" indent="0">
                         <a:buNone/>
                       </a:pPr>
                       <a:r>
@@ -15348,7 +14002,7 @@
                       </a:endParaRPr>
                     </a:p>
                   </a:txBody>
-                  <a:tcPr marL="91440" marR="91440" marT="45720" marB="45720" anchor="ctr">
+                  <a:tcPr anchor="ctr">
                     <a:lnL w="9525" cap="flat" cmpd="sng" algn="ctr">
                       <a:solidFill>
                         <a:srgbClr val="E3E9E7"/>
@@ -15390,89 +14044,16 @@
                     </a:solidFill>
                   </a:tcPr>
                 </a:tc>
+                <a:extLst>
+                  <a:ext uri="{0D108BD9-81ED-4DB2-BD59-A6C34878D82A}">
+                    <a16:rowId xmlns:a16="http://schemas.microsoft.com/office/drawing/2014/main" val="10005"/>
+                  </a:ext>
+                </a:extLst>
               </a:tr>
             </a:tbl>
           </a:graphicData>
         </a:graphic>
       </p:graphicFrame>
-      <p:sp>
-        <p:nvSpPr>
-          <p:cNvPr id="5" name="Text 2"/>
-          <p:cNvSpPr txBox="1"/>
-          <p:nvPr/>
-        </p:nvSpPr>
-        <p:spPr>
-          <a:xfrm>
-            <a:off x="548640" y="6473952"/>
-            <a:ext cx="4572000" cy="274320"/>
-          </a:xfrm>
-          <a:prstGeom prst="rect">
-            <a:avLst/>
-          </a:prstGeom>
-          <a:noFill/>
-          <a:ln/>
-        </p:spPr>
-        <p:txBody>
-          <a:bodyPr wrap="square" lIns="0" tIns="0" rIns="0" bIns="0" rtlCol="0" anchor="ctr"/>
-          <a:lstStyle/>
-          <a:p>
-            <a:pPr indent="0" marL="0">
-              <a:buNone/>
-            </a:pPr>
-            <a:r>
-              <a:rPr lang="en-US" sz="900" dirty="0">
-                <a:solidFill>
-                  <a:srgbClr val="6B7280"/>
-                </a:solidFill>
-                <a:latin typeface="Arial" pitchFamily="34" charset="0"/>
-                <a:ea typeface="Arial" pitchFamily="34" charset="-122"/>
-                <a:cs typeface="Arial" pitchFamily="34" charset="-120"/>
-              </a:rPr>
-              <a:t>Agenda Fácil</a:t>
-            </a:r>
-            <a:endParaRPr lang="en-US" sz="900" dirty="0"/>
-          </a:p>
-        </p:txBody>
-      </p:sp>
-      <p:sp>
-        <p:nvSpPr>
-          <p:cNvPr id="6" name="Text 3"/>
-          <p:cNvSpPr txBox="1"/>
-          <p:nvPr/>
-        </p:nvSpPr>
-        <p:spPr>
-          <a:xfrm>
-            <a:off x="11094415" y="6473952"/>
-            <a:ext cx="548640" cy="274320"/>
-          </a:xfrm>
-          <a:prstGeom prst="rect">
-            <a:avLst/>
-          </a:prstGeom>
-          <a:noFill/>
-          <a:ln/>
-        </p:spPr>
-        <p:txBody>
-          <a:bodyPr wrap="square" lIns="0" tIns="0" rIns="0" bIns="0" rtlCol="0" anchor="ctr"/>
-          <a:lstStyle/>
-          <a:p>
-            <a:pPr algn="r" indent="0" marL="0">
-              <a:buNone/>
-            </a:pPr>
-            <a:r>
-              <a:rPr lang="en-US" sz="900" dirty="0">
-                <a:solidFill>
-                  <a:srgbClr val="6B7280"/>
-                </a:solidFill>
-                <a:latin typeface="Arial" pitchFamily="34" charset="0"/>
-                <a:ea typeface="Arial" pitchFamily="34" charset="-122"/>
-                <a:cs typeface="Arial" pitchFamily="34" charset="-120"/>
-              </a:rPr>
-              <a:t>6</a:t>
-            </a:r>
-            <a:endParaRPr lang="en-US" sz="900" dirty="0"/>
-          </a:p>
-        </p:txBody>
-      </p:sp>
     </p:spTree>
   </p:cSld>
   <p:clrMapOvr>
@@ -15489,6 +14070,7 @@
         <a:solidFill>
           <a:srgbClr val="FFFFFF"/>
         </a:solidFill>
+        <a:effectLst/>
       </p:bgPr>
     </p:bg>
     <p:spTree>
@@ -15526,11 +14108,11 @@
           <a:bodyPr wrap="square" lIns="0" tIns="0" rIns="0" bIns="0" rtlCol="0" anchor="ctr"/>
           <a:lstStyle/>
           <a:p>
-            <a:pPr indent="0" marL="0">
-              <a:buNone/>
-            </a:pPr>
-            <a:r>
-              <a:rPr lang="en-US" sz="1200" b="1" spc="200" kern="0" dirty="0">
+            <a:pPr marL="0" indent="0">
+              <a:buNone/>
+            </a:pPr>
+            <a:r>
+              <a:rPr lang="en-US" sz="1200" b="1" kern="0" spc="200" dirty="0">
                 <a:solidFill>
                   <a:srgbClr val="028090"/>
                 </a:solidFill>
@@ -15565,7 +14147,7 @@
           <a:bodyPr wrap="square" lIns="0" tIns="0" rIns="0" bIns="0" rtlCol="0" anchor="ctr"/>
           <a:lstStyle/>
           <a:p>
-            <a:pPr indent="0" marL="0">
+            <a:pPr marL="0" indent="0">
               <a:buNone/>
             </a:pPr>
             <a:r>
@@ -15626,7 +14208,7 @@
           <a:bodyPr wrap="square" lIns="0" tIns="0" rIns="0" bIns="0" rtlCol="0" anchor="ctr"/>
           <a:lstStyle/>
           <a:p>
-            <a:pPr indent="0" marL="0">
+            <a:pPr marL="0" indent="0">
               <a:buNone/>
             </a:pPr>
             <a:r>
@@ -15665,11 +14247,11 @@
           <a:bodyPr wrap="square" lIns="0" tIns="0" rIns="0" bIns="0" rtlCol="0" anchor="ctr"/>
           <a:lstStyle/>
           <a:p>
-            <a:pPr indent="0" marL="0">
-              <a:buNone/>
-            </a:pPr>
-            <a:r>
-              <a:rPr lang="en-US" sz="1050" b="1" spc="100" kern="0" dirty="0">
+            <a:pPr marL="0" indent="0">
+              <a:buNone/>
+            </a:pPr>
+            <a:r>
+              <a:rPr lang="en-US" sz="1050" b="1" kern="0" spc="100" dirty="0">
                 <a:solidFill>
                   <a:srgbClr val="028090"/>
                 </a:solidFill>
@@ -15704,7 +14286,7 @@
           <a:bodyPr wrap="square" lIns="0" tIns="0" rIns="0" bIns="0" rtlCol="0" anchor="ctr"/>
           <a:lstStyle/>
           <a:p>
-            <a:pPr indent="0" marL="0">
+            <a:pPr marL="0" indent="0">
               <a:lnSpc>
                 <a:spcPts val="1500"/>
               </a:lnSpc>
@@ -15746,11 +14328,11 @@
           <a:bodyPr wrap="square" lIns="0" tIns="0" rIns="0" bIns="0" rtlCol="0" anchor="ctr"/>
           <a:lstStyle/>
           <a:p>
-            <a:pPr indent="0" marL="0">
-              <a:buNone/>
-            </a:pPr>
-            <a:r>
-              <a:rPr lang="en-US" sz="1050" b="1" spc="100" kern="0" dirty="0">
+            <a:pPr marL="0" indent="0">
+              <a:buNone/>
+            </a:pPr>
+            <a:r>
+              <a:rPr lang="en-US" sz="1050" b="1" kern="0" spc="100" dirty="0">
                 <a:solidFill>
                   <a:srgbClr val="028090"/>
                 </a:solidFill>
@@ -15785,7 +14367,7 @@
           <a:bodyPr wrap="square" lIns="0" tIns="0" rIns="0" bIns="0" rtlCol="0" anchor="ctr"/>
           <a:lstStyle/>
           <a:p>
-            <a:pPr indent="0" marL="0">
+            <a:pPr marL="0" indent="0">
               <a:lnSpc>
                 <a:spcPts val="1500"/>
               </a:lnSpc>
@@ -15827,11 +14409,11 @@
           <a:bodyPr wrap="square" lIns="0" tIns="0" rIns="0" bIns="0" rtlCol="0" anchor="ctr"/>
           <a:lstStyle/>
           <a:p>
-            <a:pPr indent="0" marL="0">
-              <a:buNone/>
-            </a:pPr>
-            <a:r>
-              <a:rPr lang="en-US" sz="1050" b="1" spc="100" kern="0" dirty="0">
+            <a:pPr marL="0" indent="0">
+              <a:buNone/>
+            </a:pPr>
+            <a:r>
+              <a:rPr lang="en-US" sz="1050" b="1" kern="0" spc="100" dirty="0">
                 <a:solidFill>
                   <a:srgbClr val="028090"/>
                 </a:solidFill>
@@ -15866,7 +14448,7 @@
           <a:bodyPr wrap="square" lIns="0" tIns="0" rIns="0" bIns="0" rtlCol="0" anchor="ctr"/>
           <a:lstStyle/>
           <a:p>
-            <a:pPr indent="0" marL="0">
+            <a:pPr marL="0" indent="0">
               <a:lnSpc>
                 <a:spcPts val="1500"/>
               </a:lnSpc>
@@ -15908,11 +14490,11 @@
           <a:bodyPr wrap="square" lIns="0" tIns="0" rIns="0" bIns="0" rtlCol="0" anchor="ctr"/>
           <a:lstStyle/>
           <a:p>
-            <a:pPr indent="0" marL="0">
-              <a:buNone/>
-            </a:pPr>
-            <a:r>
-              <a:rPr lang="en-US" sz="1050" b="1" spc="100" kern="0" dirty="0">
+            <a:pPr marL="0" indent="0">
+              <a:buNone/>
+            </a:pPr>
+            <a:r>
+              <a:rPr lang="en-US" sz="1050" b="1" kern="0" spc="100" dirty="0">
                 <a:solidFill>
                   <a:srgbClr val="028090"/>
                 </a:solidFill>
@@ -15947,7 +14529,7 @@
           <a:bodyPr wrap="square" lIns="0" tIns="0" rIns="0" bIns="0" rtlCol="0" anchor="ctr"/>
           <a:lstStyle/>
           <a:p>
-            <a:pPr indent="0" marL="0">
+            <a:pPr marL="0" indent="0">
               <a:lnSpc>
                 <a:spcPts val="1500"/>
               </a:lnSpc>
@@ -16011,7 +14593,7 @@
           <a:bodyPr wrap="square" lIns="0" tIns="0" rIns="0" bIns="0" rtlCol="0" anchor="ctr"/>
           <a:lstStyle/>
           <a:p>
-            <a:pPr indent="0" marL="0">
+            <a:pPr marL="0" indent="0">
               <a:buNone/>
             </a:pPr>
             <a:r>
@@ -16050,11 +14632,11 @@
           <a:bodyPr wrap="square" lIns="0" tIns="0" rIns="0" bIns="0" rtlCol="0" anchor="ctr"/>
           <a:lstStyle/>
           <a:p>
-            <a:pPr indent="0" marL="0">
-              <a:buNone/>
-            </a:pPr>
-            <a:r>
-              <a:rPr lang="en-US" sz="1050" b="1" spc="100" kern="0" dirty="0">
+            <a:pPr marL="0" indent="0">
+              <a:buNone/>
+            </a:pPr>
+            <a:r>
+              <a:rPr lang="en-US" sz="1050" b="1" kern="0" spc="100" dirty="0">
                 <a:solidFill>
                   <a:srgbClr val="7FB8B3"/>
                 </a:solidFill>
@@ -16089,7 +14671,7 @@
           <a:bodyPr wrap="square" lIns="0" tIns="0" rIns="0" bIns="0" rtlCol="0" anchor="ctr"/>
           <a:lstStyle/>
           <a:p>
-            <a:pPr indent="0" marL="0">
+            <a:pPr marL="0" indent="0">
               <a:lnSpc>
                 <a:spcPts val="1500"/>
               </a:lnSpc>
@@ -16131,11 +14713,11 @@
           <a:bodyPr wrap="square" lIns="0" tIns="0" rIns="0" bIns="0" rtlCol="0" anchor="ctr"/>
           <a:lstStyle/>
           <a:p>
-            <a:pPr indent="0" marL="0">
-              <a:buNone/>
-            </a:pPr>
-            <a:r>
-              <a:rPr lang="en-US" sz="1050" b="1" spc="100" kern="0" dirty="0">
+            <a:pPr marL="0" indent="0">
+              <a:buNone/>
+            </a:pPr>
+            <a:r>
+              <a:rPr lang="en-US" sz="1050" b="1" kern="0" spc="100" dirty="0">
                 <a:solidFill>
                   <a:srgbClr val="7FB8B3"/>
                 </a:solidFill>
@@ -16170,7 +14752,7 @@
           <a:bodyPr wrap="square" lIns="0" tIns="0" rIns="0" bIns="0" rtlCol="0" anchor="ctr"/>
           <a:lstStyle/>
           <a:p>
-            <a:pPr indent="0" marL="0">
+            <a:pPr marL="0" indent="0">
               <a:lnSpc>
                 <a:spcPts val="1500"/>
               </a:lnSpc>
@@ -16212,11 +14794,11 @@
           <a:bodyPr wrap="square" lIns="0" tIns="0" rIns="0" bIns="0" rtlCol="0" anchor="ctr"/>
           <a:lstStyle/>
           <a:p>
-            <a:pPr indent="0" marL="0">
-              <a:buNone/>
-            </a:pPr>
-            <a:r>
-              <a:rPr lang="en-US" sz="1050" b="1" spc="100" kern="0" dirty="0">
+            <a:pPr marL="0" indent="0">
+              <a:buNone/>
+            </a:pPr>
+            <a:r>
+              <a:rPr lang="en-US" sz="1050" b="1" kern="0" spc="100" dirty="0">
                 <a:solidFill>
                   <a:srgbClr val="7FB8B3"/>
                 </a:solidFill>
@@ -16251,7 +14833,7 @@
           <a:bodyPr wrap="square" lIns="0" tIns="0" rIns="0" bIns="0" rtlCol="0" anchor="ctr"/>
           <a:lstStyle/>
           <a:p>
-            <a:pPr indent="0" marL="0">
+            <a:pPr marL="0" indent="0">
               <a:lnSpc>
                 <a:spcPts val="1500"/>
               </a:lnSpc>
@@ -16293,11 +14875,11 @@
           <a:bodyPr wrap="square" lIns="0" tIns="0" rIns="0" bIns="0" rtlCol="0" anchor="ctr"/>
           <a:lstStyle/>
           <a:p>
-            <a:pPr indent="0" marL="0">
-              <a:buNone/>
-            </a:pPr>
-            <a:r>
-              <a:rPr lang="en-US" sz="1050" b="1" spc="100" kern="0" dirty="0">
+            <a:pPr marL="0" indent="0">
+              <a:buNone/>
+            </a:pPr>
+            <a:r>
+              <a:rPr lang="en-US" sz="1050" b="1" kern="0" spc="100" dirty="0">
                 <a:solidFill>
                   <a:srgbClr val="7FB8B3"/>
                 </a:solidFill>
@@ -16332,7 +14914,7 @@
           <a:bodyPr wrap="square" lIns="0" tIns="0" rIns="0" bIns="0" rtlCol="0" anchor="ctr"/>
           <a:lstStyle/>
           <a:p>
-            <a:pPr indent="0" marL="0">
+            <a:pPr marL="0" indent="0">
               <a:lnSpc>
                 <a:spcPts val="1500"/>
               </a:lnSpc>
@@ -16350,84 +14932,6 @@
               <a:t>Se detecta y corrige temprano, no al final.</a:t>
             </a:r>
             <a:endParaRPr lang="en-US" sz="1200" dirty="0"/>
-          </a:p>
-        </p:txBody>
-      </p:sp>
-      <p:sp>
-        <p:nvSpPr>
-          <p:cNvPr id="24" name="Text 22"/>
-          <p:cNvSpPr txBox="1"/>
-          <p:nvPr/>
-        </p:nvSpPr>
-        <p:spPr>
-          <a:xfrm>
-            <a:off x="548640" y="6473952"/>
-            <a:ext cx="4572000" cy="274320"/>
-          </a:xfrm>
-          <a:prstGeom prst="rect">
-            <a:avLst/>
-          </a:prstGeom>
-          <a:noFill/>
-          <a:ln/>
-        </p:spPr>
-        <p:txBody>
-          <a:bodyPr wrap="square" lIns="0" tIns="0" rIns="0" bIns="0" rtlCol="0" anchor="ctr"/>
-          <a:lstStyle/>
-          <a:p>
-            <a:pPr indent="0" marL="0">
-              <a:buNone/>
-            </a:pPr>
-            <a:r>
-              <a:rPr lang="en-US" sz="900" dirty="0">
-                <a:solidFill>
-                  <a:srgbClr val="6B7280"/>
-                </a:solidFill>
-                <a:latin typeface="Arial" pitchFamily="34" charset="0"/>
-                <a:ea typeface="Arial" pitchFamily="34" charset="-122"/>
-                <a:cs typeface="Arial" pitchFamily="34" charset="-120"/>
-              </a:rPr>
-              <a:t>Agenda Fácil</a:t>
-            </a:r>
-            <a:endParaRPr lang="en-US" sz="900" dirty="0"/>
-          </a:p>
-        </p:txBody>
-      </p:sp>
-      <p:sp>
-        <p:nvSpPr>
-          <p:cNvPr id="25" name="Text 23"/>
-          <p:cNvSpPr txBox="1"/>
-          <p:nvPr/>
-        </p:nvSpPr>
-        <p:spPr>
-          <a:xfrm>
-            <a:off x="11094415" y="6473952"/>
-            <a:ext cx="548640" cy="274320"/>
-          </a:xfrm>
-          <a:prstGeom prst="rect">
-            <a:avLst/>
-          </a:prstGeom>
-          <a:noFill/>
-          <a:ln/>
-        </p:spPr>
-        <p:txBody>
-          <a:bodyPr wrap="square" lIns="0" tIns="0" rIns="0" bIns="0" rtlCol="0" anchor="ctr"/>
-          <a:lstStyle/>
-          <a:p>
-            <a:pPr algn="r" indent="0" marL="0">
-              <a:buNone/>
-            </a:pPr>
-            <a:r>
-              <a:rPr lang="en-US" sz="900" dirty="0">
-                <a:solidFill>
-                  <a:srgbClr val="6B7280"/>
-                </a:solidFill>
-                <a:latin typeface="Arial" pitchFamily="34" charset="0"/>
-                <a:ea typeface="Arial" pitchFamily="34" charset="-122"/>
-                <a:cs typeface="Arial" pitchFamily="34" charset="-120"/>
-              </a:rPr>
-              <a:t>7</a:t>
-            </a:r>
-            <a:endParaRPr lang="en-US" sz="900" dirty="0"/>
           </a:p>
         </p:txBody>
       </p:sp>
@@ -16447,6 +14951,7 @@
         <a:solidFill>
           <a:srgbClr val="F4F8F7"/>
         </a:solidFill>
+        <a:effectLst/>
       </p:bgPr>
     </p:bg>
     <p:spTree>
@@ -16484,11 +14989,11 @@
           <a:bodyPr wrap="square" lIns="0" tIns="0" rIns="0" bIns="0" rtlCol="0" anchor="ctr"/>
           <a:lstStyle/>
           <a:p>
-            <a:pPr indent="0" marL="0">
-              <a:buNone/>
-            </a:pPr>
-            <a:r>
-              <a:rPr lang="en-US" sz="1200" b="1" spc="200" kern="0" dirty="0">
+            <a:pPr marL="0" indent="0">
+              <a:buNone/>
+            </a:pPr>
+            <a:r>
+              <a:rPr lang="en-US" sz="1200" b="1" kern="0" spc="200" dirty="0">
                 <a:solidFill>
                   <a:srgbClr val="028090"/>
                 </a:solidFill>
@@ -16523,7 +15028,7 @@
           <a:bodyPr wrap="square" lIns="0" tIns="0" rIns="0" bIns="0" rtlCol="0" anchor="ctr"/>
           <a:lstStyle/>
           <a:p>
-            <a:pPr indent="0" marL="0">
+            <a:pPr marL="0" indent="0">
               <a:buNone/>
             </a:pPr>
             <a:r>
@@ -16562,7 +15067,7 @@
           <a:bodyPr wrap="square" lIns="0" tIns="0" rIns="0" bIns="0" rtlCol="0" anchor="ctr"/>
           <a:lstStyle/>
           <a:p>
-            <a:pPr indent="0" marL="0">
+            <a:pPr marL="0" indent="0">
               <a:lnSpc>
                 <a:spcPts val="2000"/>
               </a:lnSpc>
@@ -16646,7 +15151,7 @@
           <a:bodyPr wrap="square" lIns="0" tIns="0" rIns="0" bIns="0" rtlCol="0" anchor="ctr"/>
           <a:lstStyle/>
           <a:p>
-            <a:pPr algn="ctr" indent="0" marL="0">
+            <a:pPr marL="0" indent="0" algn="ctr">
               <a:buNone/>
             </a:pPr>
             <a:r>
@@ -16685,7 +15190,7 @@
           <a:bodyPr wrap="square" lIns="0" tIns="0" rIns="0" bIns="0" rtlCol="0" anchor="ctr"/>
           <a:lstStyle/>
           <a:p>
-            <a:pPr indent="0" marL="0">
+            <a:pPr marL="0" indent="0">
               <a:buNone/>
             </a:pPr>
             <a:r>
@@ -16724,7 +15229,7 @@
           <a:bodyPr wrap="square" lIns="0" tIns="0" rIns="0" bIns="0" rtlCol="0" anchor="ctr"/>
           <a:lstStyle/>
           <a:p>
-            <a:pPr indent="0" marL="0">
+            <a:pPr marL="0" indent="0">
               <a:lnSpc>
                 <a:spcPts val="1600"/>
               </a:lnSpc>
@@ -16808,7 +15313,7 @@
           <a:bodyPr wrap="square" lIns="0" tIns="0" rIns="0" bIns="0" rtlCol="0" anchor="ctr"/>
           <a:lstStyle/>
           <a:p>
-            <a:pPr algn="ctr" indent="0" marL="0">
+            <a:pPr marL="0" indent="0" algn="ctr">
               <a:buNone/>
             </a:pPr>
             <a:r>
@@ -16847,7 +15352,7 @@
           <a:bodyPr wrap="square" lIns="0" tIns="0" rIns="0" bIns="0" rtlCol="0" anchor="ctr"/>
           <a:lstStyle/>
           <a:p>
-            <a:pPr indent="0" marL="0">
+            <a:pPr marL="0" indent="0">
               <a:buNone/>
             </a:pPr>
             <a:r>
@@ -16886,7 +15391,7 @@
           <a:bodyPr wrap="square" lIns="0" tIns="0" rIns="0" bIns="0" rtlCol="0" anchor="ctr"/>
           <a:lstStyle/>
           <a:p>
-            <a:pPr indent="0" marL="0">
+            <a:pPr marL="0" indent="0">
               <a:lnSpc>
                 <a:spcPts val="1600"/>
               </a:lnSpc>
@@ -16970,7 +15475,7 @@
           <a:bodyPr wrap="square" lIns="0" tIns="0" rIns="0" bIns="0" rtlCol="0" anchor="ctr"/>
           <a:lstStyle/>
           <a:p>
-            <a:pPr algn="ctr" indent="0" marL="0">
+            <a:pPr marL="0" indent="0" algn="ctr">
               <a:buNone/>
             </a:pPr>
             <a:r>
@@ -17009,7 +15514,7 @@
           <a:bodyPr wrap="square" lIns="0" tIns="0" rIns="0" bIns="0" rtlCol="0" anchor="ctr"/>
           <a:lstStyle/>
           <a:p>
-            <a:pPr indent="0" marL="0">
+            <a:pPr marL="0" indent="0">
               <a:buNone/>
             </a:pPr>
             <a:r>
@@ -17048,7 +15553,7 @@
           <a:bodyPr wrap="square" lIns="0" tIns="0" rIns="0" bIns="0" rtlCol="0" anchor="ctr"/>
           <a:lstStyle/>
           <a:p>
-            <a:pPr indent="0" marL="0">
+            <a:pPr marL="0" indent="0">
               <a:lnSpc>
                 <a:spcPts val="1600"/>
               </a:lnSpc>
@@ -17066,84 +15571,6 @@
               <a:t>Con una sola persona a cargo de todo, es más manejable dividir el trabajo en sprints que en fases gigantes.</a:t>
             </a:r>
             <a:endParaRPr lang="en-US" sz="1200" dirty="0"/>
-          </a:p>
-        </p:txBody>
-      </p:sp>
-      <p:sp>
-        <p:nvSpPr>
-          <p:cNvPr id="20" name="Text 18"/>
-          <p:cNvSpPr txBox="1"/>
-          <p:nvPr/>
-        </p:nvSpPr>
-        <p:spPr>
-          <a:xfrm>
-            <a:off x="548640" y="6473952"/>
-            <a:ext cx="4572000" cy="274320"/>
-          </a:xfrm>
-          <a:prstGeom prst="rect">
-            <a:avLst/>
-          </a:prstGeom>
-          <a:noFill/>
-          <a:ln/>
-        </p:spPr>
-        <p:txBody>
-          <a:bodyPr wrap="square" lIns="0" tIns="0" rIns="0" bIns="0" rtlCol="0" anchor="ctr"/>
-          <a:lstStyle/>
-          <a:p>
-            <a:pPr indent="0" marL="0">
-              <a:buNone/>
-            </a:pPr>
-            <a:r>
-              <a:rPr lang="en-US" sz="900" dirty="0">
-                <a:solidFill>
-                  <a:srgbClr val="6B7280"/>
-                </a:solidFill>
-                <a:latin typeface="Arial" pitchFamily="34" charset="0"/>
-                <a:ea typeface="Arial" pitchFamily="34" charset="-122"/>
-                <a:cs typeface="Arial" pitchFamily="34" charset="-120"/>
-              </a:rPr>
-              <a:t>Agenda Fácil</a:t>
-            </a:r>
-            <a:endParaRPr lang="en-US" sz="900" dirty="0"/>
-          </a:p>
-        </p:txBody>
-      </p:sp>
-      <p:sp>
-        <p:nvSpPr>
-          <p:cNvPr id="21" name="Text 19"/>
-          <p:cNvSpPr txBox="1"/>
-          <p:nvPr/>
-        </p:nvSpPr>
-        <p:spPr>
-          <a:xfrm>
-            <a:off x="11094415" y="6473952"/>
-            <a:ext cx="548640" cy="274320"/>
-          </a:xfrm>
-          <a:prstGeom prst="rect">
-            <a:avLst/>
-          </a:prstGeom>
-          <a:noFill/>
-          <a:ln/>
-        </p:spPr>
-        <p:txBody>
-          <a:bodyPr wrap="square" lIns="0" tIns="0" rIns="0" bIns="0" rtlCol="0" anchor="ctr"/>
-          <a:lstStyle/>
-          <a:p>
-            <a:pPr algn="r" indent="0" marL="0">
-              <a:buNone/>
-            </a:pPr>
-            <a:r>
-              <a:rPr lang="en-US" sz="900" dirty="0">
-                <a:solidFill>
-                  <a:srgbClr val="6B7280"/>
-                </a:solidFill>
-                <a:latin typeface="Arial" pitchFamily="34" charset="0"/>
-                <a:ea typeface="Arial" pitchFamily="34" charset="-122"/>
-                <a:cs typeface="Arial" pitchFamily="34" charset="-120"/>
-              </a:rPr>
-              <a:t>8</a:t>
-            </a:r>
-            <a:endParaRPr lang="en-US" sz="900" dirty="0"/>
           </a:p>
         </p:txBody>
       </p:sp>
@@ -17448,4 +15875,299 @@
     </a:ext>
   </a:extLst>
 </a:theme>
+</file>
+
+<file path=ppt/theme/theme2.xml><?xml version="1.0" encoding="utf-8"?>
+<a:theme xmlns:a="http://schemas.openxmlformats.org/drawingml/2006/main" name="Tema de Office">
+  <a:themeElements>
+    <a:clrScheme name="Office">
+      <a:dk1>
+        <a:sysClr val="windowText" lastClr="000000"/>
+      </a:dk1>
+      <a:lt1>
+        <a:sysClr val="window" lastClr="FFFFFF"/>
+      </a:lt1>
+      <a:dk2>
+        <a:srgbClr val="44546A"/>
+      </a:dk2>
+      <a:lt2>
+        <a:srgbClr val="E7E6E6"/>
+      </a:lt2>
+      <a:accent1>
+        <a:srgbClr val="4472C4"/>
+      </a:accent1>
+      <a:accent2>
+        <a:srgbClr val="ED7D31"/>
+      </a:accent2>
+      <a:accent3>
+        <a:srgbClr val="A5A5A5"/>
+      </a:accent3>
+      <a:accent4>
+        <a:srgbClr val="FFC000"/>
+      </a:accent4>
+      <a:accent5>
+        <a:srgbClr val="5B9BD5"/>
+      </a:accent5>
+      <a:accent6>
+        <a:srgbClr val="70AD47"/>
+      </a:accent6>
+      <a:hlink>
+        <a:srgbClr val="0563C1"/>
+      </a:hlink>
+      <a:folHlink>
+        <a:srgbClr val="954F72"/>
+      </a:folHlink>
+    </a:clrScheme>
+    <a:fontScheme name="Office">
+      <a:majorFont>
+        <a:latin typeface="Calibri Light" panose="020F0302020204030204"/>
+        <a:ea typeface=""/>
+        <a:cs typeface=""/>
+        <a:font script="Jpan" typeface="游ゴシック Light"/>
+        <a:font script="Hang" typeface="맑은 고딕"/>
+        <a:font script="Hans" typeface="等线 Light"/>
+        <a:font script="Hant" typeface="新細明體"/>
+        <a:font script="Arab" typeface="Times New Roman"/>
+        <a:font script="Hebr" typeface="Times New Roman"/>
+        <a:font script="Thai" typeface="Angsana New"/>
+        <a:font script="Ethi" typeface="Nyala"/>
+        <a:font script="Beng" typeface="Vrinda"/>
+        <a:font script="Gujr" typeface="Shruti"/>
+        <a:font script="Khmr" typeface="MoolBoran"/>
+        <a:font script="Knda" typeface="Tunga"/>
+        <a:font script="Guru" typeface="Raavi"/>
+        <a:font script="Cans" typeface="Euphemia"/>
+        <a:font script="Cher" typeface="Plantagenet Cherokee"/>
+        <a:font script="Yiii" typeface="Microsoft Yi Baiti"/>
+        <a:font script="Tibt" typeface="Microsoft Himalaya"/>
+        <a:font script="Thaa" typeface="MV Boli"/>
+        <a:font script="Deva" typeface="Mangal"/>
+        <a:font script="Telu" typeface="Gautami"/>
+        <a:font script="Taml" typeface="Latha"/>
+        <a:font script="Syrc" typeface="Estrangelo Edessa"/>
+        <a:font script="Orya" typeface="Kalinga"/>
+        <a:font script="Mlym" typeface="Kartika"/>
+        <a:font script="Laoo" typeface="DokChampa"/>
+        <a:font script="Sinh" typeface="Iskoola Pota"/>
+        <a:font script="Mong" typeface="Mongolian Baiti"/>
+        <a:font script="Viet" typeface="Times New Roman"/>
+        <a:font script="Uigh" typeface="Microsoft Uighur"/>
+        <a:font script="Geor" typeface="Sylfaen"/>
+        <a:font script="Armn" typeface="Arial"/>
+        <a:font script="Bugi" typeface="Leelawadee UI"/>
+        <a:font script="Bopo" typeface="Microsoft JhengHei"/>
+        <a:font script="Java" typeface="Javanese Text"/>
+        <a:font script="Lisu" typeface="Segoe UI"/>
+        <a:font script="Mymr" typeface="Myanmar Text"/>
+        <a:font script="Nkoo" typeface="Ebrima"/>
+        <a:font script="Olck" typeface="Nirmala UI"/>
+        <a:font script="Osma" typeface="Ebrima"/>
+        <a:font script="Phag" typeface="Phagspa"/>
+        <a:font script="Syrn" typeface="Estrangelo Edessa"/>
+        <a:font script="Syrj" typeface="Estrangelo Edessa"/>
+        <a:font script="Syre" typeface="Estrangelo Edessa"/>
+        <a:font script="Sora" typeface="Nirmala UI"/>
+        <a:font script="Tale" typeface="Microsoft Tai Le"/>
+        <a:font script="Talu" typeface="Microsoft New Tai Lue"/>
+        <a:font script="Tfng" typeface="Ebrima"/>
+      </a:majorFont>
+      <a:minorFont>
+        <a:latin typeface="Calibri" panose="020F0502020204030204"/>
+        <a:ea typeface=""/>
+        <a:cs typeface=""/>
+        <a:font script="Jpan" typeface="游ゴシック"/>
+        <a:font script="Hang" typeface="맑은 고딕"/>
+        <a:font script="Hans" typeface="等线"/>
+        <a:font script="Hant" typeface="新細明體"/>
+        <a:font script="Arab" typeface="Arial"/>
+        <a:font script="Hebr" typeface="Arial"/>
+        <a:font script="Thai" typeface="Cordia New"/>
+        <a:font script="Ethi" typeface="Nyala"/>
+        <a:font script="Beng" typeface="Vrinda"/>
+        <a:font script="Gujr" typeface="Shruti"/>
+        <a:font script="Khmr" typeface="DaunPenh"/>
+        <a:font script="Knda" typeface="Tunga"/>
+        <a:font script="Guru" typeface="Raavi"/>
+        <a:font script="Cans" typeface="Euphemia"/>
+        <a:font script="Cher" typeface="Plantagenet Cherokee"/>
+        <a:font script="Yiii" typeface="Microsoft Yi Baiti"/>
+        <a:font script="Tibt" typeface="Microsoft Himalaya"/>
+        <a:font script="Thaa" typeface="MV Boli"/>
+        <a:font script="Deva" typeface="Mangal"/>
+        <a:font script="Telu" typeface="Gautami"/>
+        <a:font script="Taml" typeface="Latha"/>
+        <a:font script="Syrc" typeface="Estrangelo Edessa"/>
+        <a:font script="Orya" typeface="Kalinga"/>
+        <a:font script="Mlym" typeface="Kartika"/>
+        <a:font script="Laoo" typeface="DokChampa"/>
+        <a:font script="Sinh" typeface="Iskoola Pota"/>
+        <a:font script="Mong" typeface="Mongolian Baiti"/>
+        <a:font script="Viet" typeface="Arial"/>
+        <a:font script="Uigh" typeface="Microsoft Uighur"/>
+        <a:font script="Geor" typeface="Sylfaen"/>
+        <a:font script="Armn" typeface="Arial"/>
+        <a:font script="Bugi" typeface="Leelawadee UI"/>
+        <a:font script="Bopo" typeface="Microsoft JhengHei"/>
+        <a:font script="Java" typeface="Javanese Text"/>
+        <a:font script="Lisu" typeface="Segoe UI"/>
+        <a:font script="Mymr" typeface="Myanmar Text"/>
+        <a:font script="Nkoo" typeface="Ebrima"/>
+        <a:font script="Olck" typeface="Nirmala UI"/>
+        <a:font script="Osma" typeface="Ebrima"/>
+        <a:font script="Phag" typeface="Phagspa"/>
+        <a:font script="Syrn" typeface="Estrangelo Edessa"/>
+        <a:font script="Syrj" typeface="Estrangelo Edessa"/>
+        <a:font script="Syre" typeface="Estrangelo Edessa"/>
+        <a:font script="Sora" typeface="Nirmala UI"/>
+        <a:font script="Tale" typeface="Microsoft Tai Le"/>
+        <a:font script="Talu" typeface="Microsoft New Tai Lue"/>
+        <a:font script="Tfng" typeface="Ebrima"/>
+      </a:minorFont>
+    </a:fontScheme>
+    <a:fmtScheme name="Office">
+      <a:fillStyleLst>
+        <a:solidFill>
+          <a:schemeClr val="phClr"/>
+        </a:solidFill>
+        <a:gradFill rotWithShape="1">
+          <a:gsLst>
+            <a:gs pos="0">
+              <a:schemeClr val="phClr">
+                <a:lumMod val="110000"/>
+                <a:satMod val="105000"/>
+                <a:tint val="67000"/>
+              </a:schemeClr>
+            </a:gs>
+            <a:gs pos="50000">
+              <a:schemeClr val="phClr">
+                <a:lumMod val="105000"/>
+                <a:satMod val="103000"/>
+                <a:tint val="73000"/>
+              </a:schemeClr>
+            </a:gs>
+            <a:gs pos="100000">
+              <a:schemeClr val="phClr">
+                <a:lumMod val="105000"/>
+                <a:satMod val="109000"/>
+                <a:tint val="81000"/>
+              </a:schemeClr>
+            </a:gs>
+          </a:gsLst>
+          <a:lin ang="5400000" scaled="0"/>
+        </a:gradFill>
+        <a:gradFill rotWithShape="1">
+          <a:gsLst>
+            <a:gs pos="0">
+              <a:schemeClr val="phClr">
+                <a:satMod val="103000"/>
+                <a:lumMod val="102000"/>
+                <a:tint val="94000"/>
+              </a:schemeClr>
+            </a:gs>
+            <a:gs pos="50000">
+              <a:schemeClr val="phClr">
+                <a:satMod val="110000"/>
+                <a:lumMod val="100000"/>
+                <a:shade val="100000"/>
+              </a:schemeClr>
+            </a:gs>
+            <a:gs pos="100000">
+              <a:schemeClr val="phClr">
+                <a:lumMod val="99000"/>
+                <a:satMod val="120000"/>
+                <a:shade val="78000"/>
+              </a:schemeClr>
+            </a:gs>
+          </a:gsLst>
+          <a:lin ang="5400000" scaled="0"/>
+        </a:gradFill>
+      </a:fillStyleLst>
+      <a:lnStyleLst>
+        <a:ln w="6350" cap="flat" cmpd="sng" algn="ctr">
+          <a:solidFill>
+            <a:schemeClr val="phClr"/>
+          </a:solidFill>
+          <a:prstDash val="solid"/>
+          <a:miter lim="800000"/>
+        </a:ln>
+        <a:ln w="12700" cap="flat" cmpd="sng" algn="ctr">
+          <a:solidFill>
+            <a:schemeClr val="phClr"/>
+          </a:solidFill>
+          <a:prstDash val="solid"/>
+          <a:miter lim="800000"/>
+        </a:ln>
+        <a:ln w="19050" cap="flat" cmpd="sng" algn="ctr">
+          <a:solidFill>
+            <a:schemeClr val="phClr"/>
+          </a:solidFill>
+          <a:prstDash val="solid"/>
+          <a:miter lim="800000"/>
+        </a:ln>
+      </a:lnStyleLst>
+      <a:effectStyleLst>
+        <a:effectStyle>
+          <a:effectLst/>
+        </a:effectStyle>
+        <a:effectStyle>
+          <a:effectLst/>
+        </a:effectStyle>
+        <a:effectStyle>
+          <a:effectLst>
+            <a:outerShdw blurRad="57150" dist="19050" dir="5400000" algn="ctr" rotWithShape="0">
+              <a:srgbClr val="000000">
+                <a:alpha val="63000"/>
+              </a:srgbClr>
+            </a:outerShdw>
+          </a:effectLst>
+        </a:effectStyle>
+      </a:effectStyleLst>
+      <a:bgFillStyleLst>
+        <a:solidFill>
+          <a:schemeClr val="phClr"/>
+        </a:solidFill>
+        <a:solidFill>
+          <a:schemeClr val="phClr">
+            <a:tint val="95000"/>
+            <a:satMod val="170000"/>
+          </a:schemeClr>
+        </a:solidFill>
+        <a:gradFill rotWithShape="1">
+          <a:gsLst>
+            <a:gs pos="0">
+              <a:schemeClr val="phClr">
+                <a:tint val="93000"/>
+                <a:satMod val="150000"/>
+                <a:shade val="98000"/>
+                <a:lumMod val="102000"/>
+              </a:schemeClr>
+            </a:gs>
+            <a:gs pos="50000">
+              <a:schemeClr val="phClr">
+                <a:tint val="98000"/>
+                <a:satMod val="130000"/>
+                <a:shade val="90000"/>
+                <a:lumMod val="103000"/>
+              </a:schemeClr>
+            </a:gs>
+            <a:gs pos="100000">
+              <a:schemeClr val="phClr">
+                <a:shade val="63000"/>
+                <a:satMod val="120000"/>
+              </a:schemeClr>
+            </a:gs>
+          </a:gsLst>
+          <a:lin ang="5400000" scaled="0"/>
+        </a:gradFill>
+      </a:bgFillStyleLst>
+    </a:fmtScheme>
+  </a:themeElements>
+  <a:objectDefaults/>
+  <a:extraClrSchemeLst/>
+  <a:extLst>
+    <a:ext uri="{05A4C25C-085E-4340-85A3-A5531E510DB2}">
+      <thm15:themeFamily xmlns:thm15="http://schemas.microsoft.com/office/thememl/2012/main" name="Office Theme" id="{62F939B6-93AF-4DB8-9C6B-D6C7DFDC589F}" vid="{4A3C46E8-61CC-4603-A589-7422A47A8E4A}"/>
+    </a:ext>
+  </a:extLst>
+</a:theme>
 </file>